--- a/jurimetria/aulas/aula_01/slides/aula1_bloco1_jurimetria.pptx
+++ b/jurimetria/aulas/aula_01/slides/aula1_bloco1_jurimetria.pptx
@@ -306,7 +306,7 @@
       </p15:sldGuideLst>
     </p:ext>
     <p:ext uri="GoogleSlidesCustomDataVersion2">
-      <go:slidesCustomData xmlns:go="http://customooxmlschemas.google.com/" r:id="rId56" roundtripDataSignature="AMtx7mj3UvtInmSo4jnXEd4UTpQYdXDkLg=="/>
+      <go:slidesCustomData xmlns:go="http://customooxmlschemas.google.com/" r:id="rId56" roundtripDataSignature="AMtx7mjHKX+VEjHDruAr8tuIzsWadxQTRA=="/>
     </p:ext>
   </p:extLst>
 </p:presentation>
@@ -5312,7 +5312,7 @@
   <p:cSld>
     <p:spTree>
       <p:nvGrpSpPr>
-        <p:cNvPr id="645" name="Shape 645"/>
+        <p:cNvPr id="646" name="Shape 646"/>
         <p:cNvGrpSpPr/>
         <p:nvPr/>
       </p:nvGrpSpPr>
@@ -5326,7 +5326,7 @@
       </p:grpSpPr>
       <p:sp>
         <p:nvSpPr>
-          <p:cNvPr id="646" name="Google Shape;646;p24:notes"/>
+          <p:cNvPr id="647" name="Google Shape;647;p24:notes"/>
           <p:cNvSpPr txBox="1"/>
           <p:nvPr>
             <p:ph idx="1" type="body"/>
@@ -5365,7 +5365,7 @@
       </p:sp>
       <p:sp>
         <p:nvSpPr>
-          <p:cNvPr id="647" name="Google Shape;647;p24:notes"/>
+          <p:cNvPr id="648" name="Google Shape;648;p24:notes"/>
           <p:cNvSpPr/>
           <p:nvPr>
             <p:ph idx="2" type="sldImg"/>
@@ -5411,7 +5411,7 @@
   <p:cSld>
     <p:spTree>
       <p:nvGrpSpPr>
-        <p:cNvPr id="667" name="Shape 667"/>
+        <p:cNvPr id="669" name="Shape 669"/>
         <p:cNvGrpSpPr/>
         <p:nvPr/>
       </p:nvGrpSpPr>
@@ -5425,7 +5425,7 @@
       </p:grpSpPr>
       <p:sp>
         <p:nvSpPr>
-          <p:cNvPr id="668" name="Google Shape;668;p44:notes"/>
+          <p:cNvPr id="670" name="Google Shape;670;p44:notes"/>
           <p:cNvSpPr txBox="1"/>
           <p:nvPr>
             <p:ph idx="1" type="body"/>
@@ -5464,7 +5464,7 @@
       </p:sp>
       <p:sp>
         <p:nvSpPr>
-          <p:cNvPr id="669" name="Google Shape;669;p44:notes"/>
+          <p:cNvPr id="671" name="Google Shape;671;p44:notes"/>
           <p:cNvSpPr/>
           <p:nvPr>
             <p:ph idx="2" type="sldImg"/>
@@ -5510,7 +5510,7 @@
   <p:cSld>
     <p:spTree>
       <p:nvGrpSpPr>
-        <p:cNvPr id="706" name="Shape 706"/>
+        <p:cNvPr id="709" name="Shape 709"/>
         <p:cNvGrpSpPr/>
         <p:nvPr/>
       </p:nvGrpSpPr>
@@ -5524,7 +5524,7 @@
       </p:grpSpPr>
       <p:sp>
         <p:nvSpPr>
-          <p:cNvPr id="707" name="Google Shape;707;p45:notes"/>
+          <p:cNvPr id="710" name="Google Shape;710;p45:notes"/>
           <p:cNvSpPr txBox="1"/>
           <p:nvPr>
             <p:ph idx="1" type="body"/>
@@ -5563,7 +5563,7 @@
       </p:sp>
       <p:sp>
         <p:nvSpPr>
-          <p:cNvPr id="708" name="Google Shape;708;p45:notes"/>
+          <p:cNvPr id="711" name="Google Shape;711;p45:notes"/>
           <p:cNvSpPr/>
           <p:nvPr>
             <p:ph idx="2" type="sldImg"/>
@@ -5609,7 +5609,7 @@
   <p:cSld>
     <p:spTree>
       <p:nvGrpSpPr>
-        <p:cNvPr id="754" name="Shape 754"/>
+        <p:cNvPr id="758" name="Shape 758"/>
         <p:cNvGrpSpPr/>
         <p:nvPr/>
       </p:nvGrpSpPr>
@@ -5623,7 +5623,7 @@
       </p:grpSpPr>
       <p:sp>
         <p:nvSpPr>
-          <p:cNvPr id="755" name="Google Shape;755;p46:notes"/>
+          <p:cNvPr id="759" name="Google Shape;759;p46:notes"/>
           <p:cNvSpPr txBox="1"/>
           <p:nvPr>
             <p:ph idx="1" type="body"/>
@@ -5662,7 +5662,7 @@
       </p:sp>
       <p:sp>
         <p:nvSpPr>
-          <p:cNvPr id="756" name="Google Shape;756;p46:notes"/>
+          <p:cNvPr id="760" name="Google Shape;760;p46:notes"/>
           <p:cNvSpPr/>
           <p:nvPr>
             <p:ph idx="2" type="sldImg"/>
@@ -5825,7 +5825,7 @@
   <p:cSld>
     <p:spTree>
       <p:nvGrpSpPr>
-        <p:cNvPr id="774" name="Shape 774"/>
+        <p:cNvPr id="779" name="Shape 779"/>
         <p:cNvGrpSpPr/>
         <p:nvPr/>
       </p:nvGrpSpPr>
@@ -5839,7 +5839,7 @@
       </p:grpSpPr>
       <p:sp>
         <p:nvSpPr>
-          <p:cNvPr id="775" name="Google Shape;775;p35:notes"/>
+          <p:cNvPr id="780" name="Google Shape;780;p35:notes"/>
           <p:cNvSpPr txBox="1"/>
           <p:nvPr>
             <p:ph idx="1" type="body"/>
@@ -5886,7 +5886,7 @@
       </p:sp>
       <p:sp>
         <p:nvSpPr>
-          <p:cNvPr id="776" name="Google Shape;776;p35:notes"/>
+          <p:cNvPr id="781" name="Google Shape;781;p35:notes"/>
           <p:cNvSpPr/>
           <p:nvPr>
             <p:ph idx="2" type="sldImg"/>
@@ -5942,7 +5942,7 @@
   <p:cSld>
     <p:spTree>
       <p:nvGrpSpPr>
-        <p:cNvPr id="782" name="Shape 782"/>
+        <p:cNvPr id="787" name="Shape 787"/>
         <p:cNvGrpSpPr/>
         <p:nvPr/>
       </p:nvGrpSpPr>
@@ -5956,7 +5956,7 @@
       </p:grpSpPr>
       <p:sp>
         <p:nvSpPr>
-          <p:cNvPr id="783" name="Google Shape;783;p36:notes"/>
+          <p:cNvPr id="788" name="Google Shape;788;p36:notes"/>
           <p:cNvSpPr txBox="1"/>
           <p:nvPr>
             <p:ph idx="1" type="body"/>
@@ -6003,7 +6003,7 @@
       </p:sp>
       <p:sp>
         <p:nvSpPr>
-          <p:cNvPr id="784" name="Google Shape;784;p36:notes"/>
+          <p:cNvPr id="789" name="Google Shape;789;p36:notes"/>
           <p:cNvSpPr/>
           <p:nvPr>
             <p:ph idx="2" type="sldImg"/>
@@ -6059,7 +6059,7 @@
   <p:cSld>
     <p:spTree>
       <p:nvGrpSpPr>
-        <p:cNvPr id="798" name="Shape 798"/>
+        <p:cNvPr id="803" name="Shape 803"/>
         <p:cNvGrpSpPr/>
         <p:nvPr/>
       </p:nvGrpSpPr>
@@ -6073,7 +6073,7 @@
       </p:grpSpPr>
       <p:sp>
         <p:nvSpPr>
-          <p:cNvPr id="799" name="Google Shape;799;g3d94641431f_0_145:notes"/>
+          <p:cNvPr id="804" name="Google Shape;804;g3d94641431f_0_145:notes"/>
           <p:cNvSpPr txBox="1"/>
           <p:nvPr>
             <p:ph idx="1" type="body"/>
@@ -6120,7 +6120,7 @@
       </p:sp>
       <p:sp>
         <p:nvSpPr>
-          <p:cNvPr id="800" name="Google Shape;800;g3d94641431f_0_145:notes"/>
+          <p:cNvPr id="805" name="Google Shape;805;g3d94641431f_0_145:notes"/>
           <p:cNvSpPr/>
           <p:nvPr>
             <p:ph idx="2" type="sldImg"/>
@@ -6176,7 +6176,7 @@
   <p:cSld>
     <p:spTree>
       <p:nvGrpSpPr>
-        <p:cNvPr id="809" name="Shape 809"/>
+        <p:cNvPr id="814" name="Shape 814"/>
         <p:cNvGrpSpPr/>
         <p:nvPr/>
       </p:nvGrpSpPr>
@@ -6190,7 +6190,7 @@
       </p:grpSpPr>
       <p:sp>
         <p:nvSpPr>
-          <p:cNvPr id="810" name="Google Shape;810;p37:notes"/>
+          <p:cNvPr id="815" name="Google Shape;815;p37:notes"/>
           <p:cNvSpPr txBox="1"/>
           <p:nvPr>
             <p:ph idx="1" type="body"/>
@@ -6237,7 +6237,7 @@
       </p:sp>
       <p:sp>
         <p:nvSpPr>
-          <p:cNvPr id="811" name="Google Shape;811;p37:notes"/>
+          <p:cNvPr id="816" name="Google Shape;816;p37:notes"/>
           <p:cNvSpPr/>
           <p:nvPr>
             <p:ph idx="2" type="sldImg"/>
@@ -6293,7 +6293,7 @@
   <p:cSld>
     <p:spTree>
       <p:nvGrpSpPr>
-        <p:cNvPr id="823" name="Shape 823"/>
+        <p:cNvPr id="828" name="Shape 828"/>
         <p:cNvGrpSpPr/>
         <p:nvPr/>
       </p:nvGrpSpPr>
@@ -6307,7 +6307,7 @@
       </p:grpSpPr>
       <p:sp>
         <p:nvSpPr>
-          <p:cNvPr id="824" name="Google Shape;824;p38:notes"/>
+          <p:cNvPr id="829" name="Google Shape;829;p38:notes"/>
           <p:cNvSpPr txBox="1"/>
           <p:nvPr>
             <p:ph idx="1" type="body"/>
@@ -6354,7 +6354,7 @@
       </p:sp>
       <p:sp>
         <p:nvSpPr>
-          <p:cNvPr id="825" name="Google Shape;825;p38:notes"/>
+          <p:cNvPr id="830" name="Google Shape;830;p38:notes"/>
           <p:cNvSpPr/>
           <p:nvPr>
             <p:ph idx="2" type="sldImg"/>
@@ -6410,7 +6410,7 @@
   <p:cSld>
     <p:spTree>
       <p:nvGrpSpPr>
-        <p:cNvPr id="846" name="Shape 846"/>
+        <p:cNvPr id="851" name="Shape 851"/>
         <p:cNvGrpSpPr/>
         <p:nvPr/>
       </p:nvGrpSpPr>
@@ -6424,7 +6424,7 @@
       </p:grpSpPr>
       <p:sp>
         <p:nvSpPr>
-          <p:cNvPr id="847" name="Google Shape;847;p39:notes"/>
+          <p:cNvPr id="852" name="Google Shape;852;p39:notes"/>
           <p:cNvSpPr txBox="1"/>
           <p:nvPr>
             <p:ph idx="1" type="body"/>
@@ -6471,7 +6471,7 @@
       </p:sp>
       <p:sp>
         <p:nvSpPr>
-          <p:cNvPr id="848" name="Google Shape;848;p39:notes"/>
+          <p:cNvPr id="853" name="Google Shape;853;p39:notes"/>
           <p:cNvSpPr/>
           <p:nvPr>
             <p:ph idx="2" type="sldImg"/>
@@ -6527,7 +6527,7 @@
   <p:cSld>
     <p:spTree>
       <p:nvGrpSpPr>
-        <p:cNvPr id="867" name="Shape 867"/>
+        <p:cNvPr id="872" name="Shape 872"/>
         <p:cNvGrpSpPr/>
         <p:nvPr/>
       </p:nvGrpSpPr>
@@ -6541,7 +6541,7 @@
       </p:grpSpPr>
       <p:sp>
         <p:nvSpPr>
-          <p:cNvPr id="868" name="Google Shape;868;p41:notes"/>
+          <p:cNvPr id="873" name="Google Shape;873;p41:notes"/>
           <p:cNvSpPr txBox="1"/>
           <p:nvPr>
             <p:ph idx="1" type="body"/>
@@ -6588,7 +6588,7 @@
       </p:sp>
       <p:sp>
         <p:nvSpPr>
-          <p:cNvPr id="869" name="Google Shape;869;p41:notes"/>
+          <p:cNvPr id="874" name="Google Shape;874;p41:notes"/>
           <p:cNvSpPr/>
           <p:nvPr>
             <p:ph idx="2" type="sldImg"/>
@@ -6644,7 +6644,7 @@
   <p:cSld>
     <p:spTree>
       <p:nvGrpSpPr>
-        <p:cNvPr id="884" name="Shape 884"/>
+        <p:cNvPr id="889" name="Shape 889"/>
         <p:cNvGrpSpPr/>
         <p:nvPr/>
       </p:nvGrpSpPr>
@@ -6658,7 +6658,7 @@
       </p:grpSpPr>
       <p:sp>
         <p:nvSpPr>
-          <p:cNvPr id="885" name="Google Shape;885;p42:notes"/>
+          <p:cNvPr id="890" name="Google Shape;890;p42:notes"/>
           <p:cNvSpPr txBox="1"/>
           <p:nvPr>
             <p:ph idx="1" type="body"/>
@@ -6705,7 +6705,7 @@
       </p:sp>
       <p:sp>
         <p:nvSpPr>
-          <p:cNvPr id="886" name="Google Shape;886;p42:notes"/>
+          <p:cNvPr id="891" name="Google Shape;891;p42:notes"/>
           <p:cNvSpPr/>
           <p:nvPr>
             <p:ph idx="2" type="sldImg"/>
@@ -6761,7 +6761,7 @@
   <p:cSld>
     <p:spTree>
       <p:nvGrpSpPr>
-        <p:cNvPr id="906" name="Shape 906"/>
+        <p:cNvPr id="911" name="Shape 911"/>
         <p:cNvGrpSpPr/>
         <p:nvPr/>
       </p:nvGrpSpPr>
@@ -6775,7 +6775,7 @@
       </p:grpSpPr>
       <p:sp>
         <p:nvSpPr>
-          <p:cNvPr id="907" name="Google Shape;907;p43:notes"/>
+          <p:cNvPr id="912" name="Google Shape;912;p43:notes"/>
           <p:cNvSpPr txBox="1"/>
           <p:nvPr>
             <p:ph idx="1" type="body"/>
@@ -6822,7 +6822,7 @@
       </p:sp>
       <p:sp>
         <p:nvSpPr>
-          <p:cNvPr id="908" name="Google Shape;908;p43:notes"/>
+          <p:cNvPr id="913" name="Google Shape;913;p43:notes"/>
           <p:cNvSpPr/>
           <p:nvPr>
             <p:ph idx="2" type="sldImg"/>
@@ -6878,7 +6878,7 @@
   <p:cSld>
     <p:spTree>
       <p:nvGrpSpPr>
-        <p:cNvPr id="915" name="Shape 915"/>
+        <p:cNvPr id="920" name="Shape 920"/>
         <p:cNvGrpSpPr/>
         <p:nvPr/>
       </p:nvGrpSpPr>
@@ -6892,7 +6892,7 @@
       </p:grpSpPr>
       <p:sp>
         <p:nvSpPr>
-          <p:cNvPr id="916" name="Google Shape;916;g3d94641431f_0_127:notes"/>
+          <p:cNvPr id="921" name="Google Shape;921;g3d94641431f_0_127:notes"/>
           <p:cNvSpPr/>
           <p:nvPr>
             <p:ph idx="2" type="sldImg"/>
@@ -6937,7 +6937,7 @@
       </p:sp>
       <p:sp>
         <p:nvSpPr>
-          <p:cNvPr id="917" name="Google Shape;917;g3d94641431f_0_127:notes"/>
+          <p:cNvPr id="922" name="Google Shape;922;g3d94641431f_0_127:notes"/>
           <p:cNvSpPr txBox="1"/>
           <p:nvPr>
             <p:ph idx="1" type="body"/>
@@ -6984,7 +6984,7 @@
       </p:sp>
       <p:sp>
         <p:nvSpPr>
-          <p:cNvPr id="918" name="Google Shape;918;g3d94641431f_0_127:notes"/>
+          <p:cNvPr id="923" name="Google Shape;923;g3d94641431f_0_127:notes"/>
           <p:cNvSpPr txBox="1"/>
           <p:nvPr>
             <p:ph idx="12" type="sldNum"/>
@@ -8568,25 +8568,17 @@
               <a:buNone/>
             </a:pPr>
             <a:r>
-              <a:rPr b="1" i="0" lang="en-US" sz="2000" u="none" cap="none" strike="noStrike">
+              <a:rPr i="0" lang="en-US" sz="2000" u="none" cap="none" strike="noStrike">
                 <a:solidFill>
                   <a:srgbClr val="E8A317"/>
                 </a:solidFill>
-                <a:latin typeface="Arial"/>
-                <a:ea typeface="Arial"/>
-                <a:cs typeface="Arial"/>
-                <a:sym typeface="Arial"/>
               </a:rPr>
               <a:t>Aula 1 – Bloco 1</a:t>
             </a:r>
-            <a:endParaRPr b="0" i="0" sz="1400" u="none" cap="none" strike="noStrike">
-              <a:solidFill>
-                <a:srgbClr val="000000"/>
-              </a:solidFill>
-              <a:latin typeface="Arial"/>
-              <a:ea typeface="Arial"/>
-              <a:cs typeface="Arial"/>
-              <a:sym typeface="Arial"/>
+            <a:endParaRPr i="0" sz="1400" u="none" cap="none" strike="noStrike">
+              <a:solidFill>
+                <a:srgbClr val="000000"/>
+              </a:solidFill>
             </a:endParaRPr>
           </a:p>
         </p:txBody>
@@ -8703,7 +8695,7 @@
         <p:spPr>
           <a:xfrm>
             <a:off x="750000" y="500000"/>
-            <a:ext cx="5950000" cy="900000"/>
+            <a:ext cx="7172100" cy="900000"/>
           </a:xfrm>
           <a:prstGeom prst="rect">
             <a:avLst/>
@@ -8769,7 +8761,7 @@
         <p:spPr>
           <a:xfrm>
             <a:off x="750000" y="1173004"/>
-            <a:ext cx="5949900" cy="399900"/>
+            <a:ext cx="7171800" cy="399900"/>
           </a:xfrm>
           <a:prstGeom prst="rect">
             <a:avLst/>
@@ -8834,8 +8826,8 @@
         </p:nvSpPr>
         <p:spPr>
           <a:xfrm>
-            <a:off x="900000" y="1643004"/>
-            <a:ext cx="2499900" cy="1100100"/>
+            <a:off x="930807" y="1643004"/>
+            <a:ext cx="3013200" cy="1100100"/>
           </a:xfrm>
           <a:prstGeom prst="rect">
             <a:avLst/>
@@ -8900,8 +8892,8 @@
         </p:nvSpPr>
         <p:spPr>
           <a:xfrm>
-            <a:off x="900000" y="2743004"/>
-            <a:ext cx="2499900" cy="300000"/>
+            <a:off x="930807" y="2743004"/>
+            <a:ext cx="3013200" cy="300000"/>
           </a:xfrm>
           <a:prstGeom prst="rect">
             <a:avLst/>
@@ -8966,8 +8958,8 @@
         </p:nvSpPr>
         <p:spPr>
           <a:xfrm>
-            <a:off x="900000" y="3043004"/>
-            <a:ext cx="2499900" cy="399900"/>
+            <a:off x="930807" y="3043004"/>
+            <a:ext cx="3013200" cy="399900"/>
           </a:xfrm>
           <a:prstGeom prst="rect">
             <a:avLst/>
@@ -9032,8 +9024,8 @@
         </p:nvSpPr>
         <p:spPr>
           <a:xfrm>
-            <a:off x="900000" y="3343004"/>
-            <a:ext cx="2499900" cy="600000"/>
+            <a:off x="930807" y="3343004"/>
+            <a:ext cx="3013200" cy="600000"/>
           </a:xfrm>
           <a:prstGeom prst="rect">
             <a:avLst/>
@@ -9098,7 +9090,7 @@
         </p:nvCxnSpPr>
         <p:spPr>
           <a:xfrm>
-            <a:off x="3750000" y="1743004"/>
+            <a:off x="4366134" y="1743004"/>
             <a:ext cx="0" cy="2199900"/>
           </a:xfrm>
           <a:prstGeom prst="straightConnector1">
@@ -9124,8 +9116,8 @@
         </p:nvSpPr>
         <p:spPr>
           <a:xfrm>
-            <a:off x="4050000" y="1643004"/>
-            <a:ext cx="2499900" cy="1100100"/>
+            <a:off x="4727748" y="1643004"/>
+            <a:ext cx="3013200" cy="1100100"/>
           </a:xfrm>
           <a:prstGeom prst="rect">
             <a:avLst/>
@@ -9190,8 +9182,8 @@
         </p:nvSpPr>
         <p:spPr>
           <a:xfrm>
-            <a:off x="4050000" y="2743004"/>
-            <a:ext cx="2499900" cy="300000"/>
+            <a:off x="4727748" y="2743004"/>
+            <a:ext cx="3013200" cy="300000"/>
           </a:xfrm>
           <a:prstGeom prst="rect">
             <a:avLst/>
@@ -9256,8 +9248,8 @@
         </p:nvSpPr>
         <p:spPr>
           <a:xfrm>
-            <a:off x="4050000" y="3043004"/>
-            <a:ext cx="2499900" cy="399900"/>
+            <a:off x="4727748" y="3043004"/>
+            <a:ext cx="3013200" cy="399900"/>
           </a:xfrm>
           <a:prstGeom prst="rect">
             <a:avLst/>
@@ -9322,8 +9314,8 @@
         </p:nvSpPr>
         <p:spPr>
           <a:xfrm>
-            <a:off x="4050000" y="3343004"/>
-            <a:ext cx="2499900" cy="600000"/>
+            <a:off x="4727748" y="3343004"/>
+            <a:ext cx="3013200" cy="600000"/>
           </a:xfrm>
           <a:prstGeom prst="rect">
             <a:avLst/>
@@ -9389,7 +9381,7 @@
         <p:spPr>
           <a:xfrm>
             <a:off x="750000" y="4350000"/>
-            <a:ext cx="5950000" cy="300000"/>
+            <a:ext cx="7172100" cy="300000"/>
           </a:xfrm>
           <a:prstGeom prst="rect">
             <a:avLst/>
@@ -9454,8 +9446,8 @@
         </p:nvSpPr>
         <p:spPr>
           <a:xfrm>
-            <a:off x="750005" y="905100"/>
-            <a:ext cx="1500000" cy="54900"/>
+            <a:off x="750006" y="905100"/>
+            <a:ext cx="1808100" cy="54900"/>
           </a:xfrm>
           <a:prstGeom prst="rect">
             <a:avLst/>
@@ -10440,8 +10432,8 @@
         </p:nvSpPr>
         <p:spPr>
           <a:xfrm>
-            <a:off x="750005" y="905100"/>
-            <a:ext cx="1500000" cy="54900"/>
+            <a:off x="750006" y="905100"/>
+            <a:ext cx="1808100" cy="54900"/>
           </a:xfrm>
           <a:prstGeom prst="rect">
             <a:avLst/>
@@ -10831,7 +10823,7 @@
         <p:spPr>
           <a:xfrm>
             <a:off x="750000" y="500000"/>
-            <a:ext cx="5950000" cy="900000"/>
+            <a:ext cx="7157400" cy="900000"/>
           </a:xfrm>
           <a:prstGeom prst="rect">
             <a:avLst/>
@@ -10897,7 +10889,7 @@
         <p:spPr>
           <a:xfrm>
             <a:off x="750000" y="1330000"/>
-            <a:ext cx="5950000" cy="400000"/>
+            <a:ext cx="7157400" cy="399900"/>
           </a:xfrm>
           <a:prstGeom prst="rect">
             <a:avLst/>
@@ -10963,7 +10955,7 @@
         <p:spPr>
           <a:xfrm>
             <a:off x="750000" y="1750000"/>
-            <a:ext cx="6621000" cy="380100"/>
+            <a:ext cx="6727800" cy="380100"/>
           </a:xfrm>
           <a:prstGeom prst="rect">
             <a:avLst/>
@@ -11021,8 +11013,8 @@
         </p:nvSpPr>
         <p:spPr>
           <a:xfrm>
-            <a:off x="850000" y="1810000"/>
-            <a:ext cx="1500000" cy="300000"/>
+            <a:off x="851616" y="1810000"/>
+            <a:ext cx="1524300" cy="300000"/>
           </a:xfrm>
           <a:prstGeom prst="rect">
             <a:avLst/>
@@ -11087,8 +11079,8 @@
         </p:nvSpPr>
         <p:spPr>
           <a:xfrm>
-            <a:off x="2350442" y="1810000"/>
-            <a:ext cx="5020500" cy="300000"/>
+            <a:off x="2376299" y="1810000"/>
+            <a:ext cx="5101500" cy="300000"/>
           </a:xfrm>
           <a:prstGeom prst="rect">
             <a:avLst/>
@@ -11154,7 +11146,7 @@
         <p:spPr>
           <a:xfrm>
             <a:off x="750000" y="2150000"/>
-            <a:ext cx="6621000" cy="380100"/>
+            <a:ext cx="6727800" cy="380100"/>
           </a:xfrm>
           <a:prstGeom prst="rect">
             <a:avLst/>
@@ -11212,8 +11204,8 @@
         </p:nvSpPr>
         <p:spPr>
           <a:xfrm>
-            <a:off x="850000" y="2210000"/>
-            <a:ext cx="1500000" cy="300000"/>
+            <a:off x="851616" y="2210000"/>
+            <a:ext cx="1524300" cy="300000"/>
           </a:xfrm>
           <a:prstGeom prst="rect">
             <a:avLst/>
@@ -11278,8 +11270,8 @@
         </p:nvSpPr>
         <p:spPr>
           <a:xfrm>
-            <a:off x="2350442" y="2210000"/>
-            <a:ext cx="5020500" cy="300000"/>
+            <a:off x="2376299" y="2210000"/>
+            <a:ext cx="5101500" cy="300000"/>
           </a:xfrm>
           <a:prstGeom prst="rect">
             <a:avLst/>
@@ -11345,7 +11337,7 @@
         <p:spPr>
           <a:xfrm>
             <a:off x="750000" y="2550000"/>
-            <a:ext cx="6621000" cy="380100"/>
+            <a:ext cx="6727800" cy="380100"/>
           </a:xfrm>
           <a:prstGeom prst="rect">
             <a:avLst/>
@@ -11403,8 +11395,8 @@
         </p:nvSpPr>
         <p:spPr>
           <a:xfrm>
-            <a:off x="850000" y="2610000"/>
-            <a:ext cx="1500000" cy="300000"/>
+            <a:off x="851616" y="2610000"/>
+            <a:ext cx="1524300" cy="300000"/>
           </a:xfrm>
           <a:prstGeom prst="rect">
             <a:avLst/>
@@ -11469,8 +11461,8 @@
         </p:nvSpPr>
         <p:spPr>
           <a:xfrm>
-            <a:off x="2350442" y="2610000"/>
-            <a:ext cx="5020500" cy="300000"/>
+            <a:off x="2376299" y="2610000"/>
+            <a:ext cx="5101500" cy="300000"/>
           </a:xfrm>
           <a:prstGeom prst="rect">
             <a:avLst/>
@@ -11536,7 +11528,7 @@
         <p:spPr>
           <a:xfrm>
             <a:off x="750000" y="2950000"/>
-            <a:ext cx="7043700" cy="380100"/>
+            <a:ext cx="7157400" cy="380100"/>
           </a:xfrm>
           <a:prstGeom prst="rect">
             <a:avLst/>
@@ -11594,8 +11586,8 @@
         </p:nvSpPr>
         <p:spPr>
           <a:xfrm>
-            <a:off x="850000" y="3010000"/>
-            <a:ext cx="1500000" cy="300000"/>
+            <a:off x="851616" y="3010000"/>
+            <a:ext cx="1524300" cy="300000"/>
           </a:xfrm>
           <a:prstGeom prst="rect">
             <a:avLst/>
@@ -11660,8 +11652,8 @@
         </p:nvSpPr>
         <p:spPr>
           <a:xfrm>
-            <a:off x="2350450" y="3010000"/>
-            <a:ext cx="5020500" cy="300000"/>
+            <a:off x="2376307" y="3010000"/>
+            <a:ext cx="5101500" cy="300000"/>
           </a:xfrm>
           <a:prstGeom prst="rect">
             <a:avLst/>
@@ -11727,7 +11719,7 @@
         <p:spPr>
           <a:xfrm>
             <a:off x="750000" y="3350000"/>
-            <a:ext cx="6621000" cy="380100"/>
+            <a:ext cx="6727800" cy="380100"/>
           </a:xfrm>
           <a:prstGeom prst="rect">
             <a:avLst/>
@@ -11785,8 +11777,8 @@
         </p:nvSpPr>
         <p:spPr>
           <a:xfrm>
-            <a:off x="850000" y="3410000"/>
-            <a:ext cx="1500000" cy="300000"/>
+            <a:off x="851616" y="3410000"/>
+            <a:ext cx="1524300" cy="300000"/>
           </a:xfrm>
           <a:prstGeom prst="rect">
             <a:avLst/>
@@ -11851,8 +11843,8 @@
         </p:nvSpPr>
         <p:spPr>
           <a:xfrm>
-            <a:off x="2350442" y="3410000"/>
-            <a:ext cx="5020500" cy="300000"/>
+            <a:off x="2376299" y="3410000"/>
+            <a:ext cx="5101500" cy="300000"/>
           </a:xfrm>
           <a:prstGeom prst="rect">
             <a:avLst/>
@@ -11918,7 +11910,7 @@
         <p:spPr>
           <a:xfrm>
             <a:off x="750000" y="3750000"/>
-            <a:ext cx="7043700" cy="380100"/>
+            <a:ext cx="7157400" cy="380100"/>
           </a:xfrm>
           <a:prstGeom prst="rect">
             <a:avLst/>
@@ -11976,8 +11968,8 @@
         </p:nvSpPr>
         <p:spPr>
           <a:xfrm>
-            <a:off x="850000" y="3810000"/>
-            <a:ext cx="1500000" cy="300000"/>
+            <a:off x="851616" y="3810000"/>
+            <a:ext cx="1524300" cy="300000"/>
           </a:xfrm>
           <a:prstGeom prst="rect">
             <a:avLst/>
@@ -12042,8 +12034,8 @@
         </p:nvSpPr>
         <p:spPr>
           <a:xfrm>
-            <a:off x="2350450" y="3810000"/>
-            <a:ext cx="5020500" cy="300000"/>
+            <a:off x="2376307" y="3810000"/>
+            <a:ext cx="5101500" cy="300000"/>
           </a:xfrm>
           <a:prstGeom prst="rect">
             <a:avLst/>
@@ -12109,7 +12101,7 @@
         <p:spPr>
           <a:xfrm>
             <a:off x="750000" y="4250000"/>
-            <a:ext cx="5949900" cy="300000"/>
+            <a:ext cx="6045900" cy="300000"/>
           </a:xfrm>
           <a:prstGeom prst="rect">
             <a:avLst/>
@@ -12174,8 +12166,8 @@
         </p:nvSpPr>
         <p:spPr>
           <a:xfrm>
-            <a:off x="750005" y="905100"/>
-            <a:ext cx="1500000" cy="54900"/>
+            <a:off x="750006" y="905100"/>
+            <a:ext cx="1804500" cy="54900"/>
           </a:xfrm>
           <a:prstGeom prst="rect">
             <a:avLst/>
@@ -12271,7 +12263,7 @@
         <p:spPr>
           <a:xfrm>
             <a:off x="750000" y="500000"/>
-            <a:ext cx="5950000" cy="900000"/>
+            <a:ext cx="7164900" cy="900000"/>
           </a:xfrm>
           <a:prstGeom prst="rect">
             <a:avLst/>
@@ -12337,7 +12329,7 @@
         <p:spPr>
           <a:xfrm>
             <a:off x="750000" y="1330000"/>
-            <a:ext cx="5950000" cy="400000"/>
+            <a:ext cx="7164900" cy="399900"/>
           </a:xfrm>
           <a:prstGeom prst="rect">
             <a:avLst/>
@@ -12403,7 +12395,7 @@
         <p:spPr>
           <a:xfrm>
             <a:off x="750000" y="1632390"/>
-            <a:ext cx="2850000" cy="1200000"/>
+            <a:ext cx="3432000" cy="1200000"/>
           </a:xfrm>
           <a:prstGeom prst="roundRect">
             <a:avLst>
@@ -12469,8 +12461,8 @@
         </p:nvSpPr>
         <p:spPr>
           <a:xfrm>
-            <a:off x="900000" y="1752390"/>
-            <a:ext cx="2550000" cy="500100"/>
+            <a:off x="930624" y="1752390"/>
+            <a:ext cx="3070500" cy="500100"/>
           </a:xfrm>
           <a:prstGeom prst="rect">
             <a:avLst/>
@@ -12535,8 +12527,8 @@
         </p:nvSpPr>
         <p:spPr>
           <a:xfrm>
-            <a:off x="900000" y="2272390"/>
-            <a:ext cx="2550000" cy="300000"/>
+            <a:off x="930624" y="2272390"/>
+            <a:ext cx="3070500" cy="300000"/>
           </a:xfrm>
           <a:prstGeom prst="rect">
             <a:avLst/>
@@ -12601,8 +12593,8 @@
         </p:nvSpPr>
         <p:spPr>
           <a:xfrm>
-            <a:off x="900000" y="2552390"/>
-            <a:ext cx="2550000" cy="249900"/>
+            <a:off x="930624" y="2552390"/>
+            <a:ext cx="3070500" cy="249900"/>
           </a:xfrm>
           <a:prstGeom prst="rect">
             <a:avLst/>
@@ -12667,8 +12659,8 @@
         </p:nvSpPr>
         <p:spPr>
           <a:xfrm>
-            <a:off x="3750000" y="1632390"/>
-            <a:ext cx="2850000" cy="1200000"/>
+            <a:off x="4362479" y="1632390"/>
+            <a:ext cx="3432000" cy="1200000"/>
           </a:xfrm>
           <a:prstGeom prst="roundRect">
             <a:avLst>
@@ -12734,8 +12726,8 @@
         </p:nvSpPr>
         <p:spPr>
           <a:xfrm>
-            <a:off x="3900000" y="1752390"/>
-            <a:ext cx="2550000" cy="500100"/>
+            <a:off x="4543103" y="1752390"/>
+            <a:ext cx="3070500" cy="500100"/>
           </a:xfrm>
           <a:prstGeom prst="rect">
             <a:avLst/>
@@ -12800,8 +12792,8 @@
         </p:nvSpPr>
         <p:spPr>
           <a:xfrm>
-            <a:off x="3900000" y="2272390"/>
-            <a:ext cx="2550000" cy="300000"/>
+            <a:off x="4543103" y="2272390"/>
+            <a:ext cx="3070500" cy="300000"/>
           </a:xfrm>
           <a:prstGeom prst="rect">
             <a:avLst/>
@@ -12866,8 +12858,8 @@
         </p:nvSpPr>
         <p:spPr>
           <a:xfrm>
-            <a:off x="3900000" y="2552390"/>
-            <a:ext cx="2550000" cy="249900"/>
+            <a:off x="4543103" y="2552390"/>
+            <a:ext cx="3070500" cy="249900"/>
           </a:xfrm>
           <a:prstGeom prst="rect">
             <a:avLst/>
@@ -12933,7 +12925,7 @@
         <p:spPr>
           <a:xfrm>
             <a:off x="750000" y="2982390"/>
-            <a:ext cx="2850000" cy="1200000"/>
+            <a:ext cx="3432000" cy="1200000"/>
           </a:xfrm>
           <a:prstGeom prst="roundRect">
             <a:avLst>
@@ -12999,8 +12991,8 @@
         </p:nvSpPr>
         <p:spPr>
           <a:xfrm>
-            <a:off x="900000" y="3102390"/>
-            <a:ext cx="2550000" cy="500100"/>
+            <a:off x="930624" y="3102390"/>
+            <a:ext cx="3070500" cy="500100"/>
           </a:xfrm>
           <a:prstGeom prst="rect">
             <a:avLst/>
@@ -13065,8 +13057,8 @@
         </p:nvSpPr>
         <p:spPr>
           <a:xfrm>
-            <a:off x="900000" y="3622389"/>
-            <a:ext cx="2550000" cy="300000"/>
+            <a:off x="930624" y="3622389"/>
+            <a:ext cx="3070500" cy="300000"/>
           </a:xfrm>
           <a:prstGeom prst="rect">
             <a:avLst/>
@@ -13131,8 +13123,8 @@
         </p:nvSpPr>
         <p:spPr>
           <a:xfrm>
-            <a:off x="900000" y="3902390"/>
-            <a:ext cx="2550000" cy="249900"/>
+            <a:off x="930624" y="3902390"/>
+            <a:ext cx="3070500" cy="249900"/>
           </a:xfrm>
           <a:prstGeom prst="rect">
             <a:avLst/>
@@ -13197,8 +13189,8 @@
         </p:nvSpPr>
         <p:spPr>
           <a:xfrm>
-            <a:off x="3750000" y="2982390"/>
-            <a:ext cx="2850000" cy="1200000"/>
+            <a:off x="4362479" y="2982390"/>
+            <a:ext cx="3432000" cy="1200000"/>
           </a:xfrm>
           <a:prstGeom prst="roundRect">
             <a:avLst>
@@ -13264,8 +13256,8 @@
         </p:nvSpPr>
         <p:spPr>
           <a:xfrm>
-            <a:off x="3900000" y="3102390"/>
-            <a:ext cx="2550000" cy="500100"/>
+            <a:off x="4543103" y="3102390"/>
+            <a:ext cx="3070500" cy="500100"/>
           </a:xfrm>
           <a:prstGeom prst="rect">
             <a:avLst/>
@@ -13330,8 +13322,8 @@
         </p:nvSpPr>
         <p:spPr>
           <a:xfrm>
-            <a:off x="3900000" y="3622389"/>
-            <a:ext cx="2550000" cy="300000"/>
+            <a:off x="4543103" y="3622389"/>
+            <a:ext cx="3070500" cy="300000"/>
           </a:xfrm>
           <a:prstGeom prst="rect">
             <a:avLst/>
@@ -13396,8 +13388,8 @@
         </p:nvSpPr>
         <p:spPr>
           <a:xfrm>
-            <a:off x="3900000" y="3902390"/>
-            <a:ext cx="2550000" cy="249900"/>
+            <a:off x="4543103" y="3902390"/>
+            <a:ext cx="3070500" cy="249900"/>
           </a:xfrm>
           <a:prstGeom prst="rect">
             <a:avLst/>
@@ -13463,7 +13455,7 @@
         <p:spPr>
           <a:xfrm>
             <a:off x="750000" y="4340000"/>
-            <a:ext cx="5950000" cy="300000"/>
+            <a:ext cx="7164900" cy="300000"/>
           </a:xfrm>
           <a:prstGeom prst="rect">
             <a:avLst/>
@@ -13528,8 +13520,8 @@
         </p:nvSpPr>
         <p:spPr>
           <a:xfrm>
-            <a:off x="750005" y="905100"/>
-            <a:ext cx="1500000" cy="54900"/>
+            <a:off x="750006" y="905100"/>
+            <a:ext cx="1806300" cy="54900"/>
           </a:xfrm>
           <a:prstGeom prst="rect">
             <a:avLst/>
@@ -13625,7 +13617,7 @@
         <p:spPr>
           <a:xfrm>
             <a:off x="750000" y="500000"/>
-            <a:ext cx="5950000" cy="900000"/>
+            <a:ext cx="7143000" cy="900000"/>
           </a:xfrm>
           <a:prstGeom prst="rect">
             <a:avLst/>
@@ -13691,7 +13683,7 @@
         <p:spPr>
           <a:xfrm>
             <a:off x="750000" y="1330000"/>
-            <a:ext cx="5950000" cy="400000"/>
+            <a:ext cx="7143000" cy="399900"/>
           </a:xfrm>
           <a:prstGeom prst="rect">
             <a:avLst/>
@@ -13757,7 +13749,7 @@
         <p:spPr>
           <a:xfrm>
             <a:off x="750000" y="1750000"/>
-            <a:ext cx="5950000" cy="400000"/>
+            <a:ext cx="7143000" cy="399900"/>
           </a:xfrm>
           <a:prstGeom prst="rect">
             <a:avLst/>
@@ -13815,8 +13807,8 @@
         </p:nvSpPr>
         <p:spPr>
           <a:xfrm>
-            <a:off x="900000" y="1790000"/>
-            <a:ext cx="3400000" cy="320000"/>
+            <a:off x="930078" y="1790000"/>
+            <a:ext cx="4081500" cy="320100"/>
           </a:xfrm>
           <a:prstGeom prst="rect">
             <a:avLst/>
@@ -13881,8 +13873,8 @@
         </p:nvSpPr>
         <p:spPr>
           <a:xfrm>
-            <a:off x="4350000" y="1790000"/>
-            <a:ext cx="1100000" cy="320000"/>
+            <a:off x="5071873" y="1790000"/>
+            <a:ext cx="1320600" cy="320100"/>
           </a:xfrm>
           <a:prstGeom prst="rect">
             <a:avLst/>
@@ -13947,8 +13939,8 @@
         </p:nvSpPr>
         <p:spPr>
           <a:xfrm>
-            <a:off x="5500000" y="1790000"/>
-            <a:ext cx="1100000" cy="320000"/>
+            <a:off x="6452471" y="1790000"/>
+            <a:ext cx="1320600" cy="320100"/>
           </a:xfrm>
           <a:prstGeom prst="rect">
             <a:avLst/>
@@ -14014,7 +14006,7 @@
         <p:spPr>
           <a:xfrm>
             <a:off x="750000" y="2150000"/>
-            <a:ext cx="5950000" cy="460000"/>
+            <a:ext cx="7143000" cy="459900"/>
           </a:xfrm>
           <a:prstGeom prst="rect">
             <a:avLst/>
@@ -14073,7 +14065,7 @@
         <p:spPr>
           <a:xfrm>
             <a:off x="750000" y="2150000"/>
-            <a:ext cx="4800000" cy="460000"/>
+            <a:ext cx="5762400" cy="459900"/>
           </a:xfrm>
           <a:prstGeom prst="rect">
             <a:avLst/>
@@ -14131,8 +14123,8 @@
         </p:nvSpPr>
         <p:spPr>
           <a:xfrm>
-            <a:off x="900000" y="2210000"/>
-            <a:ext cx="3400000" cy="360000"/>
+            <a:off x="930078" y="2210000"/>
+            <a:ext cx="4081500" cy="360000"/>
           </a:xfrm>
           <a:prstGeom prst="rect">
             <a:avLst/>
@@ -14197,8 +14189,8 @@
         </p:nvSpPr>
         <p:spPr>
           <a:xfrm>
-            <a:off x="4350000" y="2210000"/>
-            <a:ext cx="1100000" cy="360000"/>
+            <a:off x="5071873" y="2210000"/>
+            <a:ext cx="1320600" cy="360000"/>
           </a:xfrm>
           <a:prstGeom prst="rect">
             <a:avLst/>
@@ -14263,8 +14255,8 @@
         </p:nvSpPr>
         <p:spPr>
           <a:xfrm>
-            <a:off x="5500000" y="2210000"/>
-            <a:ext cx="1100000" cy="360000"/>
+            <a:off x="6452471" y="2210000"/>
+            <a:ext cx="1320600" cy="360000"/>
           </a:xfrm>
           <a:prstGeom prst="rect">
             <a:avLst/>
@@ -14330,7 +14322,7 @@
         <p:spPr>
           <a:xfrm>
             <a:off x="750000" y="2610000"/>
-            <a:ext cx="5950000" cy="460000"/>
+            <a:ext cx="7143000" cy="459900"/>
           </a:xfrm>
           <a:prstGeom prst="rect">
             <a:avLst/>
@@ -14389,7 +14381,7 @@
         <p:spPr>
           <a:xfrm>
             <a:off x="750000" y="2610000"/>
-            <a:ext cx="1050000" cy="460000"/>
+            <a:ext cx="1260600" cy="459900"/>
           </a:xfrm>
           <a:prstGeom prst="rect">
             <a:avLst/>
@@ -14447,8 +14439,8 @@
         </p:nvSpPr>
         <p:spPr>
           <a:xfrm>
-            <a:off x="900000" y="2670000"/>
-            <a:ext cx="3400000" cy="360000"/>
+            <a:off x="930078" y="2670000"/>
+            <a:ext cx="4081500" cy="360000"/>
           </a:xfrm>
           <a:prstGeom prst="rect">
             <a:avLst/>
@@ -14513,8 +14505,8 @@
         </p:nvSpPr>
         <p:spPr>
           <a:xfrm>
-            <a:off x="4350000" y="2670000"/>
-            <a:ext cx="1100000" cy="360000"/>
+            <a:off x="5071873" y="2670000"/>
+            <a:ext cx="1320600" cy="360000"/>
           </a:xfrm>
           <a:prstGeom prst="rect">
             <a:avLst/>
@@ -14579,8 +14571,8 @@
         </p:nvSpPr>
         <p:spPr>
           <a:xfrm>
-            <a:off x="5500000" y="2670000"/>
-            <a:ext cx="1100000" cy="360000"/>
+            <a:off x="6452471" y="2670000"/>
+            <a:ext cx="1320600" cy="360000"/>
           </a:xfrm>
           <a:prstGeom prst="rect">
             <a:avLst/>
@@ -14646,7 +14638,7 @@
         <p:spPr>
           <a:xfrm>
             <a:off x="750000" y="3070000"/>
-            <a:ext cx="5950000" cy="480000"/>
+            <a:ext cx="7143000" cy="480000"/>
           </a:xfrm>
           <a:prstGeom prst="rect">
             <a:avLst/>
@@ -14704,8 +14696,8 @@
         </p:nvSpPr>
         <p:spPr>
           <a:xfrm>
-            <a:off x="900000" y="3140000"/>
-            <a:ext cx="3400000" cy="350000"/>
+            <a:off x="930078" y="3140000"/>
+            <a:ext cx="4081500" cy="350100"/>
           </a:xfrm>
           <a:prstGeom prst="rect">
             <a:avLst/>
@@ -14770,8 +14762,8 @@
         </p:nvSpPr>
         <p:spPr>
           <a:xfrm>
-            <a:off x="4350000" y="3140000"/>
-            <a:ext cx="1100000" cy="350000"/>
+            <a:off x="5071873" y="3140000"/>
+            <a:ext cx="1320600" cy="350100"/>
           </a:xfrm>
           <a:prstGeom prst="rect">
             <a:avLst/>
@@ -14807,7 +14799,7 @@
             <a:r>
               <a:rPr b="1" i="0" lang="en-US" sz="1400" u="none" cap="none" strike="noStrike">
                 <a:solidFill>
-                  <a:srgbClr val="E8A317"/>
+                  <a:schemeClr val="lt1"/>
                 </a:solidFill>
                 <a:latin typeface="Arial Black"/>
                 <a:ea typeface="Arial Black"/>
@@ -14818,7 +14810,7 @@
             </a:r>
             <a:endParaRPr b="0" i="0" sz="1400" u="none" cap="none" strike="noStrike">
               <a:solidFill>
-                <a:srgbClr val="000000"/>
+                <a:schemeClr val="lt1"/>
               </a:solidFill>
               <a:latin typeface="Arial"/>
               <a:ea typeface="Arial"/>
@@ -14836,8 +14828,8 @@
         </p:nvSpPr>
         <p:spPr>
           <a:xfrm>
-            <a:off x="5500000" y="3140000"/>
-            <a:ext cx="1100000" cy="350000"/>
+            <a:off x="6452471" y="3140000"/>
+            <a:ext cx="1320600" cy="350100"/>
           </a:xfrm>
           <a:prstGeom prst="rect">
             <a:avLst/>
@@ -14873,7 +14865,7 @@
             <a:r>
               <a:rPr b="1" i="0" lang="en-US" sz="1400" u="none" cap="none" strike="noStrike">
                 <a:solidFill>
-                  <a:srgbClr val="E8A317"/>
+                  <a:schemeClr val="lt1"/>
                 </a:solidFill>
                 <a:latin typeface="Arial Black"/>
                 <a:ea typeface="Arial Black"/>
@@ -14884,7 +14876,7 @@
             </a:r>
             <a:endParaRPr b="0" i="0" sz="1400" u="none" cap="none" strike="noStrike">
               <a:solidFill>
-                <a:srgbClr val="000000"/>
+                <a:schemeClr val="lt1"/>
               </a:solidFill>
               <a:latin typeface="Arial"/>
               <a:ea typeface="Arial"/>
@@ -14903,7 +14895,7 @@
         <p:spPr>
           <a:xfrm>
             <a:off x="750000" y="4250000"/>
-            <a:ext cx="5950000" cy="400000"/>
+            <a:ext cx="7143000" cy="399900"/>
           </a:xfrm>
           <a:prstGeom prst="rect">
             <a:avLst/>
@@ -14968,8 +14960,8 @@
         </p:nvSpPr>
         <p:spPr>
           <a:xfrm>
-            <a:off x="750005" y="905100"/>
-            <a:ext cx="1500000" cy="54900"/>
+            <a:off x="750006" y="905100"/>
+            <a:ext cx="1800900" cy="54900"/>
           </a:xfrm>
           <a:prstGeom prst="rect">
             <a:avLst/>
@@ -15065,7 +15057,7 @@
         <p:spPr>
           <a:xfrm>
             <a:off x="750000" y="500000"/>
-            <a:ext cx="5950000" cy="900000"/>
+            <a:ext cx="7172100" cy="900000"/>
           </a:xfrm>
           <a:prstGeom prst="rect">
             <a:avLst/>
@@ -15131,7 +15123,7 @@
         <p:spPr>
           <a:xfrm>
             <a:off x="750000" y="1330000"/>
-            <a:ext cx="5950000" cy="400000"/>
+            <a:ext cx="7172100" cy="399900"/>
           </a:xfrm>
           <a:prstGeom prst="rect">
             <a:avLst/>
@@ -15197,7 +15189,7 @@
         <p:spPr>
           <a:xfrm>
             <a:off x="750000" y="1750000"/>
-            <a:ext cx="2850000" cy="1180000"/>
+            <a:ext cx="3435300" cy="1179900"/>
           </a:xfrm>
           <a:prstGeom prst="roundRect">
             <a:avLst>
@@ -15263,8 +15255,8 @@
         </p:nvSpPr>
         <p:spPr>
           <a:xfrm>
-            <a:off x="870000" y="1850000"/>
-            <a:ext cx="500000" cy="500000"/>
+            <a:off x="894645" y="1850000"/>
+            <a:ext cx="602700" cy="500100"/>
           </a:xfrm>
           <a:prstGeom prst="ellipse">
             <a:avLst/>
@@ -15331,8 +15323,8 @@
         </p:nvSpPr>
         <p:spPr>
           <a:xfrm>
-            <a:off x="1470000" y="1870000"/>
-            <a:ext cx="2000000" cy="350000"/>
+            <a:off x="1617872" y="1870000"/>
+            <a:ext cx="2410800" cy="350100"/>
           </a:xfrm>
           <a:prstGeom prst="rect">
             <a:avLst/>
@@ -15397,8 +15389,8 @@
         </p:nvSpPr>
         <p:spPr>
           <a:xfrm>
-            <a:off x="900000" y="2400000"/>
-            <a:ext cx="2550000" cy="450000"/>
+            <a:off x="930807" y="2400000"/>
+            <a:ext cx="3073800" cy="450000"/>
           </a:xfrm>
           <a:prstGeom prst="rect">
             <a:avLst/>
@@ -15463,8 +15455,8 @@
         </p:nvSpPr>
         <p:spPr>
           <a:xfrm>
-            <a:off x="3750000" y="1750000"/>
-            <a:ext cx="2850000" cy="1180000"/>
+            <a:off x="4366134" y="1750000"/>
+            <a:ext cx="3435300" cy="1179900"/>
           </a:xfrm>
           <a:prstGeom prst="roundRect">
             <a:avLst>
@@ -15530,8 +15522,8 @@
         </p:nvSpPr>
         <p:spPr>
           <a:xfrm>
-            <a:off x="3870000" y="1850000"/>
-            <a:ext cx="500000" cy="500000"/>
+            <a:off x="4510780" y="1850000"/>
+            <a:ext cx="602700" cy="500100"/>
           </a:xfrm>
           <a:prstGeom prst="ellipse">
             <a:avLst/>
@@ -15598,8 +15590,8 @@
         </p:nvSpPr>
         <p:spPr>
           <a:xfrm>
-            <a:off x="4470000" y="1870000"/>
-            <a:ext cx="2000000" cy="350000"/>
+            <a:off x="5234007" y="1870000"/>
+            <a:ext cx="2410800" cy="350100"/>
           </a:xfrm>
           <a:prstGeom prst="rect">
             <a:avLst/>
@@ -15664,8 +15656,8 @@
         </p:nvSpPr>
         <p:spPr>
           <a:xfrm>
-            <a:off x="3900000" y="2400000"/>
-            <a:ext cx="2550000" cy="450000"/>
+            <a:off x="4546941" y="2400000"/>
+            <a:ext cx="3073800" cy="450000"/>
           </a:xfrm>
           <a:prstGeom prst="rect">
             <a:avLst/>
@@ -15731,7 +15723,7 @@
         <p:spPr>
           <a:xfrm>
             <a:off x="750000" y="3070000"/>
-            <a:ext cx="2850000" cy="1180000"/>
+            <a:ext cx="3435300" cy="1179900"/>
           </a:xfrm>
           <a:prstGeom prst="roundRect">
             <a:avLst>
@@ -15797,8 +15789,8 @@
         </p:nvSpPr>
         <p:spPr>
           <a:xfrm>
-            <a:off x="870000" y="3170000"/>
-            <a:ext cx="500000" cy="500000"/>
+            <a:off x="894645" y="3170000"/>
+            <a:ext cx="602700" cy="500100"/>
           </a:xfrm>
           <a:prstGeom prst="ellipse">
             <a:avLst/>
@@ -15865,8 +15857,8 @@
         </p:nvSpPr>
         <p:spPr>
           <a:xfrm>
-            <a:off x="1470000" y="3190000"/>
-            <a:ext cx="2000000" cy="350000"/>
+            <a:off x="1617872" y="3190000"/>
+            <a:ext cx="2410800" cy="350100"/>
           </a:xfrm>
           <a:prstGeom prst="rect">
             <a:avLst/>
@@ -15931,8 +15923,8 @@
         </p:nvSpPr>
         <p:spPr>
           <a:xfrm>
-            <a:off x="900000" y="3720000"/>
-            <a:ext cx="2550000" cy="450000"/>
+            <a:off x="930807" y="3720000"/>
+            <a:ext cx="3073800" cy="450000"/>
           </a:xfrm>
           <a:prstGeom prst="rect">
             <a:avLst/>
@@ -15997,8 +15989,8 @@
         </p:nvSpPr>
         <p:spPr>
           <a:xfrm>
-            <a:off x="3750000" y="3070000"/>
-            <a:ext cx="2850000" cy="1180000"/>
+            <a:off x="4366134" y="3070000"/>
+            <a:ext cx="3435300" cy="1179900"/>
           </a:xfrm>
           <a:prstGeom prst="roundRect">
             <a:avLst>
@@ -16064,8 +16056,8 @@
         </p:nvSpPr>
         <p:spPr>
           <a:xfrm>
-            <a:off x="3870000" y="3170000"/>
-            <a:ext cx="500000" cy="500000"/>
+            <a:off x="4510780" y="3170000"/>
+            <a:ext cx="602700" cy="500100"/>
           </a:xfrm>
           <a:prstGeom prst="ellipse">
             <a:avLst/>
@@ -16132,8 +16124,8 @@
         </p:nvSpPr>
         <p:spPr>
           <a:xfrm>
-            <a:off x="4470000" y="3190000"/>
-            <a:ext cx="2000000" cy="350000"/>
+            <a:off x="5234007" y="3190000"/>
+            <a:ext cx="2410800" cy="350100"/>
           </a:xfrm>
           <a:prstGeom prst="rect">
             <a:avLst/>
@@ -16198,8 +16190,8 @@
         </p:nvSpPr>
         <p:spPr>
           <a:xfrm>
-            <a:off x="3900000" y="3720000"/>
-            <a:ext cx="2550000" cy="450000"/>
+            <a:off x="4546941" y="3720000"/>
+            <a:ext cx="3073800" cy="450000"/>
           </a:xfrm>
           <a:prstGeom prst="rect">
             <a:avLst/>
@@ -16264,8 +16256,8 @@
         </p:nvSpPr>
         <p:spPr>
           <a:xfrm>
-            <a:off x="750005" y="905100"/>
-            <a:ext cx="1500000" cy="54900"/>
+            <a:off x="750006" y="905100"/>
+            <a:ext cx="1808100" cy="54900"/>
           </a:xfrm>
           <a:prstGeom prst="rect">
             <a:avLst/>
@@ -16655,7 +16647,7 @@
         <p:spPr>
           <a:xfrm>
             <a:off x="750000" y="500000"/>
-            <a:ext cx="5949900" cy="549900"/>
+            <a:ext cx="7150200" cy="549900"/>
           </a:xfrm>
           <a:prstGeom prst="rect">
             <a:avLst/>
@@ -16746,7 +16738,7 @@
         <p:spPr>
           <a:xfrm>
             <a:off x="750000" y="1160000"/>
-            <a:ext cx="5949900" cy="399900"/>
+            <a:ext cx="7150200" cy="399900"/>
           </a:xfrm>
           <a:prstGeom prst="rect">
             <a:avLst/>
@@ -16812,7 +16804,7 @@
         <p:spPr>
           <a:xfrm>
             <a:off x="750000" y="1900000"/>
-            <a:ext cx="3800000" cy="1100000"/>
+            <a:ext cx="4566600" cy="1100100"/>
           </a:xfrm>
           <a:prstGeom prst="rect">
             <a:avLst/>
@@ -16878,7 +16870,7 @@
         <p:spPr>
           <a:xfrm>
             <a:off x="750000" y="2950000"/>
-            <a:ext cx="3800000" cy="400000"/>
+            <a:ext cx="4566600" cy="399900"/>
           </a:xfrm>
           <a:prstGeom prst="rect">
             <a:avLst/>
@@ -16943,8 +16935,8 @@
         </p:nvSpPr>
         <p:spPr>
           <a:xfrm>
-            <a:off x="4100000" y="1900000"/>
-            <a:ext cx="1000000" cy="300000"/>
+            <a:off x="4775771" y="1900000"/>
+            <a:ext cx="1201800" cy="300000"/>
           </a:xfrm>
           <a:prstGeom prst="rect">
             <a:avLst/>
@@ -17009,8 +17001,8 @@
         </p:nvSpPr>
         <p:spPr>
           <a:xfrm>
-            <a:off x="5150000" y="1900000"/>
-            <a:ext cx="2337900" cy="300000"/>
+            <a:off x="6037580" y="1900000"/>
+            <a:ext cx="1862400" cy="300000"/>
           </a:xfrm>
           <a:prstGeom prst="rect">
             <a:avLst/>
@@ -17075,8 +17067,8 @@
         </p:nvSpPr>
         <p:spPr>
           <a:xfrm>
-            <a:off x="4100000" y="2240000"/>
-            <a:ext cx="1000000" cy="300000"/>
+            <a:off x="4775771" y="2240000"/>
+            <a:ext cx="1201800" cy="300000"/>
           </a:xfrm>
           <a:prstGeom prst="rect">
             <a:avLst/>
@@ -17141,8 +17133,8 @@
         </p:nvSpPr>
         <p:spPr>
           <a:xfrm>
-            <a:off x="5150000" y="2240000"/>
-            <a:ext cx="2337900" cy="300000"/>
+            <a:off x="6037580" y="2240000"/>
+            <a:ext cx="1862400" cy="300000"/>
           </a:xfrm>
           <a:prstGeom prst="rect">
             <a:avLst/>
@@ -17207,8 +17199,8 @@
         </p:nvSpPr>
         <p:spPr>
           <a:xfrm>
-            <a:off x="4100000" y="2580000"/>
-            <a:ext cx="1000000" cy="300000"/>
+            <a:off x="4775771" y="2580000"/>
+            <a:ext cx="1201800" cy="300000"/>
           </a:xfrm>
           <a:prstGeom prst="rect">
             <a:avLst/>
@@ -17273,8 +17265,8 @@
         </p:nvSpPr>
         <p:spPr>
           <a:xfrm>
-            <a:off x="5150000" y="2580000"/>
-            <a:ext cx="2337900" cy="300000"/>
+            <a:off x="6037580" y="2580000"/>
+            <a:ext cx="1862400" cy="300000"/>
           </a:xfrm>
           <a:prstGeom prst="rect">
             <a:avLst/>
@@ -17339,8 +17331,8 @@
         </p:nvSpPr>
         <p:spPr>
           <a:xfrm>
-            <a:off x="4100000" y="2920000"/>
-            <a:ext cx="1000000" cy="300000"/>
+            <a:off x="4775771" y="2920000"/>
+            <a:ext cx="1201800" cy="300000"/>
           </a:xfrm>
           <a:prstGeom prst="rect">
             <a:avLst/>
@@ -17405,8 +17397,8 @@
         </p:nvSpPr>
         <p:spPr>
           <a:xfrm>
-            <a:off x="5150000" y="2920000"/>
-            <a:ext cx="2337900" cy="300000"/>
+            <a:off x="6037580" y="2920000"/>
+            <a:ext cx="1862400" cy="300000"/>
           </a:xfrm>
           <a:prstGeom prst="rect">
             <a:avLst/>
@@ -17471,8 +17463,8 @@
         </p:nvSpPr>
         <p:spPr>
           <a:xfrm>
-            <a:off x="4100000" y="3260000"/>
-            <a:ext cx="1000000" cy="300000"/>
+            <a:off x="4775771" y="3260000"/>
+            <a:ext cx="1201800" cy="300000"/>
           </a:xfrm>
           <a:prstGeom prst="rect">
             <a:avLst/>
@@ -17537,8 +17529,8 @@
         </p:nvSpPr>
         <p:spPr>
           <a:xfrm>
-            <a:off x="5150000" y="3260000"/>
-            <a:ext cx="2337900" cy="300000"/>
+            <a:off x="6037580" y="3260000"/>
+            <a:ext cx="1862400" cy="300000"/>
           </a:xfrm>
           <a:prstGeom prst="rect">
             <a:avLst/>
@@ -17604,7 +17596,7 @@
         <p:spPr>
           <a:xfrm>
             <a:off x="750000" y="3850000"/>
-            <a:ext cx="5950000" cy="600000"/>
+            <a:ext cx="7150200" cy="600000"/>
           </a:xfrm>
           <a:prstGeom prst="roundRect">
             <a:avLst>
@@ -17664,8 +17656,8 @@
         </p:nvSpPr>
         <p:spPr>
           <a:xfrm>
-            <a:off x="900000" y="3900000"/>
-            <a:ext cx="5650000" cy="500000"/>
+            <a:off x="930258" y="3900000"/>
+            <a:ext cx="6789600" cy="500100"/>
           </a:xfrm>
           <a:prstGeom prst="rect">
             <a:avLst/>
@@ -17730,8 +17722,8 @@
         </p:nvSpPr>
         <p:spPr>
           <a:xfrm>
-            <a:off x="750005" y="905100"/>
-            <a:ext cx="1500000" cy="54900"/>
+            <a:off x="750006" y="905100"/>
+            <a:ext cx="1802700" cy="54900"/>
           </a:xfrm>
           <a:prstGeom prst="rect">
             <a:avLst/>
@@ -17827,7 +17819,7 @@
         <p:spPr>
           <a:xfrm>
             <a:off x="750000" y="500000"/>
-            <a:ext cx="5950000" cy="900000"/>
+            <a:ext cx="7128300" cy="900000"/>
           </a:xfrm>
           <a:prstGeom prst="rect">
             <a:avLst/>
@@ -17893,7 +17885,7 @@
         <p:spPr>
           <a:xfrm>
             <a:off x="750000" y="1173186"/>
-            <a:ext cx="5949900" cy="399900"/>
+            <a:ext cx="6092700" cy="399900"/>
           </a:xfrm>
           <a:prstGeom prst="rect">
             <a:avLst/>
@@ -17959,7 +17951,7 @@
         <p:spPr>
           <a:xfrm>
             <a:off x="750000" y="1653175"/>
-            <a:ext cx="267900" cy="219900"/>
+            <a:ext cx="274200" cy="219900"/>
           </a:xfrm>
           <a:prstGeom prst="ellipse">
             <a:avLst/>
@@ -18017,8 +18009,8 @@
         </p:nvSpPr>
         <p:spPr>
           <a:xfrm>
-            <a:off x="1127917" y="1593175"/>
-            <a:ext cx="3047700" cy="350100"/>
+            <a:off x="1136995" y="1593175"/>
+            <a:ext cx="3120900" cy="350100"/>
           </a:xfrm>
           <a:prstGeom prst="rect">
             <a:avLst/>
@@ -18083,8 +18075,8 @@
         </p:nvSpPr>
         <p:spPr>
           <a:xfrm>
-            <a:off x="1127917" y="1963175"/>
-            <a:ext cx="3047700" cy="450000"/>
+            <a:off x="1136995" y="1963175"/>
+            <a:ext cx="3120900" cy="450000"/>
           </a:xfrm>
           <a:prstGeom prst="rect">
             <a:avLst/>
@@ -18149,8 +18141,8 @@
         </p:nvSpPr>
         <p:spPr>
           <a:xfrm>
-            <a:off x="4285641" y="1633075"/>
-            <a:ext cx="267900" cy="219900"/>
+            <a:off x="4370570" y="1633075"/>
+            <a:ext cx="274200" cy="219900"/>
           </a:xfrm>
           <a:prstGeom prst="ellipse">
             <a:avLst/>
@@ -18208,8 +18200,8 @@
         </p:nvSpPr>
         <p:spPr>
           <a:xfrm>
-            <a:off x="4663559" y="1573075"/>
-            <a:ext cx="3047700" cy="350100"/>
+            <a:off x="4757566" y="1573075"/>
+            <a:ext cx="3120900" cy="350100"/>
           </a:xfrm>
           <a:prstGeom prst="rect">
             <a:avLst/>
@@ -18274,8 +18266,8 @@
         </p:nvSpPr>
         <p:spPr>
           <a:xfrm>
-            <a:off x="4663559" y="1943075"/>
-            <a:ext cx="3047700" cy="450000"/>
+            <a:off x="4757566" y="1943075"/>
+            <a:ext cx="3120900" cy="450000"/>
           </a:xfrm>
           <a:prstGeom prst="rect">
             <a:avLst/>
@@ -18341,7 +18333,7 @@
         <p:spPr>
           <a:xfrm>
             <a:off x="750000" y="2553175"/>
-            <a:ext cx="267900" cy="219900"/>
+            <a:ext cx="274200" cy="219900"/>
           </a:xfrm>
           <a:prstGeom prst="ellipse">
             <a:avLst/>
@@ -18399,8 +18391,8 @@
         </p:nvSpPr>
         <p:spPr>
           <a:xfrm>
-            <a:off x="1127917" y="2493175"/>
-            <a:ext cx="3047700" cy="350100"/>
+            <a:off x="1136995" y="2493175"/>
+            <a:ext cx="3120900" cy="350100"/>
           </a:xfrm>
           <a:prstGeom prst="rect">
             <a:avLst/>
@@ -18465,8 +18457,8 @@
         </p:nvSpPr>
         <p:spPr>
           <a:xfrm>
-            <a:off x="1127917" y="2863175"/>
-            <a:ext cx="3047700" cy="450000"/>
+            <a:off x="1136995" y="2863175"/>
+            <a:ext cx="3120900" cy="450000"/>
           </a:xfrm>
           <a:prstGeom prst="rect">
             <a:avLst/>
@@ -18531,8 +18523,8 @@
         </p:nvSpPr>
         <p:spPr>
           <a:xfrm>
-            <a:off x="4285641" y="2533075"/>
-            <a:ext cx="267900" cy="219900"/>
+            <a:off x="4370570" y="2533075"/>
+            <a:ext cx="274200" cy="219900"/>
           </a:xfrm>
           <a:prstGeom prst="ellipse">
             <a:avLst/>
@@ -18590,8 +18582,8 @@
         </p:nvSpPr>
         <p:spPr>
           <a:xfrm>
-            <a:off x="4663559" y="2473075"/>
-            <a:ext cx="3047700" cy="350100"/>
+            <a:off x="4757566" y="2473075"/>
+            <a:ext cx="3120900" cy="350100"/>
           </a:xfrm>
           <a:prstGeom prst="rect">
             <a:avLst/>
@@ -18656,8 +18648,8 @@
         </p:nvSpPr>
         <p:spPr>
           <a:xfrm>
-            <a:off x="4663559" y="2843075"/>
-            <a:ext cx="3047700" cy="450000"/>
+            <a:off x="4757566" y="2843075"/>
+            <a:ext cx="3120900" cy="450000"/>
           </a:xfrm>
           <a:prstGeom prst="rect">
             <a:avLst/>
@@ -18723,7 +18715,7 @@
         <p:spPr>
           <a:xfrm>
             <a:off x="750000" y="3373163"/>
-            <a:ext cx="267900" cy="219900"/>
+            <a:ext cx="274200" cy="219900"/>
           </a:xfrm>
           <a:prstGeom prst="ellipse">
             <a:avLst/>
@@ -18781,8 +18773,8 @@
         </p:nvSpPr>
         <p:spPr>
           <a:xfrm>
-            <a:off x="1127917" y="3313163"/>
-            <a:ext cx="3047700" cy="350100"/>
+            <a:off x="1136995" y="3313163"/>
+            <a:ext cx="3120900" cy="350100"/>
           </a:xfrm>
           <a:prstGeom prst="rect">
             <a:avLst/>
@@ -18847,8 +18839,8 @@
         </p:nvSpPr>
         <p:spPr>
           <a:xfrm>
-            <a:off x="1127917" y="3683163"/>
-            <a:ext cx="3047700" cy="450000"/>
+            <a:off x="1136995" y="3683163"/>
+            <a:ext cx="3120900" cy="450000"/>
           </a:xfrm>
           <a:prstGeom prst="rect">
             <a:avLst/>
@@ -18913,8 +18905,8 @@
         </p:nvSpPr>
         <p:spPr>
           <a:xfrm>
-            <a:off x="4285641" y="3353063"/>
-            <a:ext cx="267900" cy="219900"/>
+            <a:off x="4370570" y="3353063"/>
+            <a:ext cx="274200" cy="219900"/>
           </a:xfrm>
           <a:prstGeom prst="ellipse">
             <a:avLst/>
@@ -18972,8 +18964,8 @@
         </p:nvSpPr>
         <p:spPr>
           <a:xfrm>
-            <a:off x="4663559" y="3293063"/>
-            <a:ext cx="3047700" cy="350100"/>
+            <a:off x="4757566" y="3293063"/>
+            <a:ext cx="3120900" cy="350100"/>
           </a:xfrm>
           <a:prstGeom prst="rect">
             <a:avLst/>
@@ -19038,8 +19030,8 @@
         </p:nvSpPr>
         <p:spPr>
           <a:xfrm>
-            <a:off x="4663559" y="3663063"/>
-            <a:ext cx="3047700" cy="450000"/>
+            <a:off x="4757566" y="3663063"/>
+            <a:ext cx="3120900" cy="450000"/>
           </a:xfrm>
           <a:prstGeom prst="rect">
             <a:avLst/>
@@ -19105,7 +19097,7 @@
         <p:spPr>
           <a:xfrm>
             <a:off x="750000" y="4350000"/>
-            <a:ext cx="5950000" cy="300000"/>
+            <a:ext cx="6093000" cy="300000"/>
           </a:xfrm>
           <a:prstGeom prst="rect">
             <a:avLst/>
@@ -19170,8 +19162,8 @@
         </p:nvSpPr>
         <p:spPr>
           <a:xfrm>
-            <a:off x="750005" y="905100"/>
-            <a:ext cx="1500000" cy="54900"/>
+            <a:off x="750006" y="905100"/>
+            <a:ext cx="1802700" cy="54900"/>
           </a:xfrm>
           <a:prstGeom prst="rect">
             <a:avLst/>
@@ -19266,8 +19258,8 @@
         </p:nvSpPr>
         <p:spPr>
           <a:xfrm>
-            <a:off x="571490" y="502920"/>
-            <a:ext cx="6309300" cy="502800"/>
+            <a:off x="571502" y="502925"/>
+            <a:ext cx="7386900" cy="502800"/>
           </a:xfrm>
           <a:prstGeom prst="rect">
             <a:avLst/>
@@ -20516,7 +20508,7 @@
         <p:spPr>
           <a:xfrm>
             <a:off x="750000" y="500000"/>
-            <a:ext cx="5950000" cy="900000"/>
+            <a:ext cx="7090500" cy="900000"/>
           </a:xfrm>
           <a:prstGeom prst="rect">
             <a:avLst/>
@@ -20582,7 +20574,7 @@
         <p:spPr>
           <a:xfrm>
             <a:off x="750000" y="1150000"/>
-            <a:ext cx="5949900" cy="399900"/>
+            <a:ext cx="7090500" cy="399900"/>
           </a:xfrm>
           <a:prstGeom prst="rect">
             <a:avLst/>
@@ -20647,8 +20639,8 @@
         </p:nvSpPr>
         <p:spPr>
           <a:xfrm>
-            <a:off x="750050" y="1550000"/>
-            <a:ext cx="6439800" cy="1200000"/>
+            <a:off x="750060" y="1550000"/>
+            <a:ext cx="7150200" cy="1200000"/>
           </a:xfrm>
           <a:prstGeom prst="roundRect">
             <a:avLst>
@@ -20714,8 +20706,8 @@
         </p:nvSpPr>
         <p:spPr>
           <a:xfrm>
-            <a:off x="912403" y="1570100"/>
-            <a:ext cx="6115200" cy="999900"/>
+            <a:off x="930321" y="1570100"/>
+            <a:ext cx="6789900" cy="999900"/>
           </a:xfrm>
           <a:prstGeom prst="rect">
             <a:avLst/>
@@ -20804,8 +20796,8 @@
         </p:nvSpPr>
         <p:spPr>
           <a:xfrm>
-            <a:off x="1500000" y="3000000"/>
-            <a:ext cx="400000" cy="400000"/>
+            <a:off x="1643774" y="3000000"/>
+            <a:ext cx="476700" cy="399900"/>
           </a:xfrm>
           <a:prstGeom prst="ellipse">
             <a:avLst/>
@@ -20845,7 +20837,7 @@
             </a:r>
             <a:endParaRPr b="0" i="0" sz="1400" u="none" cap="none" strike="noStrike">
               <a:solidFill>
-                <a:srgbClr val="000000"/>
+                <a:schemeClr val="lt1"/>
               </a:solidFill>
               <a:latin typeface="Arial"/>
               <a:ea typeface="Arial"/>
@@ -20863,8 +20855,8 @@
         </p:nvSpPr>
         <p:spPr>
           <a:xfrm>
-            <a:off x="1450000" y="3090000"/>
-            <a:ext cx="500000" cy="400000"/>
+            <a:off x="1584189" y="3090000"/>
+            <a:ext cx="595800" cy="399900"/>
           </a:xfrm>
           <a:prstGeom prst="rect">
             <a:avLst/>
@@ -20900,7 +20892,7 @@
             <a:r>
               <a:rPr b="1" i="0" lang="en-US" sz="1800" u="none" cap="none" strike="noStrike">
                 <a:solidFill>
-                  <a:srgbClr val="E8A317"/>
+                  <a:schemeClr val="lt1"/>
                 </a:solidFill>
                 <a:latin typeface="Arial Black"/>
                 <a:ea typeface="Arial Black"/>
@@ -20911,7 +20903,7 @@
             </a:r>
             <a:endParaRPr b="0" i="0" sz="1400" u="none" cap="none" strike="noStrike">
               <a:solidFill>
-                <a:srgbClr val="000000"/>
+                <a:schemeClr val="lt1"/>
               </a:solidFill>
               <a:latin typeface="Arial"/>
               <a:ea typeface="Arial"/>
@@ -20930,7 +20922,7 @@
         <p:spPr>
           <a:xfrm>
             <a:off x="750000" y="3480000"/>
-            <a:ext cx="1900000" cy="350000"/>
+            <a:ext cx="2264100" cy="350100"/>
           </a:xfrm>
           <a:prstGeom prst="rect">
             <a:avLst/>
@@ -20996,7 +20988,7 @@
         <p:spPr>
           <a:xfrm>
             <a:off x="750000" y="3830000"/>
-            <a:ext cx="1900000" cy="400000"/>
+            <a:ext cx="2264100" cy="399900"/>
           </a:xfrm>
           <a:prstGeom prst="rect">
             <a:avLst/>
@@ -21061,8 +21053,8 @@
         </p:nvSpPr>
         <p:spPr>
           <a:xfrm>
-            <a:off x="3550000" y="3000000"/>
-            <a:ext cx="400000" cy="400000"/>
+            <a:off x="4086756" y="3000000"/>
+            <a:ext cx="476700" cy="399900"/>
           </a:xfrm>
           <a:prstGeom prst="ellipse">
             <a:avLst/>
@@ -21102,7 +21094,7 @@
             </a:r>
             <a:endParaRPr b="0" i="0" sz="1400" u="none" cap="none" strike="noStrike">
               <a:solidFill>
-                <a:srgbClr val="000000"/>
+                <a:schemeClr val="lt1"/>
               </a:solidFill>
               <a:latin typeface="Arial"/>
               <a:ea typeface="Arial"/>
@@ -21120,8 +21112,8 @@
         </p:nvSpPr>
         <p:spPr>
           <a:xfrm>
-            <a:off x="3500000" y="3090000"/>
-            <a:ext cx="500000" cy="400000"/>
+            <a:off x="4027171" y="3090000"/>
+            <a:ext cx="595800" cy="399900"/>
           </a:xfrm>
           <a:prstGeom prst="rect">
             <a:avLst/>
@@ -21157,7 +21149,7 @@
             <a:r>
               <a:rPr b="1" i="0" lang="en-US" sz="1800" u="none" cap="none" strike="noStrike">
                 <a:solidFill>
-                  <a:srgbClr val="E8A317"/>
+                  <a:schemeClr val="lt1"/>
                 </a:solidFill>
                 <a:latin typeface="Arial Black"/>
                 <a:ea typeface="Arial Black"/>
@@ -21168,7 +21160,7 @@
             </a:r>
             <a:endParaRPr b="0" i="0" sz="1400" u="none" cap="none" strike="noStrike">
               <a:solidFill>
-                <a:srgbClr val="000000"/>
+                <a:schemeClr val="lt1"/>
               </a:solidFill>
               <a:latin typeface="Arial"/>
               <a:ea typeface="Arial"/>
@@ -21186,8 +21178,8 @@
         </p:nvSpPr>
         <p:spPr>
           <a:xfrm>
-            <a:off x="2800000" y="3480000"/>
-            <a:ext cx="1900000" cy="350000"/>
+            <a:off x="3192982" y="3480000"/>
+            <a:ext cx="2264100" cy="350100"/>
           </a:xfrm>
           <a:prstGeom prst="rect">
             <a:avLst/>
@@ -21252,8 +21244,8 @@
         </p:nvSpPr>
         <p:spPr>
           <a:xfrm>
-            <a:off x="2800000" y="3830000"/>
-            <a:ext cx="1900000" cy="400000"/>
+            <a:off x="3192982" y="3830000"/>
+            <a:ext cx="2264100" cy="399900"/>
           </a:xfrm>
           <a:prstGeom prst="rect">
             <a:avLst/>
@@ -21318,8 +21310,8 @@
         </p:nvSpPr>
         <p:spPr>
           <a:xfrm>
-            <a:off x="5600000" y="3000000"/>
-            <a:ext cx="400000" cy="400000"/>
+            <a:off x="6529737" y="3000000"/>
+            <a:ext cx="476700" cy="399900"/>
           </a:xfrm>
           <a:prstGeom prst="ellipse">
             <a:avLst/>
@@ -21359,7 +21351,7 @@
             </a:r>
             <a:endParaRPr b="0" i="0" sz="1400" u="none" cap="none" strike="noStrike">
               <a:solidFill>
-                <a:srgbClr val="000000"/>
+                <a:schemeClr val="lt1"/>
               </a:solidFill>
               <a:latin typeface="Arial"/>
               <a:ea typeface="Arial"/>
@@ -21377,8 +21369,8 @@
         </p:nvSpPr>
         <p:spPr>
           <a:xfrm>
-            <a:off x="5550000" y="3090000"/>
-            <a:ext cx="500000" cy="400000"/>
+            <a:off x="6470152" y="3090000"/>
+            <a:ext cx="595800" cy="399900"/>
           </a:xfrm>
           <a:prstGeom prst="rect">
             <a:avLst/>
@@ -21414,7 +21406,7 @@
             <a:r>
               <a:rPr b="1" i="0" lang="en-US" sz="1800" u="none" cap="none" strike="noStrike">
                 <a:solidFill>
-                  <a:srgbClr val="E8A317"/>
+                  <a:schemeClr val="lt1"/>
                 </a:solidFill>
                 <a:latin typeface="Arial Black"/>
                 <a:ea typeface="Arial Black"/>
@@ -21425,7 +21417,7 @@
             </a:r>
             <a:endParaRPr b="0" i="0" sz="1400" u="none" cap="none" strike="noStrike">
               <a:solidFill>
-                <a:srgbClr val="000000"/>
+                <a:schemeClr val="lt1"/>
               </a:solidFill>
               <a:latin typeface="Arial"/>
               <a:ea typeface="Arial"/>
@@ -21443,8 +21435,8 @@
         </p:nvSpPr>
         <p:spPr>
           <a:xfrm>
-            <a:off x="4850000" y="3480000"/>
-            <a:ext cx="1900000" cy="350000"/>
+            <a:off x="5635963" y="3480000"/>
+            <a:ext cx="2264100" cy="350100"/>
           </a:xfrm>
           <a:prstGeom prst="rect">
             <a:avLst/>
@@ -21509,8 +21501,8 @@
         </p:nvSpPr>
         <p:spPr>
           <a:xfrm>
-            <a:off x="4850000" y="3830000"/>
-            <a:ext cx="1900000" cy="400000"/>
+            <a:off x="5635963" y="3830000"/>
+            <a:ext cx="2264100" cy="399900"/>
           </a:xfrm>
           <a:prstGeom prst="rect">
             <a:avLst/>
@@ -21576,7 +21568,7 @@
         <p:spPr>
           <a:xfrm>
             <a:off x="750000" y="4400000"/>
-            <a:ext cx="5950000" cy="250000"/>
+            <a:ext cx="7090500" cy="249900"/>
           </a:xfrm>
           <a:prstGeom prst="rect">
             <a:avLst/>
@@ -21641,8 +21633,8 @@
         </p:nvSpPr>
         <p:spPr>
           <a:xfrm>
-            <a:off x="750005" y="905100"/>
-            <a:ext cx="1500000" cy="54900"/>
+            <a:off x="750006" y="905100"/>
+            <a:ext cx="1787400" cy="54900"/>
           </a:xfrm>
           <a:prstGeom prst="rect">
             <a:avLst/>
@@ -21737,8 +21729,8 @@
         </p:nvSpPr>
         <p:spPr>
           <a:xfrm>
-            <a:off x="750001" y="402300"/>
-            <a:ext cx="7216200" cy="502800"/>
+            <a:off x="749025" y="457050"/>
+            <a:ext cx="7180200" cy="496200"/>
           </a:xfrm>
           <a:prstGeom prst="rect">
             <a:avLst/>
@@ -21810,8 +21802,8 @@
         </p:blipFill>
         <p:spPr>
           <a:xfrm>
-            <a:off x="750010" y="998015"/>
-            <a:ext cx="4754880" cy="3566160"/>
+            <a:off x="749034" y="1045013"/>
+            <a:ext cx="4731176" cy="3519753"/>
           </a:xfrm>
           <a:prstGeom prst="rect">
             <a:avLst/>
@@ -21830,8 +21822,8 @@
         </p:nvSpPr>
         <p:spPr>
           <a:xfrm>
-            <a:off x="5308150" y="1143000"/>
-            <a:ext cx="2380200" cy="3383400"/>
+            <a:off x="5284450" y="1188111"/>
+            <a:ext cx="2368200" cy="3339300"/>
           </a:xfrm>
           <a:prstGeom prst="rect">
             <a:avLst/>
@@ -21889,8 +21881,8 @@
         </p:nvSpPr>
         <p:spPr>
           <a:xfrm>
-            <a:off x="5308150" y="1143000"/>
-            <a:ext cx="2380200" cy="54900"/>
+            <a:off x="5284450" y="1188111"/>
+            <a:ext cx="2368200" cy="54300"/>
           </a:xfrm>
           <a:prstGeom prst="rect">
             <a:avLst/>
@@ -21948,8 +21940,8 @@
         </p:nvSpPr>
         <p:spPr>
           <a:xfrm>
-            <a:off x="5411646" y="1325880"/>
-            <a:ext cx="2173500" cy="731400"/>
+            <a:off x="5387430" y="1368611"/>
+            <a:ext cx="2162700" cy="721800"/>
           </a:xfrm>
           <a:prstGeom prst="rect">
             <a:avLst/>
@@ -22094,8 +22086,8 @@
         </p:nvSpPr>
         <p:spPr>
           <a:xfrm>
-            <a:off x="5463395" y="2194550"/>
-            <a:ext cx="2225100" cy="457200"/>
+            <a:off x="5438921" y="2225977"/>
+            <a:ext cx="2214000" cy="451200"/>
           </a:xfrm>
           <a:prstGeom prst="rect">
             <a:avLst/>
@@ -22160,8 +22152,8 @@
         </p:nvSpPr>
         <p:spPr>
           <a:xfrm>
-            <a:off x="5463395" y="2697475"/>
-            <a:ext cx="2225100" cy="457200"/>
+            <a:off x="5438921" y="2722357"/>
+            <a:ext cx="2214000" cy="451200"/>
           </a:xfrm>
           <a:prstGeom prst="rect">
             <a:avLst/>
@@ -22226,8 +22218,8 @@
         </p:nvSpPr>
         <p:spPr>
           <a:xfrm>
-            <a:off x="5463395" y="3200400"/>
-            <a:ext cx="2173500" cy="457200"/>
+            <a:off x="5438921" y="3218738"/>
+            <a:ext cx="2162700" cy="451200"/>
           </a:xfrm>
           <a:prstGeom prst="rect">
             <a:avLst/>
@@ -22292,8 +22284,8 @@
         </p:nvSpPr>
         <p:spPr>
           <a:xfrm>
-            <a:off x="5463395" y="3703320"/>
-            <a:ext cx="2070000" cy="457200"/>
+            <a:off x="5438921" y="3715113"/>
+            <a:ext cx="2059800" cy="451200"/>
           </a:xfrm>
           <a:prstGeom prst="rect">
             <a:avLst/>
@@ -22358,8 +22350,8 @@
         </p:nvSpPr>
         <p:spPr>
           <a:xfrm>
-            <a:off x="556260" y="4335780"/>
-            <a:ext cx="3657600" cy="274200"/>
+            <a:off x="556250" y="4339343"/>
+            <a:ext cx="3639300" cy="270600"/>
           </a:xfrm>
           <a:prstGeom prst="rect">
             <a:avLst/>
@@ -22424,8 +22416,8 @@
         </p:nvSpPr>
         <p:spPr>
           <a:xfrm>
-            <a:off x="750005" y="905100"/>
-            <a:ext cx="1500000" cy="54900"/>
+            <a:off x="749030" y="953307"/>
+            <a:ext cx="1778400" cy="54300"/>
           </a:xfrm>
           <a:prstGeom prst="rect">
             <a:avLst/>
@@ -22521,7 +22513,7 @@
         <p:spPr>
           <a:xfrm>
             <a:off x="750000" y="500000"/>
-            <a:ext cx="5950000" cy="900000"/>
+            <a:ext cx="7157400" cy="900000"/>
           </a:xfrm>
           <a:prstGeom prst="rect">
             <a:avLst/>
@@ -22587,7 +22579,7 @@
         <p:spPr>
           <a:xfrm>
             <a:off x="750000" y="1330000"/>
-            <a:ext cx="5950000" cy="400000"/>
+            <a:ext cx="6262800" cy="399900"/>
           </a:xfrm>
           <a:prstGeom prst="rect">
             <a:avLst/>
@@ -22652,8 +22644,8 @@
         </p:nvSpPr>
         <p:spPr>
           <a:xfrm>
-            <a:off x="1100000" y="2600000"/>
-            <a:ext cx="5949900" cy="20100"/>
+            <a:off x="1118401" y="2600000"/>
+            <a:ext cx="6262800" cy="20100"/>
           </a:xfrm>
           <a:prstGeom prst="rect">
             <a:avLst/>
@@ -22711,8 +22703,8 @@
         </p:nvSpPr>
         <p:spPr>
           <a:xfrm>
-            <a:off x="1100000" y="2480000"/>
-            <a:ext cx="260100" cy="260100"/>
+            <a:off x="1118401" y="2480000"/>
+            <a:ext cx="273900" cy="260100"/>
           </a:xfrm>
           <a:prstGeom prst="ellipse">
             <a:avLst/>
@@ -22777,7 +22769,7 @@
         <p:spPr>
           <a:xfrm>
             <a:off x="750000" y="1800000"/>
-            <a:ext cx="999900" cy="399900"/>
+            <a:ext cx="1052400" cy="399900"/>
           </a:xfrm>
           <a:prstGeom prst="rect">
             <a:avLst/>
@@ -22842,8 +22834,8 @@
         </p:nvSpPr>
         <p:spPr>
           <a:xfrm>
-            <a:off x="873325" y="2820275"/>
-            <a:ext cx="927000" cy="975900"/>
+            <a:off x="879809" y="2820275"/>
+            <a:ext cx="975600" cy="975900"/>
           </a:xfrm>
           <a:prstGeom prst="rect">
             <a:avLst/>
@@ -22908,8 +22900,8 @@
         </p:nvSpPr>
         <p:spPr>
           <a:xfrm>
-            <a:off x="3013333" y="2480000"/>
-            <a:ext cx="260100" cy="260100"/>
+            <a:off x="3132327" y="2480000"/>
+            <a:ext cx="273900" cy="260100"/>
           </a:xfrm>
           <a:prstGeom prst="ellipse">
             <a:avLst/>
@@ -22973,8 +22965,8 @@
         </p:nvSpPr>
         <p:spPr>
           <a:xfrm>
-            <a:off x="2633333" y="1800000"/>
-            <a:ext cx="999900" cy="399900"/>
+            <a:off x="2732348" y="1800000"/>
+            <a:ext cx="1052400" cy="399900"/>
           </a:xfrm>
           <a:prstGeom prst="rect">
             <a:avLst/>
@@ -23039,8 +23031,8 @@
         </p:nvSpPr>
         <p:spPr>
           <a:xfrm>
-            <a:off x="2483333" y="2900000"/>
-            <a:ext cx="1299900" cy="1200000"/>
+            <a:off x="2574462" y="2900000"/>
+            <a:ext cx="1368300" cy="1200000"/>
           </a:xfrm>
           <a:prstGeom prst="rect">
             <a:avLst/>
@@ -23105,8 +23097,8 @@
         </p:nvSpPr>
         <p:spPr>
           <a:xfrm>
-            <a:off x="4896666" y="2480000"/>
-            <a:ext cx="260100" cy="260100"/>
+            <a:off x="5114675" y="2480000"/>
+            <a:ext cx="273900" cy="260100"/>
           </a:xfrm>
           <a:prstGeom prst="ellipse">
             <a:avLst/>
@@ -23170,8 +23162,8 @@
         </p:nvSpPr>
         <p:spPr>
           <a:xfrm>
-            <a:off x="4516666" y="1800000"/>
-            <a:ext cx="999900" cy="399900"/>
+            <a:off x="4714696" y="1800000"/>
+            <a:ext cx="1052400" cy="399900"/>
           </a:xfrm>
           <a:prstGeom prst="rect">
             <a:avLst/>
@@ -23236,8 +23228,8 @@
         </p:nvSpPr>
         <p:spPr>
           <a:xfrm>
-            <a:off x="4366666" y="2900000"/>
-            <a:ext cx="1299900" cy="1200000"/>
+            <a:off x="4556810" y="2900000"/>
+            <a:ext cx="1368300" cy="1200000"/>
           </a:xfrm>
           <a:prstGeom prst="rect">
             <a:avLst/>
@@ -23302,8 +23294,8 @@
         </p:nvSpPr>
         <p:spPr>
           <a:xfrm>
-            <a:off x="6779999" y="2480000"/>
-            <a:ext cx="260100" cy="260100"/>
+            <a:off x="7097023" y="2480000"/>
+            <a:ext cx="273900" cy="260100"/>
           </a:xfrm>
           <a:prstGeom prst="ellipse">
             <a:avLst/>
@@ -23367,8 +23359,8 @@
         </p:nvSpPr>
         <p:spPr>
           <a:xfrm>
-            <a:off x="6399999" y="1800000"/>
-            <a:ext cx="999900" cy="399900"/>
+            <a:off x="6697045" y="1800000"/>
+            <a:ext cx="1052400" cy="399900"/>
           </a:xfrm>
           <a:prstGeom prst="rect">
             <a:avLst/>
@@ -23433,8 +23425,8 @@
         </p:nvSpPr>
         <p:spPr>
           <a:xfrm>
-            <a:off x="6249999" y="2900000"/>
-            <a:ext cx="1299900" cy="1200000"/>
+            <a:off x="6539158" y="2900000"/>
+            <a:ext cx="1368300" cy="1200000"/>
           </a:xfrm>
           <a:prstGeom prst="rect">
             <a:avLst/>
@@ -23500,7 +23492,7 @@
         <p:spPr>
           <a:xfrm>
             <a:off x="750000" y="4400000"/>
-            <a:ext cx="5950000" cy="250000"/>
+            <a:ext cx="6262800" cy="249900"/>
           </a:xfrm>
           <a:prstGeom prst="rect">
             <a:avLst/>
@@ -23565,8 +23557,8 @@
         </p:nvSpPr>
         <p:spPr>
           <a:xfrm>
-            <a:off x="750005" y="905100"/>
-            <a:ext cx="1500000" cy="54900"/>
+            <a:off x="749030" y="953307"/>
+            <a:ext cx="1778400" cy="54300"/>
           </a:xfrm>
           <a:prstGeom prst="rect">
             <a:avLst/>
@@ -23662,7 +23654,7 @@
         <p:spPr>
           <a:xfrm>
             <a:off x="750000" y="500000"/>
-            <a:ext cx="5950000" cy="900000"/>
+            <a:ext cx="7128600" cy="900000"/>
           </a:xfrm>
           <a:prstGeom prst="rect">
             <a:avLst/>
@@ -23794,7 +23786,7 @@
         <p:spPr>
           <a:xfrm>
             <a:off x="750000" y="1667875"/>
-            <a:ext cx="3011100" cy="2482200"/>
+            <a:ext cx="3115200" cy="2482200"/>
           </a:xfrm>
           <a:prstGeom prst="roundRect">
             <a:avLst>
@@ -23854,8 +23846,8 @@
         </p:nvSpPr>
         <p:spPr>
           <a:xfrm>
-            <a:off x="865807" y="1650000"/>
-            <a:ext cx="2779500" cy="699900"/>
+            <a:off x="869807" y="1650000"/>
+            <a:ext cx="2875500" cy="699900"/>
           </a:xfrm>
           <a:prstGeom prst="rect">
             <a:avLst/>
@@ -23920,8 +23912,8 @@
         </p:nvSpPr>
         <p:spPr>
           <a:xfrm>
-            <a:off x="865807" y="2473522"/>
-            <a:ext cx="2779500" cy="399900"/>
+            <a:off x="869807" y="2473522"/>
+            <a:ext cx="2875500" cy="399900"/>
           </a:xfrm>
           <a:prstGeom prst="rect">
             <a:avLst/>
@@ -23986,8 +23978,8 @@
         </p:nvSpPr>
         <p:spPr>
           <a:xfrm>
-            <a:off x="865807" y="2800000"/>
-            <a:ext cx="2779500" cy="900000"/>
+            <a:off x="869807" y="2800000"/>
+            <a:ext cx="2875500" cy="900000"/>
           </a:xfrm>
           <a:prstGeom prst="rect">
             <a:avLst/>
@@ -24052,8 +24044,8 @@
         </p:nvSpPr>
         <p:spPr>
           <a:xfrm>
-            <a:off x="3934685" y="1750000"/>
-            <a:ext cx="3705900" cy="399900"/>
+            <a:off x="4044691" y="1750000"/>
+            <a:ext cx="3834000" cy="399900"/>
           </a:xfrm>
           <a:prstGeom prst="rect">
             <a:avLst/>
@@ -24118,8 +24110,8 @@
         </p:nvSpPr>
         <p:spPr>
           <a:xfrm>
-            <a:off x="3934685" y="2094088"/>
-            <a:ext cx="3705900" cy="1899900"/>
+            <a:off x="4044691" y="2094088"/>
+            <a:ext cx="3834000" cy="1899900"/>
           </a:xfrm>
           <a:prstGeom prst="rect">
             <a:avLst/>
@@ -24265,7 +24257,7 @@
         <p:spPr>
           <a:xfrm>
             <a:off x="750000" y="4400000"/>
-            <a:ext cx="5950000" cy="250000"/>
+            <a:ext cx="6155400" cy="249900"/>
           </a:xfrm>
           <a:prstGeom prst="rect">
             <a:avLst/>
@@ -24330,8 +24322,8 @@
         </p:nvSpPr>
         <p:spPr>
           <a:xfrm>
-            <a:off x="750005" y="905100"/>
-            <a:ext cx="1500000" cy="54900"/>
+            <a:off x="749030" y="953307"/>
+            <a:ext cx="1778400" cy="54300"/>
           </a:xfrm>
           <a:prstGeom prst="rect">
             <a:avLst/>
@@ -24426,8 +24418,8 @@
         </p:nvSpPr>
         <p:spPr>
           <a:xfrm>
-            <a:off x="749990" y="457190"/>
-            <a:ext cx="6858000" cy="502800"/>
+            <a:off x="750000" y="457200"/>
+            <a:ext cx="7113900" cy="502800"/>
           </a:xfrm>
           <a:prstGeom prst="rect">
             <a:avLst/>
@@ -24492,8 +24484,8 @@
         </p:nvSpPr>
         <p:spPr>
           <a:xfrm>
-            <a:off x="563865" y="1165840"/>
-            <a:ext cx="3200400" cy="3200400"/>
+            <a:off x="563875" y="1165850"/>
+            <a:ext cx="3296700" cy="3200400"/>
           </a:xfrm>
           <a:prstGeom prst="rect">
             <a:avLst/>
@@ -24551,8 +24543,8 @@
         </p:nvSpPr>
         <p:spPr>
           <a:xfrm>
-            <a:off x="563865" y="1165840"/>
-            <a:ext cx="3200400" cy="54900"/>
+            <a:off x="563875" y="1165850"/>
+            <a:ext cx="3296700" cy="54900"/>
           </a:xfrm>
           <a:prstGeom prst="rect">
             <a:avLst/>
@@ -24617,8 +24609,8 @@
         </p:blipFill>
         <p:spPr>
           <a:xfrm>
-            <a:off x="1752585" y="1348720"/>
-            <a:ext cx="594360" cy="594360"/>
+            <a:off x="1788396" y="1348730"/>
+            <a:ext cx="612260" cy="594360"/>
           </a:xfrm>
           <a:prstGeom prst="rect">
             <a:avLst/>
@@ -24637,8 +24629,8 @@
         </p:nvSpPr>
         <p:spPr>
           <a:xfrm>
-            <a:off x="655305" y="1988800"/>
-            <a:ext cx="3017400" cy="548700"/>
+            <a:off x="658069" y="1988810"/>
+            <a:ext cx="3108300" cy="548700"/>
           </a:xfrm>
           <a:prstGeom prst="rect">
             <a:avLst/>
@@ -24743,8 +24735,8 @@
         </p:nvSpPr>
         <p:spPr>
           <a:xfrm>
-            <a:off x="792465" y="2628880"/>
-            <a:ext cx="2834700" cy="365700"/>
+            <a:off x="799360" y="2628890"/>
+            <a:ext cx="2920200" cy="365700"/>
           </a:xfrm>
           <a:prstGeom prst="rect">
             <a:avLst/>
@@ -24809,8 +24801,8 @@
         </p:nvSpPr>
         <p:spPr>
           <a:xfrm>
-            <a:off x="792465" y="3040360"/>
-            <a:ext cx="2834700" cy="365700"/>
+            <a:off x="799360" y="3040370"/>
+            <a:ext cx="2920200" cy="365700"/>
           </a:xfrm>
           <a:prstGeom prst="rect">
             <a:avLst/>
@@ -24875,8 +24867,8 @@
         </p:nvSpPr>
         <p:spPr>
           <a:xfrm>
-            <a:off x="792465" y="3451840"/>
-            <a:ext cx="2834700" cy="365700"/>
+            <a:off x="799360" y="3451850"/>
+            <a:ext cx="2920200" cy="365700"/>
           </a:xfrm>
           <a:prstGeom prst="rect">
             <a:avLst/>
@@ -24941,8 +24933,8 @@
         </p:nvSpPr>
         <p:spPr>
           <a:xfrm>
-            <a:off x="792465" y="3863320"/>
-            <a:ext cx="2834700" cy="365700"/>
+            <a:off x="799360" y="3863330"/>
+            <a:ext cx="2920200" cy="365700"/>
           </a:xfrm>
           <a:prstGeom prst="rect">
             <a:avLst/>
@@ -25007,8 +24999,8 @@
         </p:nvSpPr>
         <p:spPr>
           <a:xfrm>
-            <a:off x="3992865" y="1165840"/>
-            <a:ext cx="3657600" cy="3200400"/>
+            <a:off x="4096145" y="1165850"/>
+            <a:ext cx="3767700" cy="3200400"/>
           </a:xfrm>
           <a:prstGeom prst="rect">
             <a:avLst/>
@@ -25066,8 +25058,8 @@
         </p:nvSpPr>
         <p:spPr>
           <a:xfrm>
-            <a:off x="3992865" y="1165840"/>
-            <a:ext cx="3657600" cy="54900"/>
+            <a:off x="4096145" y="1165850"/>
+            <a:ext cx="3767700" cy="54900"/>
           </a:xfrm>
           <a:prstGeom prst="rect">
             <a:avLst/>
@@ -25125,8 +25117,8 @@
         </p:nvSpPr>
         <p:spPr>
           <a:xfrm>
-            <a:off x="4084305" y="1303000"/>
-            <a:ext cx="3474600" cy="320100"/>
+            <a:off x="4190339" y="1303010"/>
+            <a:ext cx="3579300" cy="320100"/>
           </a:xfrm>
           <a:prstGeom prst="rect">
             <a:avLst/>
@@ -25198,8 +25190,8 @@
         </p:blipFill>
         <p:spPr>
           <a:xfrm>
-            <a:off x="4175745" y="1714480"/>
-            <a:ext cx="274320" cy="274320"/>
+            <a:off x="4284533" y="1714490"/>
+            <a:ext cx="282582" cy="274320"/>
           </a:xfrm>
           <a:prstGeom prst="rect">
             <a:avLst/>
@@ -25218,8 +25210,8 @@
         </p:nvSpPr>
         <p:spPr>
           <a:xfrm>
-            <a:off x="4541505" y="1714480"/>
-            <a:ext cx="2926200" cy="365700"/>
+            <a:off x="4661309" y="1714490"/>
+            <a:ext cx="3014400" cy="365700"/>
           </a:xfrm>
           <a:prstGeom prst="rect">
             <a:avLst/>
@@ -25291,8 +25283,8 @@
         </p:blipFill>
         <p:spPr>
           <a:xfrm>
-            <a:off x="4175745" y="2144248"/>
-            <a:ext cx="274320" cy="274320"/>
+            <a:off x="4284533" y="2144258"/>
+            <a:ext cx="282582" cy="274320"/>
           </a:xfrm>
           <a:prstGeom prst="rect">
             <a:avLst/>
@@ -25311,8 +25303,8 @@
         </p:nvSpPr>
         <p:spPr>
           <a:xfrm>
-            <a:off x="4541505" y="2144248"/>
-            <a:ext cx="2926200" cy="365700"/>
+            <a:off x="4661309" y="2144258"/>
+            <a:ext cx="3014400" cy="365700"/>
           </a:xfrm>
           <a:prstGeom prst="rect">
             <a:avLst/>
@@ -25384,8 +25376,8 @@
         </p:blipFill>
         <p:spPr>
           <a:xfrm>
-            <a:off x="4175745" y="2574016"/>
-            <a:ext cx="274320" cy="274320"/>
+            <a:off x="4284533" y="2574026"/>
+            <a:ext cx="282582" cy="274320"/>
           </a:xfrm>
           <a:prstGeom prst="rect">
             <a:avLst/>
@@ -25404,8 +25396,8 @@
         </p:nvSpPr>
         <p:spPr>
           <a:xfrm>
-            <a:off x="4541505" y="2574016"/>
-            <a:ext cx="2926200" cy="365700"/>
+            <a:off x="4661309" y="2574026"/>
+            <a:ext cx="3014400" cy="365700"/>
           </a:xfrm>
           <a:prstGeom prst="rect">
             <a:avLst/>
@@ -25477,8 +25469,8 @@
         </p:blipFill>
         <p:spPr>
           <a:xfrm>
-            <a:off x="4175745" y="3003784"/>
-            <a:ext cx="274320" cy="274320"/>
+            <a:off x="4284533" y="3003794"/>
+            <a:ext cx="282582" cy="274320"/>
           </a:xfrm>
           <a:prstGeom prst="rect">
             <a:avLst/>
@@ -25497,8 +25489,8 @@
         </p:nvSpPr>
         <p:spPr>
           <a:xfrm>
-            <a:off x="4541505" y="3003784"/>
-            <a:ext cx="2926200" cy="365700"/>
+            <a:off x="4661309" y="3003794"/>
+            <a:ext cx="3014400" cy="365700"/>
           </a:xfrm>
           <a:prstGeom prst="rect">
             <a:avLst/>
@@ -25570,8 +25562,8 @@
         </p:blipFill>
         <p:spPr>
           <a:xfrm>
-            <a:off x="4175745" y="3433552"/>
-            <a:ext cx="274320" cy="274320"/>
+            <a:off x="4284533" y="3433562"/>
+            <a:ext cx="282582" cy="274320"/>
           </a:xfrm>
           <a:prstGeom prst="rect">
             <a:avLst/>
@@ -25590,8 +25582,8 @@
         </p:nvSpPr>
         <p:spPr>
           <a:xfrm>
-            <a:off x="4541505" y="3433552"/>
-            <a:ext cx="2926200" cy="365700"/>
+            <a:off x="4661309" y="3433562"/>
+            <a:ext cx="3014400" cy="365700"/>
           </a:xfrm>
           <a:prstGeom prst="rect">
             <a:avLst/>
@@ -25663,8 +25655,8 @@
         </p:blipFill>
         <p:spPr>
           <a:xfrm>
-            <a:off x="4175745" y="3863320"/>
-            <a:ext cx="274320" cy="274320"/>
+            <a:off x="4284533" y="3863330"/>
+            <a:ext cx="282582" cy="274320"/>
           </a:xfrm>
           <a:prstGeom prst="rect">
             <a:avLst/>
@@ -25683,8 +25675,8 @@
         </p:nvSpPr>
         <p:spPr>
           <a:xfrm>
-            <a:off x="4541505" y="3863320"/>
-            <a:ext cx="2926200" cy="365700"/>
+            <a:off x="4661309" y="3863330"/>
+            <a:ext cx="3014400" cy="365700"/>
           </a:xfrm>
           <a:prstGeom prst="rect">
             <a:avLst/>
@@ -25749,8 +25741,8 @@
         </p:nvSpPr>
         <p:spPr>
           <a:xfrm>
-            <a:off x="750005" y="905100"/>
-            <a:ext cx="1500000" cy="54900"/>
+            <a:off x="749030" y="953307"/>
+            <a:ext cx="1778400" cy="54300"/>
           </a:xfrm>
           <a:prstGeom prst="rect">
             <a:avLst/>
@@ -26140,7 +26132,7 @@
         <p:spPr>
           <a:xfrm>
             <a:off x="750000" y="500000"/>
-            <a:ext cx="5950000" cy="900000"/>
+            <a:ext cx="7164900" cy="900000"/>
           </a:xfrm>
           <a:prstGeom prst="rect">
             <a:avLst/>
@@ -26206,7 +26198,7 @@
         <p:spPr>
           <a:xfrm>
             <a:off x="750000" y="1180475"/>
-            <a:ext cx="6374700" cy="399900"/>
+            <a:ext cx="7164900" cy="399900"/>
           </a:xfrm>
           <a:prstGeom prst="rect">
             <a:avLst/>
@@ -26272,7 +26264,7 @@
         <p:spPr>
           <a:xfrm>
             <a:off x="750000" y="1600475"/>
-            <a:ext cx="6374700" cy="699900"/>
+            <a:ext cx="7164900" cy="699900"/>
           </a:xfrm>
           <a:prstGeom prst="roundRect">
             <a:avLst>
@@ -26332,8 +26324,8 @@
         </p:nvSpPr>
         <p:spPr>
           <a:xfrm>
-            <a:off x="910708" y="1600475"/>
-            <a:ext cx="6053100" cy="600000"/>
+            <a:off x="930632" y="1600475"/>
+            <a:ext cx="6803400" cy="600000"/>
           </a:xfrm>
           <a:prstGeom prst="rect">
             <a:avLst/>
@@ -26398,8 +26390,8 @@
         </p:nvSpPr>
         <p:spPr>
           <a:xfrm>
-            <a:off x="750000" y="2478875"/>
-            <a:ext cx="3425100" cy="264300"/>
+            <a:off x="750000" y="2478879"/>
+            <a:ext cx="3460800" cy="264300"/>
           </a:xfrm>
           <a:prstGeom prst="rect">
             <a:avLst/>
@@ -26464,8 +26456,8 @@
         </p:nvSpPr>
         <p:spPr>
           <a:xfrm>
-            <a:off x="750000" y="2831089"/>
-            <a:ext cx="3578100" cy="1497000"/>
+            <a:off x="750000" y="2831094"/>
+            <a:ext cx="3615600" cy="1497000"/>
           </a:xfrm>
           <a:prstGeom prst="rect">
             <a:avLst/>
@@ -26650,8 +26642,8 @@
         </p:nvSpPr>
         <p:spPr>
           <a:xfrm>
-            <a:off x="4415601" y="2478875"/>
-            <a:ext cx="3425100" cy="264300"/>
+            <a:off x="4453959" y="2478879"/>
+            <a:ext cx="3460800" cy="264300"/>
           </a:xfrm>
           <a:prstGeom prst="rect">
             <a:avLst/>
@@ -26716,8 +26708,8 @@
         </p:nvSpPr>
         <p:spPr>
           <a:xfrm>
-            <a:off x="4415601" y="2831089"/>
-            <a:ext cx="3425100" cy="1497000"/>
+            <a:off x="4453959" y="2831094"/>
+            <a:ext cx="3460800" cy="1497000"/>
           </a:xfrm>
           <a:prstGeom prst="rect">
             <a:avLst/>
@@ -26902,8 +26894,8 @@
         </p:nvSpPr>
         <p:spPr>
           <a:xfrm>
-            <a:off x="750005" y="905100"/>
-            <a:ext cx="1500000" cy="54900"/>
+            <a:off x="750006" y="905100"/>
+            <a:ext cx="1806300" cy="54900"/>
           </a:xfrm>
           <a:prstGeom prst="rect">
             <a:avLst/>
@@ -26999,7 +26991,7 @@
         <p:spPr>
           <a:xfrm>
             <a:off x="750000" y="500000"/>
-            <a:ext cx="5949900" cy="900000"/>
+            <a:ext cx="7150200" cy="900000"/>
           </a:xfrm>
           <a:prstGeom prst="rect">
             <a:avLst/>
@@ -27065,7 +27057,7 @@
         <p:spPr>
           <a:xfrm>
             <a:off x="750000" y="1135625"/>
-            <a:ext cx="6554100" cy="399900"/>
+            <a:ext cx="7150200" cy="399900"/>
           </a:xfrm>
           <a:prstGeom prst="rect">
             <a:avLst/>
@@ -27131,7 +27123,7 @@
         <p:spPr>
           <a:xfrm>
             <a:off x="750000" y="1555625"/>
-            <a:ext cx="6554100" cy="699900"/>
+            <a:ext cx="7150200" cy="699900"/>
           </a:xfrm>
           <a:prstGeom prst="roundRect">
             <a:avLst>
@@ -27191,8 +27183,8 @@
         </p:nvSpPr>
         <p:spPr>
           <a:xfrm>
-            <a:off x="915232" y="1555625"/>
-            <a:ext cx="6223500" cy="600000"/>
+            <a:off x="930259" y="1555625"/>
+            <a:ext cx="6789300" cy="600000"/>
           </a:xfrm>
           <a:prstGeom prst="rect">
             <a:avLst/>
@@ -27258,7 +27250,7 @@
         <p:spPr>
           <a:xfrm>
             <a:off x="750000" y="2355625"/>
-            <a:ext cx="3375900" cy="300000"/>
+            <a:ext cx="3453900" cy="300000"/>
           </a:xfrm>
           <a:prstGeom prst="rect">
             <a:avLst/>
@@ -27324,7 +27316,7 @@
         <p:spPr>
           <a:xfrm>
             <a:off x="750000" y="2755625"/>
-            <a:ext cx="3375900" cy="1700100"/>
+            <a:ext cx="3453900" cy="1700100"/>
           </a:xfrm>
           <a:prstGeom prst="rect">
             <a:avLst/>
@@ -27509,8 +27501,8 @@
         </p:nvSpPr>
         <p:spPr>
           <a:xfrm>
-            <a:off x="4362786" y="2355625"/>
-            <a:ext cx="3375900" cy="300000"/>
+            <a:off x="4446280" y="2355625"/>
+            <a:ext cx="3453900" cy="300000"/>
           </a:xfrm>
           <a:prstGeom prst="rect">
             <a:avLst/>
@@ -27575,8 +27567,8 @@
         </p:nvSpPr>
         <p:spPr>
           <a:xfrm>
-            <a:off x="4362786" y="2755625"/>
-            <a:ext cx="3375900" cy="1700100"/>
+            <a:off x="4446280" y="2755625"/>
+            <a:ext cx="3453900" cy="1700100"/>
           </a:xfrm>
           <a:prstGeom prst="rect">
             <a:avLst/>
@@ -27827,8 +27819,8 @@
         </p:nvSpPr>
         <p:spPr>
           <a:xfrm>
-            <a:off x="750005" y="905100"/>
-            <a:ext cx="1500000" cy="54900"/>
+            <a:off x="749030" y="953307"/>
+            <a:ext cx="1778400" cy="54300"/>
           </a:xfrm>
           <a:prstGeom prst="rect">
             <a:avLst/>
@@ -27924,7 +27916,7 @@
         <p:spPr>
           <a:xfrm>
             <a:off x="750000" y="500000"/>
-            <a:ext cx="5950000" cy="900000"/>
+            <a:ext cx="7157400" cy="900000"/>
           </a:xfrm>
           <a:prstGeom prst="rect">
             <a:avLst/>
@@ -27990,7 +27982,7 @@
         <p:spPr>
           <a:xfrm>
             <a:off x="750000" y="1187950"/>
-            <a:ext cx="5949900" cy="399900"/>
+            <a:ext cx="7157400" cy="399900"/>
           </a:xfrm>
           <a:prstGeom prst="rect">
             <a:avLst/>
@@ -28056,7 +28048,7 @@
         <p:spPr>
           <a:xfrm>
             <a:off x="750000" y="1647950"/>
-            <a:ext cx="6800700" cy="380100"/>
+            <a:ext cx="7157400" cy="380100"/>
           </a:xfrm>
           <a:prstGeom prst="rect">
             <a:avLst/>
@@ -28114,8 +28106,8 @@
         </p:nvSpPr>
         <p:spPr>
           <a:xfrm>
-            <a:off x="864298" y="1647950"/>
-            <a:ext cx="2057400" cy="300000"/>
+            <a:off x="870293" y="1647950"/>
+            <a:ext cx="2165400" cy="300000"/>
           </a:xfrm>
           <a:prstGeom prst="rect">
             <a:avLst/>
@@ -28180,8 +28172,8 @@
         </p:nvSpPr>
         <p:spPr>
           <a:xfrm>
-            <a:off x="2944477" y="1657900"/>
-            <a:ext cx="1943100" cy="300000"/>
+            <a:off x="3059578" y="1657900"/>
+            <a:ext cx="2045100" cy="300000"/>
           </a:xfrm>
           <a:prstGeom prst="rect">
             <a:avLst/>
@@ -28246,8 +28238,8 @@
         </p:nvSpPr>
         <p:spPr>
           <a:xfrm>
-            <a:off x="5321909" y="1647950"/>
-            <a:ext cx="2114700" cy="300000"/>
+            <a:off x="5561708" y="1647950"/>
+            <a:ext cx="2225700" cy="300000"/>
           </a:xfrm>
           <a:prstGeom prst="rect">
             <a:avLst/>
@@ -28313,7 +28305,7 @@
         <p:spPr>
           <a:xfrm>
             <a:off x="750000" y="2027950"/>
-            <a:ext cx="6800700" cy="429900"/>
+            <a:ext cx="7157400" cy="429900"/>
           </a:xfrm>
           <a:prstGeom prst="rect">
             <a:avLst/>
@@ -28371,8 +28363,8 @@
         </p:nvSpPr>
         <p:spPr>
           <a:xfrm>
-            <a:off x="864298" y="2087950"/>
-            <a:ext cx="2171400" cy="339900"/>
+            <a:off x="870293" y="2087950"/>
+            <a:ext cx="2285400" cy="339900"/>
           </a:xfrm>
           <a:prstGeom prst="rect">
             <a:avLst/>
@@ -28437,8 +28429,8 @@
         </p:nvSpPr>
         <p:spPr>
           <a:xfrm>
-            <a:off x="2681525" y="2087950"/>
-            <a:ext cx="2469000" cy="339900"/>
+            <a:off x="2782834" y="2087950"/>
+            <a:ext cx="2598600" cy="339900"/>
           </a:xfrm>
           <a:prstGeom prst="rect">
             <a:avLst/>
@@ -28503,8 +28495,8 @@
         </p:nvSpPr>
         <p:spPr>
           <a:xfrm>
-            <a:off x="5264760" y="2087950"/>
-            <a:ext cx="2228700" cy="339900"/>
+            <a:off x="5501561" y="2087950"/>
+            <a:ext cx="2345700" cy="339900"/>
           </a:xfrm>
           <a:prstGeom prst="rect">
             <a:avLst/>
@@ -28570,7 +28562,7 @@
         <p:spPr>
           <a:xfrm>
             <a:off x="750000" y="2467950"/>
-            <a:ext cx="6800700" cy="429900"/>
+            <a:ext cx="7157400" cy="429900"/>
           </a:xfrm>
           <a:prstGeom prst="rect">
             <a:avLst/>
@@ -28628,8 +28620,8 @@
         </p:nvSpPr>
         <p:spPr>
           <a:xfrm>
-            <a:off x="864298" y="2527950"/>
-            <a:ext cx="2171400" cy="339900"/>
+            <a:off x="870293" y="2527950"/>
+            <a:ext cx="2285400" cy="339900"/>
           </a:xfrm>
           <a:prstGeom prst="rect">
             <a:avLst/>
@@ -28694,8 +28686,8 @@
         </p:nvSpPr>
         <p:spPr>
           <a:xfrm>
-            <a:off x="2681525" y="2527950"/>
-            <a:ext cx="2469000" cy="339900"/>
+            <a:off x="2782834" y="2527950"/>
+            <a:ext cx="2598600" cy="339900"/>
           </a:xfrm>
           <a:prstGeom prst="rect">
             <a:avLst/>
@@ -28760,8 +28752,8 @@
         </p:nvSpPr>
         <p:spPr>
           <a:xfrm>
-            <a:off x="5264760" y="2527950"/>
-            <a:ext cx="2228700" cy="339900"/>
+            <a:off x="5501561" y="2527950"/>
+            <a:ext cx="2345700" cy="339900"/>
           </a:xfrm>
           <a:prstGeom prst="rect">
             <a:avLst/>
@@ -28827,7 +28819,7 @@
         <p:spPr>
           <a:xfrm>
             <a:off x="750000" y="2907950"/>
-            <a:ext cx="6800700" cy="429900"/>
+            <a:ext cx="7157400" cy="429900"/>
           </a:xfrm>
           <a:prstGeom prst="rect">
             <a:avLst/>
@@ -28885,8 +28877,8 @@
         </p:nvSpPr>
         <p:spPr>
           <a:xfrm>
-            <a:off x="864298" y="2967950"/>
-            <a:ext cx="2171400" cy="339900"/>
+            <a:off x="870293" y="2967950"/>
+            <a:ext cx="2285400" cy="339900"/>
           </a:xfrm>
           <a:prstGeom prst="rect">
             <a:avLst/>
@@ -28951,8 +28943,8 @@
         </p:nvSpPr>
         <p:spPr>
           <a:xfrm>
-            <a:off x="2681525" y="2967950"/>
-            <a:ext cx="2469000" cy="339900"/>
+            <a:off x="2782834" y="2967950"/>
+            <a:ext cx="2598600" cy="339900"/>
           </a:xfrm>
           <a:prstGeom prst="rect">
             <a:avLst/>
@@ -29017,8 +29009,8 @@
         </p:nvSpPr>
         <p:spPr>
           <a:xfrm>
-            <a:off x="5264760" y="2967950"/>
-            <a:ext cx="2228700" cy="339900"/>
+            <a:off x="5501561" y="2967950"/>
+            <a:ext cx="2345700" cy="339900"/>
           </a:xfrm>
           <a:prstGeom prst="rect">
             <a:avLst/>
@@ -29084,7 +29076,7 @@
         <p:spPr>
           <a:xfrm>
             <a:off x="750000" y="3347950"/>
-            <a:ext cx="6800700" cy="429900"/>
+            <a:ext cx="7157400" cy="429900"/>
           </a:xfrm>
           <a:prstGeom prst="rect">
             <a:avLst/>
@@ -29142,8 +29134,8 @@
         </p:nvSpPr>
         <p:spPr>
           <a:xfrm>
-            <a:off x="864298" y="3407950"/>
-            <a:ext cx="2171400" cy="339900"/>
+            <a:off x="870293" y="3407950"/>
+            <a:ext cx="2285400" cy="339900"/>
           </a:xfrm>
           <a:prstGeom prst="rect">
             <a:avLst/>
@@ -29208,8 +29200,8 @@
         </p:nvSpPr>
         <p:spPr>
           <a:xfrm>
-            <a:off x="2681525" y="3407950"/>
-            <a:ext cx="2469000" cy="339900"/>
+            <a:off x="2782834" y="3407950"/>
+            <a:ext cx="2598600" cy="339900"/>
           </a:xfrm>
           <a:prstGeom prst="rect">
             <a:avLst/>
@@ -29274,8 +29266,8 @@
         </p:nvSpPr>
         <p:spPr>
           <a:xfrm>
-            <a:off x="5264760" y="3407950"/>
-            <a:ext cx="2228700" cy="339900"/>
+            <a:off x="5501561" y="3407950"/>
+            <a:ext cx="2345700" cy="339900"/>
           </a:xfrm>
           <a:prstGeom prst="rect">
             <a:avLst/>
@@ -29341,7 +29333,7 @@
         <p:spPr>
           <a:xfrm>
             <a:off x="750000" y="3787950"/>
-            <a:ext cx="6800700" cy="429900"/>
+            <a:ext cx="7157400" cy="429900"/>
           </a:xfrm>
           <a:prstGeom prst="rect">
             <a:avLst/>
@@ -29399,8 +29391,8 @@
         </p:nvSpPr>
         <p:spPr>
           <a:xfrm>
-            <a:off x="864298" y="3847950"/>
-            <a:ext cx="2171400" cy="339900"/>
+            <a:off x="870293" y="3847950"/>
+            <a:ext cx="2285400" cy="339900"/>
           </a:xfrm>
           <a:prstGeom prst="rect">
             <a:avLst/>
@@ -29465,8 +29457,8 @@
         </p:nvSpPr>
         <p:spPr>
           <a:xfrm>
-            <a:off x="2681525" y="3847950"/>
-            <a:ext cx="2469000" cy="339900"/>
+            <a:off x="2782834" y="3847950"/>
+            <a:ext cx="2598600" cy="339900"/>
           </a:xfrm>
           <a:prstGeom prst="rect">
             <a:avLst/>
@@ -29531,8 +29523,8 @@
         </p:nvSpPr>
         <p:spPr>
           <a:xfrm>
-            <a:off x="5264760" y="3847950"/>
-            <a:ext cx="2228700" cy="339900"/>
+            <a:off x="5501561" y="3847950"/>
+            <a:ext cx="2345700" cy="339900"/>
           </a:xfrm>
           <a:prstGeom prst="rect">
             <a:avLst/>
@@ -29597,8 +29589,8 @@
         </p:nvSpPr>
         <p:spPr>
           <a:xfrm>
-            <a:off x="750005" y="905100"/>
-            <a:ext cx="1500000" cy="54900"/>
+            <a:off x="749030" y="953307"/>
+            <a:ext cx="1778400" cy="54300"/>
           </a:xfrm>
           <a:prstGeom prst="rect">
             <a:avLst/>
@@ -29694,7 +29686,7 @@
         <p:spPr>
           <a:xfrm>
             <a:off x="750000" y="500000"/>
-            <a:ext cx="5950000" cy="900000"/>
+            <a:ext cx="6700800" cy="900000"/>
           </a:xfrm>
           <a:prstGeom prst="rect">
             <a:avLst/>
@@ -29760,7 +29752,7 @@
         <p:spPr>
           <a:xfrm>
             <a:off x="750000" y="1330000"/>
-            <a:ext cx="5950000" cy="400000"/>
+            <a:ext cx="6700800" cy="399900"/>
           </a:xfrm>
           <a:prstGeom prst="rect">
             <a:avLst/>
@@ -29825,8 +29817,8 @@
         </p:nvSpPr>
         <p:spPr>
           <a:xfrm>
-            <a:off x="781363" y="1700000"/>
-            <a:ext cx="420000" cy="420000"/>
+            <a:off x="785321" y="1700000"/>
+            <a:ext cx="473100" cy="420000"/>
           </a:xfrm>
           <a:prstGeom prst="ellipse">
             <a:avLst/>
@@ -29864,7 +29856,7 @@
             <a:r>
               <a:rPr b="1" i="0" lang="en-US" sz="1600" u="none" cap="none" strike="noStrike">
                 <a:solidFill>
-                  <a:srgbClr val="E8A317"/>
+                  <a:schemeClr val="lt1"/>
                 </a:solidFill>
                 <a:latin typeface="Arial Black"/>
                 <a:ea typeface="Arial Black"/>
@@ -29875,7 +29867,7 @@
             </a:r>
             <a:endParaRPr b="0" i="0" sz="1400" u="none" cap="none" strike="noStrike">
               <a:solidFill>
-                <a:srgbClr val="000000"/>
+                <a:schemeClr val="lt1"/>
               </a:solidFill>
               <a:latin typeface="Arial"/>
               <a:ea typeface="Arial"/>
@@ -29893,8 +29885,8 @@
         </p:nvSpPr>
         <p:spPr>
           <a:xfrm>
-            <a:off x="1301363" y="1760000"/>
-            <a:ext cx="2400000" cy="399900"/>
+            <a:off x="1370945" y="1760000"/>
+            <a:ext cx="2703000" cy="399900"/>
           </a:xfrm>
           <a:prstGeom prst="rect">
             <a:avLst/>
@@ -29959,8 +29951,8 @@
         </p:nvSpPr>
         <p:spPr>
           <a:xfrm>
-            <a:off x="4204761" y="1700000"/>
-            <a:ext cx="420000" cy="420000"/>
+            <a:off x="4640749" y="1700000"/>
+            <a:ext cx="473100" cy="420000"/>
           </a:xfrm>
           <a:prstGeom prst="ellipse">
             <a:avLst/>
@@ -29998,7 +29990,7 @@
             <a:r>
               <a:rPr b="1" i="0" lang="en-US" sz="1600" u="none" cap="none" strike="noStrike">
                 <a:solidFill>
-                  <a:srgbClr val="E8A317"/>
+                  <a:schemeClr val="lt1"/>
                 </a:solidFill>
                 <a:latin typeface="Arial Black"/>
                 <a:ea typeface="Arial Black"/>
@@ -30009,7 +30001,7 @@
             </a:r>
             <a:endParaRPr b="0" i="0" sz="1400" u="none" cap="none" strike="noStrike">
               <a:solidFill>
-                <a:srgbClr val="000000"/>
+                <a:schemeClr val="lt1"/>
               </a:solidFill>
               <a:latin typeface="Arial"/>
               <a:ea typeface="Arial"/>
@@ -30027,8 +30019,8 @@
         </p:nvSpPr>
         <p:spPr>
           <a:xfrm>
-            <a:off x="4724761" y="1760000"/>
-            <a:ext cx="2400000" cy="399900"/>
+            <a:off x="5226372" y="1760000"/>
+            <a:ext cx="2703000" cy="399900"/>
           </a:xfrm>
           <a:prstGeom prst="rect">
             <a:avLst/>
@@ -30093,8 +30085,8 @@
         </p:nvSpPr>
         <p:spPr>
           <a:xfrm>
-            <a:off x="781363" y="2300000"/>
-            <a:ext cx="420000" cy="420000"/>
+            <a:off x="785321" y="2300000"/>
+            <a:ext cx="473100" cy="420000"/>
           </a:xfrm>
           <a:prstGeom prst="ellipse">
             <a:avLst/>
@@ -30132,7 +30124,7 @@
             <a:r>
               <a:rPr b="1" i="0" lang="en-US" sz="1600" u="none" cap="none" strike="noStrike">
                 <a:solidFill>
-                  <a:srgbClr val="E8A317"/>
+                  <a:schemeClr val="lt1"/>
                 </a:solidFill>
                 <a:latin typeface="Arial Black"/>
                 <a:ea typeface="Arial Black"/>
@@ -30143,7 +30135,7 @@
             </a:r>
             <a:endParaRPr b="0" i="0" sz="1400" u="none" cap="none" strike="noStrike">
               <a:solidFill>
-                <a:srgbClr val="000000"/>
+                <a:schemeClr val="lt1"/>
               </a:solidFill>
               <a:latin typeface="Arial"/>
               <a:ea typeface="Arial"/>
@@ -30161,8 +30153,8 @@
         </p:nvSpPr>
         <p:spPr>
           <a:xfrm>
-            <a:off x="1301363" y="2360000"/>
-            <a:ext cx="2400000" cy="399900"/>
+            <a:off x="1370945" y="2360000"/>
+            <a:ext cx="2703000" cy="399900"/>
           </a:xfrm>
           <a:prstGeom prst="rect">
             <a:avLst/>
@@ -30227,8 +30219,8 @@
         </p:nvSpPr>
         <p:spPr>
           <a:xfrm>
-            <a:off x="4204761" y="2300000"/>
-            <a:ext cx="420000" cy="420000"/>
+            <a:off x="4640749" y="2300000"/>
+            <a:ext cx="473100" cy="420000"/>
           </a:xfrm>
           <a:prstGeom prst="ellipse">
             <a:avLst/>
@@ -30266,7 +30258,7 @@
             <a:r>
               <a:rPr b="1" i="0" lang="en-US" sz="1600" u="none" cap="none" strike="noStrike">
                 <a:solidFill>
-                  <a:srgbClr val="E8A317"/>
+                  <a:schemeClr val="lt1"/>
                 </a:solidFill>
                 <a:latin typeface="Arial Black"/>
                 <a:ea typeface="Arial Black"/>
@@ -30277,7 +30269,7 @@
             </a:r>
             <a:endParaRPr b="0" i="0" sz="1400" u="none" cap="none" strike="noStrike">
               <a:solidFill>
-                <a:srgbClr val="000000"/>
+                <a:schemeClr val="lt1"/>
               </a:solidFill>
               <a:latin typeface="Arial"/>
               <a:ea typeface="Arial"/>
@@ -30295,8 +30287,8 @@
         </p:nvSpPr>
         <p:spPr>
           <a:xfrm>
-            <a:off x="4724761" y="2360000"/>
-            <a:ext cx="2400000" cy="399900"/>
+            <a:off x="5226372" y="2360000"/>
+            <a:ext cx="2703000" cy="399900"/>
           </a:xfrm>
           <a:prstGeom prst="rect">
             <a:avLst/>
@@ -30361,8 +30353,8 @@
         </p:nvSpPr>
         <p:spPr>
           <a:xfrm>
-            <a:off x="781363" y="2900000"/>
-            <a:ext cx="420000" cy="420000"/>
+            <a:off x="785321" y="2900000"/>
+            <a:ext cx="473100" cy="420000"/>
           </a:xfrm>
           <a:prstGeom prst="ellipse">
             <a:avLst/>
@@ -30400,7 +30392,7 @@
             <a:r>
               <a:rPr b="1" i="0" lang="en-US" sz="1600" u="none" cap="none" strike="noStrike">
                 <a:solidFill>
-                  <a:srgbClr val="E8A317"/>
+                  <a:schemeClr val="lt1"/>
                 </a:solidFill>
                 <a:latin typeface="Arial Black"/>
                 <a:ea typeface="Arial Black"/>
@@ -30411,7 +30403,7 @@
             </a:r>
             <a:endParaRPr b="0" i="0" sz="1400" u="none" cap="none" strike="noStrike">
               <a:solidFill>
-                <a:srgbClr val="000000"/>
+                <a:schemeClr val="lt1"/>
               </a:solidFill>
               <a:latin typeface="Arial"/>
               <a:ea typeface="Arial"/>
@@ -30429,8 +30421,8 @@
         </p:nvSpPr>
         <p:spPr>
           <a:xfrm>
-            <a:off x="1301363" y="2960000"/>
-            <a:ext cx="2400000" cy="399900"/>
+            <a:off x="1370945" y="2960000"/>
+            <a:ext cx="2703000" cy="399900"/>
           </a:xfrm>
           <a:prstGeom prst="rect">
             <a:avLst/>
@@ -30495,8 +30487,8 @@
         </p:nvSpPr>
         <p:spPr>
           <a:xfrm>
-            <a:off x="4204761" y="2900000"/>
-            <a:ext cx="420000" cy="420000"/>
+            <a:off x="4640749" y="2900000"/>
+            <a:ext cx="473100" cy="420000"/>
           </a:xfrm>
           <a:prstGeom prst="ellipse">
             <a:avLst/>
@@ -30534,7 +30526,7 @@
             <a:r>
               <a:rPr b="1" i="0" lang="en-US" sz="1600" u="none" cap="none" strike="noStrike">
                 <a:solidFill>
-                  <a:srgbClr val="E8A317"/>
+                  <a:schemeClr val="lt1"/>
                 </a:solidFill>
                 <a:latin typeface="Arial Black"/>
                 <a:ea typeface="Arial Black"/>
@@ -30545,7 +30537,7 @@
             </a:r>
             <a:endParaRPr b="0" i="0" sz="1400" u="none" cap="none" strike="noStrike">
               <a:solidFill>
-                <a:srgbClr val="000000"/>
+                <a:schemeClr val="lt1"/>
               </a:solidFill>
               <a:latin typeface="Arial"/>
               <a:ea typeface="Arial"/>
@@ -30563,8 +30555,8 @@
         </p:nvSpPr>
         <p:spPr>
           <a:xfrm>
-            <a:off x="4724761" y="2960000"/>
-            <a:ext cx="2400000" cy="399900"/>
+            <a:off x="5226372" y="2960000"/>
+            <a:ext cx="2703000" cy="399900"/>
           </a:xfrm>
           <a:prstGeom prst="rect">
             <a:avLst/>
@@ -30629,8 +30621,8 @@
         </p:nvSpPr>
         <p:spPr>
           <a:xfrm>
-            <a:off x="781363" y="3500000"/>
-            <a:ext cx="420000" cy="420000"/>
+            <a:off x="785321" y="3500000"/>
+            <a:ext cx="473100" cy="420000"/>
           </a:xfrm>
           <a:prstGeom prst="ellipse">
             <a:avLst/>
@@ -30668,7 +30660,7 @@
             <a:r>
               <a:rPr b="1" i="0" lang="en-US" sz="1600" u="none" cap="none" strike="noStrike">
                 <a:solidFill>
-                  <a:srgbClr val="E8A317"/>
+                  <a:schemeClr val="lt1"/>
                 </a:solidFill>
                 <a:latin typeface="Arial Black"/>
                 <a:ea typeface="Arial Black"/>
@@ -30679,7 +30671,7 @@
             </a:r>
             <a:endParaRPr b="0" i="0" sz="1400" u="none" cap="none" strike="noStrike">
               <a:solidFill>
-                <a:srgbClr val="000000"/>
+                <a:schemeClr val="lt1"/>
               </a:solidFill>
               <a:latin typeface="Arial"/>
               <a:ea typeface="Arial"/>
@@ -30697,8 +30689,8 @@
         </p:nvSpPr>
         <p:spPr>
           <a:xfrm>
-            <a:off x="1301363" y="3560000"/>
-            <a:ext cx="2400000" cy="399900"/>
+            <a:off x="1370945" y="3560000"/>
+            <a:ext cx="2703000" cy="399900"/>
           </a:xfrm>
           <a:prstGeom prst="rect">
             <a:avLst/>
@@ -30763,8 +30755,8 @@
         </p:nvSpPr>
         <p:spPr>
           <a:xfrm>
-            <a:off x="4204761" y="3500000"/>
-            <a:ext cx="420000" cy="420000"/>
+            <a:off x="4640749" y="3500000"/>
+            <a:ext cx="473100" cy="420000"/>
           </a:xfrm>
           <a:prstGeom prst="ellipse">
             <a:avLst/>
@@ -30802,7 +30794,7 @@
             <a:r>
               <a:rPr b="1" i="0" lang="en-US" sz="1600" u="none" cap="none" strike="noStrike">
                 <a:solidFill>
-                  <a:srgbClr val="E8A317"/>
+                  <a:schemeClr val="lt1"/>
                 </a:solidFill>
                 <a:latin typeface="Arial Black"/>
                 <a:ea typeface="Arial Black"/>
@@ -30813,7 +30805,7 @@
             </a:r>
             <a:endParaRPr b="0" i="0" sz="1400" u="none" cap="none" strike="noStrike">
               <a:solidFill>
-                <a:srgbClr val="000000"/>
+                <a:schemeClr val="lt1"/>
               </a:solidFill>
               <a:latin typeface="Arial"/>
               <a:ea typeface="Arial"/>
@@ -30831,8 +30823,8 @@
         </p:nvSpPr>
         <p:spPr>
           <a:xfrm>
-            <a:off x="4724761" y="3560000"/>
-            <a:ext cx="2400000" cy="399900"/>
+            <a:off x="5226372" y="3560000"/>
+            <a:ext cx="2703000" cy="399900"/>
           </a:xfrm>
           <a:prstGeom prst="rect">
             <a:avLst/>
@@ -30897,8 +30889,8 @@
         </p:nvSpPr>
         <p:spPr>
           <a:xfrm>
-            <a:off x="750005" y="905100"/>
-            <a:ext cx="1500000" cy="54900"/>
+            <a:off x="750006" y="905100"/>
+            <a:ext cx="1689300" cy="54900"/>
           </a:xfrm>
           <a:prstGeom prst="rect">
             <a:avLst/>
@@ -31060,7 +31052,7 @@
         <p:spPr>
           <a:xfrm>
             <a:off x="750000" y="1180975"/>
-            <a:ext cx="6524100" cy="399900"/>
+            <a:ext cx="7143000" cy="399900"/>
           </a:xfrm>
           <a:prstGeom prst="rect">
             <a:avLst/>
@@ -31125,8 +31117,8 @@
         </p:nvSpPr>
         <p:spPr>
           <a:xfrm>
-            <a:off x="966825" y="1537750"/>
-            <a:ext cx="2247900" cy="1400100"/>
+            <a:off x="987393" y="1537750"/>
+            <a:ext cx="2461200" cy="1400100"/>
           </a:xfrm>
           <a:prstGeom prst="roundRect">
             <a:avLst>
@@ -31186,8 +31178,8 @@
         </p:nvSpPr>
         <p:spPr>
           <a:xfrm>
-            <a:off x="966825" y="1737750"/>
-            <a:ext cx="2247900" cy="399900"/>
+            <a:off x="987393" y="1737750"/>
+            <a:ext cx="2461200" cy="399900"/>
           </a:xfrm>
           <a:prstGeom prst="rect">
             <a:avLst/>
@@ -31252,8 +31244,8 @@
         </p:nvSpPr>
         <p:spPr>
           <a:xfrm>
-            <a:off x="1112619" y="2237750"/>
-            <a:ext cx="1956300" cy="600000"/>
+            <a:off x="1147017" y="2237750"/>
+            <a:ext cx="2142000" cy="600000"/>
           </a:xfrm>
           <a:prstGeom prst="rect">
             <a:avLst/>
@@ -31318,8 +31310,8 @@
         </p:nvSpPr>
         <p:spPr>
           <a:xfrm>
-            <a:off x="2997787" y="1887850"/>
-            <a:ext cx="2028600" cy="699900"/>
+            <a:off x="3211012" y="1655703"/>
+            <a:ext cx="2220900" cy="699900"/>
           </a:xfrm>
           <a:prstGeom prst="rect">
             <a:avLst/>
@@ -31384,8 +31376,8 @@
         </p:nvSpPr>
         <p:spPr>
           <a:xfrm>
-            <a:off x="4794625" y="1537750"/>
-            <a:ext cx="2247900" cy="1400100"/>
+            <a:off x="5178297" y="1537750"/>
+            <a:ext cx="2461200" cy="1400100"/>
           </a:xfrm>
           <a:prstGeom prst="roundRect">
             <a:avLst>
@@ -31445,8 +31437,8 @@
         </p:nvSpPr>
         <p:spPr>
           <a:xfrm>
-            <a:off x="4794625" y="1737750"/>
-            <a:ext cx="2247900" cy="399900"/>
+            <a:off x="5178297" y="1737750"/>
+            <a:ext cx="2461200" cy="399900"/>
           </a:xfrm>
           <a:prstGeom prst="rect">
             <a:avLst/>
@@ -31511,8 +31503,8 @@
         </p:nvSpPr>
         <p:spPr>
           <a:xfrm>
-            <a:off x="4940420" y="2237750"/>
-            <a:ext cx="1956300" cy="600000"/>
+            <a:off x="5337923" y="2237750"/>
+            <a:ext cx="2142000" cy="600000"/>
           </a:xfrm>
           <a:prstGeom prst="rect">
             <a:avLst/>
@@ -31578,7 +31570,7 @@
         <p:spPr>
           <a:xfrm>
             <a:off x="750000" y="3287850"/>
-            <a:ext cx="6524100" cy="800100"/>
+            <a:ext cx="7143000" cy="800100"/>
           </a:xfrm>
           <a:prstGeom prst="roundRect">
             <a:avLst>
@@ -31638,8 +31630,8 @@
         </p:nvSpPr>
         <p:spPr>
           <a:xfrm>
-            <a:off x="914472" y="3357850"/>
-            <a:ext cx="6195000" cy="669900"/>
+            <a:off x="930074" y="3357850"/>
+            <a:ext cx="6782700" cy="669900"/>
           </a:xfrm>
           <a:prstGeom prst="rect">
             <a:avLst/>
@@ -31728,8 +31720,8 @@
         </p:nvSpPr>
         <p:spPr>
           <a:xfrm>
-            <a:off x="750005" y="905100"/>
-            <a:ext cx="1500000" cy="54900"/>
+            <a:off x="749030" y="953307"/>
+            <a:ext cx="1778400" cy="54300"/>
           </a:xfrm>
           <a:prstGeom prst="rect">
             <a:avLst/>
@@ -32119,7 +32111,7 @@
         <p:spPr>
           <a:xfrm>
             <a:off x="750000" y="500000"/>
-            <a:ext cx="5950000" cy="900000"/>
+            <a:ext cx="7128600" cy="900000"/>
           </a:xfrm>
           <a:prstGeom prst="rect">
             <a:avLst/>
@@ -32185,7 +32177,7 @@
         <p:spPr>
           <a:xfrm>
             <a:off x="750000" y="1195425"/>
-            <a:ext cx="6210300" cy="441900"/>
+            <a:ext cx="7128600" cy="441900"/>
           </a:xfrm>
           <a:prstGeom prst="rect">
             <a:avLst/>
@@ -32251,7 +32243,7 @@
         <p:spPr>
           <a:xfrm>
             <a:off x="750000" y="1659650"/>
-            <a:ext cx="3263400" cy="1326300"/>
+            <a:ext cx="3472800" cy="1326300"/>
           </a:xfrm>
           <a:prstGeom prst="roundRect">
             <a:avLst>
@@ -32293,7 +32285,7 @@
             </a:r>
             <a:endParaRPr b="0" i="0" sz="1400" u="none" cap="none" strike="noStrike">
               <a:solidFill>
-                <a:srgbClr val="000000"/>
+                <a:schemeClr val="lt1"/>
               </a:solidFill>
               <a:latin typeface="Arial"/>
               <a:ea typeface="Arial"/>
@@ -32311,8 +32303,8 @@
         </p:nvSpPr>
         <p:spPr>
           <a:xfrm>
-            <a:off x="956109" y="1781101"/>
-            <a:ext cx="641400" cy="619200"/>
+            <a:off x="969341" y="1781100"/>
+            <a:ext cx="682500" cy="619200"/>
           </a:xfrm>
           <a:prstGeom prst="ellipse">
             <a:avLst/>
@@ -32350,7 +32342,7 @@
             <a:r>
               <a:rPr b="1" i="0" lang="en-US" sz="2400" u="none" cap="none" strike="noStrike">
                 <a:solidFill>
-                  <a:srgbClr val="E8A317"/>
+                  <a:schemeClr val="lt1"/>
                 </a:solidFill>
                 <a:latin typeface="Arial Black"/>
                 <a:ea typeface="Arial Black"/>
@@ -32361,7 +32353,7 @@
             </a:r>
             <a:endParaRPr b="0" i="0" sz="1400" u="none" cap="none" strike="noStrike">
               <a:solidFill>
-                <a:srgbClr val="000000"/>
+                <a:schemeClr val="lt1"/>
               </a:solidFill>
               <a:latin typeface="Arial"/>
               <a:ea typeface="Arial"/>
@@ -32379,8 +32371,8 @@
         </p:nvSpPr>
         <p:spPr>
           <a:xfrm>
-            <a:off x="1723292" y="1880706"/>
-            <a:ext cx="2232600" cy="420000"/>
+            <a:off x="1785778" y="1880706"/>
+            <a:ext cx="2376000" cy="420000"/>
           </a:xfrm>
           <a:prstGeom prst="rect">
             <a:avLst/>
@@ -32445,8 +32437,8 @@
         </p:nvSpPr>
         <p:spPr>
           <a:xfrm>
-            <a:off x="933208" y="2521769"/>
-            <a:ext cx="2896800" cy="441900"/>
+            <a:off x="944970" y="2521768"/>
+            <a:ext cx="3082800" cy="441900"/>
           </a:xfrm>
           <a:prstGeom prst="rect">
             <a:avLst/>
@@ -32511,8 +32503,8 @@
         </p:nvSpPr>
         <p:spPr>
           <a:xfrm>
-            <a:off x="4185146" y="1673463"/>
-            <a:ext cx="3263400" cy="1326300"/>
+            <a:off x="4405686" y="1673463"/>
+            <a:ext cx="3472800" cy="1326300"/>
           </a:xfrm>
           <a:prstGeom prst="roundRect">
             <a:avLst>
@@ -32554,7 +32546,7 @@
             </a:r>
             <a:endParaRPr b="0" i="0" sz="1400" u="none" cap="none" strike="noStrike">
               <a:solidFill>
-                <a:srgbClr val="000000"/>
+                <a:schemeClr val="lt1"/>
               </a:solidFill>
               <a:latin typeface="Arial"/>
               <a:ea typeface="Arial"/>
@@ -32572,8 +32564,8 @@
         </p:nvSpPr>
         <p:spPr>
           <a:xfrm>
-            <a:off x="4391254" y="1781101"/>
-            <a:ext cx="641400" cy="619200"/>
+            <a:off x="4625027" y="1781100"/>
+            <a:ext cx="682500" cy="619200"/>
           </a:xfrm>
           <a:prstGeom prst="ellipse">
             <a:avLst/>
@@ -32611,7 +32603,7 @@
             <a:r>
               <a:rPr b="1" i="0" lang="en-US" sz="2400" u="none" cap="none" strike="noStrike">
                 <a:solidFill>
-                  <a:srgbClr val="E8A317"/>
+                  <a:schemeClr val="lt1"/>
                 </a:solidFill>
                 <a:latin typeface="Arial Black"/>
                 <a:ea typeface="Arial Black"/>
@@ -32622,7 +32614,7 @@
             </a:r>
             <a:endParaRPr b="0" i="0" sz="1400" u="none" cap="none" strike="noStrike">
               <a:solidFill>
-                <a:srgbClr val="000000"/>
+                <a:schemeClr val="lt1"/>
               </a:solidFill>
               <a:latin typeface="Arial"/>
               <a:ea typeface="Arial"/>
@@ -32640,8 +32632,8 @@
         </p:nvSpPr>
         <p:spPr>
           <a:xfrm>
-            <a:off x="5158437" y="1880706"/>
-            <a:ext cx="2232600" cy="420000"/>
+            <a:off x="5441464" y="1880706"/>
+            <a:ext cx="2376000" cy="420000"/>
           </a:xfrm>
           <a:prstGeom prst="rect">
             <a:avLst/>
@@ -32706,8 +32698,8 @@
         </p:nvSpPr>
         <p:spPr>
           <a:xfrm>
-            <a:off x="4368353" y="2521769"/>
-            <a:ext cx="2896800" cy="441900"/>
+            <a:off x="4600656" y="2521768"/>
+            <a:ext cx="3082800" cy="441900"/>
           </a:xfrm>
           <a:prstGeom prst="rect">
             <a:avLst/>
@@ -32772,8 +32764,8 @@
         </p:nvSpPr>
         <p:spPr>
           <a:xfrm>
-            <a:off x="750000" y="3151779"/>
-            <a:ext cx="3263400" cy="1326300"/>
+            <a:off x="750000" y="3151777"/>
+            <a:ext cx="3472800" cy="1326300"/>
           </a:xfrm>
           <a:prstGeom prst="roundRect">
             <a:avLst>
@@ -32815,7 +32807,7 @@
             </a:r>
             <a:endParaRPr b="0" i="0" sz="1400" u="none" cap="none" strike="noStrike">
               <a:solidFill>
-                <a:srgbClr val="000000"/>
+                <a:schemeClr val="lt1"/>
               </a:solidFill>
               <a:latin typeface="Arial"/>
               <a:ea typeface="Arial"/>
@@ -32833,8 +32825,8 @@
         </p:nvSpPr>
         <p:spPr>
           <a:xfrm>
-            <a:off x="956109" y="3273230"/>
-            <a:ext cx="641400" cy="619200"/>
+            <a:off x="969341" y="3273227"/>
+            <a:ext cx="682500" cy="619200"/>
           </a:xfrm>
           <a:prstGeom prst="ellipse">
             <a:avLst/>
@@ -32872,7 +32864,7 @@
             <a:r>
               <a:rPr b="1" i="0" lang="en-US" sz="2400" u="none" cap="none" strike="noStrike">
                 <a:solidFill>
-                  <a:srgbClr val="E8A317"/>
+                  <a:schemeClr val="lt1"/>
                 </a:solidFill>
                 <a:latin typeface="Arial Black"/>
                 <a:ea typeface="Arial Black"/>
@@ -32883,7 +32875,7 @@
             </a:r>
             <a:endParaRPr b="0" i="0" sz="1400" u="none" cap="none" strike="noStrike">
               <a:solidFill>
-                <a:srgbClr val="000000"/>
+                <a:schemeClr val="lt1"/>
               </a:solidFill>
               <a:latin typeface="Arial"/>
               <a:ea typeface="Arial"/>
@@ -32901,8 +32893,8 @@
         </p:nvSpPr>
         <p:spPr>
           <a:xfrm>
-            <a:off x="1723292" y="3372835"/>
-            <a:ext cx="2232600" cy="420000"/>
+            <a:off x="1785778" y="3372832"/>
+            <a:ext cx="2376000" cy="420000"/>
           </a:xfrm>
           <a:prstGeom prst="rect">
             <a:avLst/>
@@ -32967,8 +32959,8 @@
         </p:nvSpPr>
         <p:spPr>
           <a:xfrm>
-            <a:off x="933208" y="4013897"/>
-            <a:ext cx="2896800" cy="441900"/>
+            <a:off x="944970" y="4013894"/>
+            <a:ext cx="3082800" cy="441900"/>
           </a:xfrm>
           <a:prstGeom prst="rect">
             <a:avLst/>
@@ -33033,8 +33025,8 @@
         </p:nvSpPr>
         <p:spPr>
           <a:xfrm>
-            <a:off x="4185146" y="3151779"/>
-            <a:ext cx="3263400" cy="1326300"/>
+            <a:off x="4405686" y="3151777"/>
+            <a:ext cx="3472800" cy="1326300"/>
           </a:xfrm>
           <a:prstGeom prst="roundRect">
             <a:avLst>
@@ -33076,7 +33068,7 @@
             </a:r>
             <a:endParaRPr b="0" i="0" sz="1400" u="none" cap="none" strike="noStrike">
               <a:solidFill>
-                <a:srgbClr val="000000"/>
+                <a:schemeClr val="lt1"/>
               </a:solidFill>
               <a:latin typeface="Arial"/>
               <a:ea typeface="Arial"/>
@@ -33094,8 +33086,8 @@
         </p:nvSpPr>
         <p:spPr>
           <a:xfrm>
-            <a:off x="4391254" y="3273230"/>
-            <a:ext cx="641400" cy="619200"/>
+            <a:off x="4625027" y="3273227"/>
+            <a:ext cx="682500" cy="619200"/>
           </a:xfrm>
           <a:prstGeom prst="ellipse">
             <a:avLst/>
@@ -33133,7 +33125,7 @@
             <a:r>
               <a:rPr b="1" i="0" lang="en-US" sz="2400" u="none" cap="none" strike="noStrike">
                 <a:solidFill>
-                  <a:srgbClr val="E8A317"/>
+                  <a:schemeClr val="lt1"/>
                 </a:solidFill>
                 <a:latin typeface="Arial Black"/>
                 <a:ea typeface="Arial Black"/>
@@ -33144,7 +33136,7 @@
             </a:r>
             <a:endParaRPr b="0" i="0" sz="1400" u="none" cap="none" strike="noStrike">
               <a:solidFill>
-                <a:srgbClr val="000000"/>
+                <a:schemeClr val="lt1"/>
               </a:solidFill>
               <a:latin typeface="Arial"/>
               <a:ea typeface="Arial"/>
@@ -33162,8 +33154,8 @@
         </p:nvSpPr>
         <p:spPr>
           <a:xfrm>
-            <a:off x="5158437" y="3372835"/>
-            <a:ext cx="2232600" cy="420000"/>
+            <a:off x="5441464" y="3372832"/>
+            <a:ext cx="2376000" cy="420000"/>
           </a:xfrm>
           <a:prstGeom prst="rect">
             <a:avLst/>
@@ -33228,8 +33220,8 @@
         </p:nvSpPr>
         <p:spPr>
           <a:xfrm>
-            <a:off x="4368353" y="4013897"/>
-            <a:ext cx="2896800" cy="441900"/>
+            <a:off x="4600656" y="4013894"/>
+            <a:ext cx="3082800" cy="441900"/>
           </a:xfrm>
           <a:prstGeom prst="rect">
             <a:avLst/>
@@ -33294,8 +33286,8 @@
         </p:nvSpPr>
         <p:spPr>
           <a:xfrm>
-            <a:off x="750005" y="905100"/>
-            <a:ext cx="1500000" cy="54900"/>
+            <a:off x="749030" y="953307"/>
+            <a:ext cx="1778400" cy="54300"/>
           </a:xfrm>
           <a:prstGeom prst="rect">
             <a:avLst/>
@@ -33391,7 +33383,7 @@
         <p:spPr>
           <a:xfrm>
             <a:off x="750000" y="500000"/>
-            <a:ext cx="5950000" cy="900000"/>
+            <a:ext cx="7143000" cy="900000"/>
           </a:xfrm>
           <a:prstGeom prst="rect">
             <a:avLst/>
@@ -33457,7 +33449,7 @@
         <p:spPr>
           <a:xfrm>
             <a:off x="750000" y="1330000"/>
-            <a:ext cx="5950000" cy="400000"/>
+            <a:ext cx="6705600" cy="399900"/>
           </a:xfrm>
           <a:prstGeom prst="rect">
             <a:avLst/>
@@ -33523,7 +33515,7 @@
         <p:spPr>
           <a:xfrm>
             <a:off x="750000" y="1750000"/>
-            <a:ext cx="6338100" cy="530100"/>
+            <a:ext cx="7143000" cy="530100"/>
           </a:xfrm>
           <a:prstGeom prst="rect">
             <a:avLst/>
@@ -33581,8 +33573,8 @@
         </p:nvSpPr>
         <p:spPr>
           <a:xfrm>
-            <a:off x="856521" y="1830000"/>
-            <a:ext cx="1704300" cy="410100"/>
+            <a:off x="870049" y="1830000"/>
+            <a:ext cx="1920600" cy="410100"/>
           </a:xfrm>
           <a:prstGeom prst="rect">
             <a:avLst/>
@@ -33647,8 +33639,8 @@
         </p:nvSpPr>
         <p:spPr>
           <a:xfrm>
-            <a:off x="2614125" y="1830000"/>
-            <a:ext cx="4367400" cy="410100"/>
+            <a:off x="2850857" y="1830000"/>
+            <a:ext cx="4922100" cy="410100"/>
           </a:xfrm>
           <a:prstGeom prst="rect">
             <a:avLst/>
@@ -33714,7 +33706,7 @@
         <p:spPr>
           <a:xfrm>
             <a:off x="750000" y="2310000"/>
-            <a:ext cx="6338100" cy="530100"/>
+            <a:ext cx="7143000" cy="530100"/>
           </a:xfrm>
           <a:prstGeom prst="rect">
             <a:avLst/>
@@ -33772,8 +33764,8 @@
         </p:nvSpPr>
         <p:spPr>
           <a:xfrm>
-            <a:off x="856521" y="2390000"/>
-            <a:ext cx="1704300" cy="410100"/>
+            <a:off x="870049" y="2390000"/>
+            <a:ext cx="1920600" cy="410100"/>
           </a:xfrm>
           <a:prstGeom prst="rect">
             <a:avLst/>
@@ -33838,8 +33830,8 @@
         </p:nvSpPr>
         <p:spPr>
           <a:xfrm>
-            <a:off x="2614125" y="2390000"/>
-            <a:ext cx="4367400" cy="410100"/>
+            <a:off x="2850857" y="2390000"/>
+            <a:ext cx="4922100" cy="410100"/>
           </a:xfrm>
           <a:prstGeom prst="rect">
             <a:avLst/>
@@ -33905,7 +33897,7 @@
         <p:spPr>
           <a:xfrm>
             <a:off x="750000" y="2870000"/>
-            <a:ext cx="6338100" cy="530100"/>
+            <a:ext cx="7143000" cy="530100"/>
           </a:xfrm>
           <a:prstGeom prst="rect">
             <a:avLst/>
@@ -33963,8 +33955,8 @@
         </p:nvSpPr>
         <p:spPr>
           <a:xfrm>
-            <a:off x="856521" y="2950000"/>
-            <a:ext cx="1704300" cy="410100"/>
+            <a:off x="870049" y="2950000"/>
+            <a:ext cx="1920600" cy="410100"/>
           </a:xfrm>
           <a:prstGeom prst="rect">
             <a:avLst/>
@@ -34029,8 +34021,8 @@
         </p:nvSpPr>
         <p:spPr>
           <a:xfrm>
-            <a:off x="2614125" y="2950000"/>
-            <a:ext cx="4367400" cy="410100"/>
+            <a:off x="2850857" y="2950000"/>
+            <a:ext cx="4922100" cy="410100"/>
           </a:xfrm>
           <a:prstGeom prst="rect">
             <a:avLst/>
@@ -34096,7 +34088,7 @@
         <p:spPr>
           <a:xfrm>
             <a:off x="750000" y="3430000"/>
-            <a:ext cx="6338100" cy="530100"/>
+            <a:ext cx="7143000" cy="530100"/>
           </a:xfrm>
           <a:prstGeom prst="rect">
             <a:avLst/>
@@ -34154,8 +34146,8 @@
         </p:nvSpPr>
         <p:spPr>
           <a:xfrm>
-            <a:off x="856521" y="3510000"/>
-            <a:ext cx="1704300" cy="410100"/>
+            <a:off x="870049" y="3510000"/>
+            <a:ext cx="1920600" cy="410100"/>
           </a:xfrm>
           <a:prstGeom prst="rect">
             <a:avLst/>
@@ -34220,8 +34212,8 @@
         </p:nvSpPr>
         <p:spPr>
           <a:xfrm>
-            <a:off x="2614125" y="3510000"/>
-            <a:ext cx="4367400" cy="410100"/>
+            <a:off x="2850857" y="3510000"/>
+            <a:ext cx="4922100" cy="410100"/>
           </a:xfrm>
           <a:prstGeom prst="rect">
             <a:avLst/>
@@ -34287,7 +34279,7 @@
         <p:spPr>
           <a:xfrm>
             <a:off x="750000" y="4090000"/>
-            <a:ext cx="5950000" cy="300000"/>
+            <a:ext cx="6705600" cy="300000"/>
           </a:xfrm>
           <a:prstGeom prst="rect">
             <a:avLst/>
@@ -34352,8 +34344,8 @@
         </p:nvSpPr>
         <p:spPr>
           <a:xfrm>
-            <a:off x="750005" y="905100"/>
-            <a:ext cx="1500000" cy="54900"/>
+            <a:off x="749030" y="953307"/>
+            <a:ext cx="1778400" cy="54300"/>
           </a:xfrm>
           <a:prstGeom prst="rect">
             <a:avLst/>
@@ -34449,7 +34441,7 @@
         <p:spPr>
           <a:xfrm>
             <a:off x="1097280" y="920000"/>
-            <a:ext cx="1900000" cy="380000"/>
+            <a:ext cx="1986300" cy="380100"/>
           </a:xfrm>
           <a:prstGeom prst="roundRect">
             <a:avLst>
@@ -34505,7 +34497,7 @@
         <p:spPr>
           <a:xfrm>
             <a:off x="1097280" y="920000"/>
-            <a:ext cx="1900000" cy="380000"/>
+            <a:ext cx="1986300" cy="380100"/>
           </a:xfrm>
           <a:prstGeom prst="rect">
             <a:avLst/>
@@ -34563,7 +34555,7 @@
         <p:spPr>
           <a:xfrm>
             <a:off x="1097275" y="1500000"/>
-            <a:ext cx="6500000" cy="1100000"/>
+            <a:ext cx="6795600" cy="1100100"/>
           </a:xfrm>
           <a:prstGeom prst="rect">
             <a:avLst/>
@@ -34621,7 +34613,7 @@
         <p:spPr>
           <a:xfrm>
             <a:off x="1097280" y="2300000"/>
-            <a:ext cx="6500000" cy="500000"/>
+            <a:ext cx="6795600" cy="500100"/>
           </a:xfrm>
           <a:prstGeom prst="rect">
             <a:avLst/>
@@ -34679,7 +34671,7 @@
         <p:spPr>
           <a:xfrm>
             <a:off x="1097280" y="3000000"/>
-            <a:ext cx="1500000" cy="54864"/>
+            <a:ext cx="1568100" cy="54900"/>
           </a:xfrm>
           <a:prstGeom prst="rect">
             <a:avLst/>
@@ -34733,7 +34725,7 @@
         <p:spPr>
           <a:xfrm>
             <a:off x="1097280" y="3150000"/>
-            <a:ext cx="6500000" cy="400000"/>
+            <a:ext cx="6795600" cy="399900"/>
           </a:xfrm>
           <a:prstGeom prst="rect">
             <a:avLst/>
@@ -34828,7 +34820,7 @@
         <p:spPr>
           <a:xfrm>
             <a:off x="750000" y="500000"/>
-            <a:ext cx="5950000" cy="900000"/>
+            <a:ext cx="7172100" cy="900000"/>
           </a:xfrm>
           <a:prstGeom prst="rect">
             <a:avLst/>
@@ -34886,7 +34878,7 @@
         <p:spPr>
           <a:xfrm>
             <a:off x="750000" y="1330000"/>
-            <a:ext cx="5950000" cy="400000"/>
+            <a:ext cx="7172100" cy="399900"/>
           </a:xfrm>
           <a:prstGeom prst="rect">
             <a:avLst/>
@@ -34944,7 +34936,7 @@
         <p:spPr>
           <a:xfrm>
             <a:off x="750000" y="1750000"/>
-            <a:ext cx="2850000" cy="700000"/>
+            <a:ext cx="3435300" cy="699900"/>
           </a:xfrm>
           <a:prstGeom prst="roundRect">
             <a:avLst>
@@ -34999,8 +34991,8 @@
         </p:nvSpPr>
         <p:spPr>
           <a:xfrm>
-            <a:off x="900000" y="1840000"/>
-            <a:ext cx="2550000" cy="350000"/>
+            <a:off x="930807" y="1840000"/>
+            <a:ext cx="3073800" cy="350100"/>
           </a:xfrm>
           <a:prstGeom prst="rect">
             <a:avLst/>
@@ -35057,8 +35049,8 @@
         </p:nvSpPr>
         <p:spPr>
           <a:xfrm>
-            <a:off x="900000" y="2210000"/>
-            <a:ext cx="2550000" cy="240000"/>
+            <a:off x="930807" y="2210000"/>
+            <a:ext cx="3073800" cy="240000"/>
           </a:xfrm>
           <a:prstGeom prst="rect">
             <a:avLst/>
@@ -35115,8 +35107,8 @@
         </p:nvSpPr>
         <p:spPr>
           <a:xfrm>
-            <a:off x="3750000" y="1750000"/>
-            <a:ext cx="2850000" cy="700000"/>
+            <a:off x="4366134" y="1750000"/>
+            <a:ext cx="3435300" cy="699900"/>
           </a:xfrm>
           <a:prstGeom prst="roundRect">
             <a:avLst>
@@ -35171,8 +35163,8 @@
         </p:nvSpPr>
         <p:spPr>
           <a:xfrm>
-            <a:off x="3900000" y="1840000"/>
-            <a:ext cx="2550000" cy="350000"/>
+            <a:off x="4546941" y="1840000"/>
+            <a:ext cx="3073800" cy="350100"/>
           </a:xfrm>
           <a:prstGeom prst="rect">
             <a:avLst/>
@@ -35229,8 +35221,8 @@
         </p:nvSpPr>
         <p:spPr>
           <a:xfrm>
-            <a:off x="3900000" y="2210000"/>
-            <a:ext cx="2550000" cy="240000"/>
+            <a:off x="4546941" y="2210000"/>
+            <a:ext cx="3073800" cy="240000"/>
           </a:xfrm>
           <a:prstGeom prst="rect">
             <a:avLst/>
@@ -35288,7 +35280,7 @@
         <p:spPr>
           <a:xfrm>
             <a:off x="750000" y="2550000"/>
-            <a:ext cx="2850000" cy="700000"/>
+            <a:ext cx="3435300" cy="699900"/>
           </a:xfrm>
           <a:prstGeom prst="roundRect">
             <a:avLst>
@@ -35343,8 +35335,8 @@
         </p:nvSpPr>
         <p:spPr>
           <a:xfrm>
-            <a:off x="900000" y="2640000"/>
-            <a:ext cx="2550000" cy="350000"/>
+            <a:off x="930807" y="2640000"/>
+            <a:ext cx="3073800" cy="350100"/>
           </a:xfrm>
           <a:prstGeom prst="rect">
             <a:avLst/>
@@ -35401,8 +35393,8 @@
         </p:nvSpPr>
         <p:spPr>
           <a:xfrm>
-            <a:off x="900000" y="3010000"/>
-            <a:ext cx="2550000" cy="240000"/>
+            <a:off x="930807" y="3010000"/>
+            <a:ext cx="3073800" cy="240000"/>
           </a:xfrm>
           <a:prstGeom prst="rect">
             <a:avLst/>
@@ -35459,8 +35451,8 @@
         </p:nvSpPr>
         <p:spPr>
           <a:xfrm>
-            <a:off x="3750000" y="2550000"/>
-            <a:ext cx="2850000" cy="700000"/>
+            <a:off x="4366134" y="2550000"/>
+            <a:ext cx="3435300" cy="699900"/>
           </a:xfrm>
           <a:prstGeom prst="roundRect">
             <a:avLst>
@@ -35515,8 +35507,8 @@
         </p:nvSpPr>
         <p:spPr>
           <a:xfrm>
-            <a:off x="3900000" y="2640000"/>
-            <a:ext cx="2550000" cy="350000"/>
+            <a:off x="4546941" y="2640000"/>
+            <a:ext cx="3073800" cy="350100"/>
           </a:xfrm>
           <a:prstGeom prst="rect">
             <a:avLst/>
@@ -35573,8 +35565,8 @@
         </p:nvSpPr>
         <p:spPr>
           <a:xfrm>
-            <a:off x="3900000" y="3010000"/>
-            <a:ext cx="2550000" cy="240000"/>
+            <a:off x="4546941" y="3010000"/>
+            <a:ext cx="3073800" cy="240000"/>
           </a:xfrm>
           <a:prstGeom prst="rect">
             <a:avLst/>
@@ -35632,7 +35624,7 @@
         <p:spPr>
           <a:xfrm>
             <a:off x="750000" y="3500000"/>
-            <a:ext cx="5950000" cy="800000"/>
+            <a:ext cx="7172100" cy="800100"/>
           </a:xfrm>
           <a:prstGeom prst="roundRect">
             <a:avLst>
@@ -35687,8 +35679,8 @@
         </p:nvSpPr>
         <p:spPr>
           <a:xfrm>
-            <a:off x="900000" y="3580000"/>
-            <a:ext cx="5650000" cy="670000"/>
+            <a:off x="930807" y="3580000"/>
+            <a:ext cx="6810300" cy="669900"/>
           </a:xfrm>
           <a:prstGeom prst="rect">
             <a:avLst/>
@@ -35746,6 +35738,65 @@
               <a:t>auditoria contábil questionou se os R$ 18 mi de provisão refletiam o risco real da carteira. Sem dados, a defesa do número era impossível.</a:t>
             </a:r>
             <a:endParaRPr/>
+          </a:p>
+        </p:txBody>
+      </p:sp>
+      <p:sp>
+        <p:nvSpPr>
+          <p:cNvPr id="645" name="Google Shape;645;p2"/>
+          <p:cNvSpPr/>
+          <p:nvPr/>
+        </p:nvSpPr>
+        <p:spPr>
+          <a:xfrm>
+            <a:off x="749030" y="953307"/>
+            <a:ext cx="1778400" cy="54300"/>
+          </a:xfrm>
+          <a:prstGeom prst="rect">
+            <a:avLst/>
+          </a:prstGeom>
+          <a:solidFill>
+            <a:srgbClr val="E8A317"/>
+          </a:solidFill>
+          <a:ln>
+            <a:noFill/>
+          </a:ln>
+        </p:spPr>
+        <p:txBody>
+          <a:bodyPr anchorCtr="0" anchor="ctr" bIns="0" lIns="0" spcFirstLastPara="1" rIns="0" wrap="square" tIns="0">
+            <a:noAutofit/>
+          </a:bodyPr>
+          <a:lstStyle/>
+          <a:p>
+            <a:pPr indent="0" lvl="0" marL="0" marR="0" rtl="0" algn="l">
+              <a:lnSpc>
+                <a:spcPct val="100000"/>
+              </a:lnSpc>
+              <a:spcBef>
+                <a:spcPts val="0"/>
+              </a:spcBef>
+              <a:spcAft>
+                <a:spcPts val="0"/>
+              </a:spcAft>
+              <a:buClr>
+                <a:srgbClr val="000000"/>
+              </a:buClr>
+              <a:buSzPts val="1400"/>
+              <a:buFont typeface="Arial"/>
+              <a:buNone/>
+            </a:pPr>
+            <a:r>
+              <a:t/>
+            </a:r>
+            <a:endParaRPr b="0" i="0" sz="1400" u="none" cap="none" strike="noStrike">
+              <a:solidFill>
+                <a:srgbClr val="000000"/>
+              </a:solidFill>
+              <a:latin typeface="Arial"/>
+              <a:ea typeface="Arial"/>
+              <a:cs typeface="Arial"/>
+              <a:sym typeface="Arial"/>
+            </a:endParaRPr>
           </a:p>
         </p:txBody>
       </p:sp>
@@ -35774,7 +35825,7 @@
     </p:bg>
     <p:spTree>
       <p:nvGrpSpPr>
-        <p:cNvPr id="648" name="Shape 648"/>
+        <p:cNvPr id="649" name="Shape 649"/>
         <p:cNvGrpSpPr/>
         <p:nvPr/>
       </p:nvGrpSpPr>
@@ -35788,14 +35839,14 @@
       </p:grpSpPr>
       <p:sp>
         <p:nvSpPr>
-          <p:cNvPr id="649" name="Google Shape;649;p24"/>
+          <p:cNvPr id="650" name="Google Shape;650;p24"/>
           <p:cNvSpPr txBox="1"/>
           <p:nvPr/>
         </p:nvSpPr>
         <p:spPr>
           <a:xfrm>
             <a:off x="750000" y="500000"/>
-            <a:ext cx="5950000" cy="900000"/>
+            <a:ext cx="7157400" cy="900000"/>
           </a:xfrm>
           <a:prstGeom prst="rect">
             <a:avLst/>
@@ -35846,14 +35897,14 @@
       </p:sp>
       <p:sp>
         <p:nvSpPr>
-          <p:cNvPr id="650" name="Google Shape;650;p24"/>
+          <p:cNvPr id="651" name="Google Shape;651;p24"/>
           <p:cNvSpPr txBox="1"/>
           <p:nvPr/>
         </p:nvSpPr>
         <p:spPr>
           <a:xfrm>
             <a:off x="750000" y="1330000"/>
-            <a:ext cx="5950000" cy="400000"/>
+            <a:ext cx="7157400" cy="399900"/>
           </a:xfrm>
           <a:prstGeom prst="rect">
             <a:avLst/>
@@ -35904,14 +35955,14 @@
       </p:sp>
       <p:sp>
         <p:nvSpPr>
-          <p:cNvPr id="651" name="Google Shape;651;p24"/>
+          <p:cNvPr id="652" name="Google Shape;652;p24"/>
           <p:cNvSpPr/>
           <p:nvPr/>
         </p:nvSpPr>
         <p:spPr>
           <a:xfrm>
             <a:off x="750000" y="1750000"/>
-            <a:ext cx="2850000" cy="1180000"/>
+            <a:ext cx="3428400" cy="1179900"/>
           </a:xfrm>
           <a:prstGeom prst="roundRect">
             <a:avLst>
@@ -35966,14 +36017,14 @@
       </p:sp>
       <p:sp>
         <p:nvSpPr>
-          <p:cNvPr id="652" name="Google Shape;652;p24"/>
+          <p:cNvPr id="653" name="Google Shape;653;p24"/>
           <p:cNvSpPr/>
           <p:nvPr/>
         </p:nvSpPr>
         <p:spPr>
           <a:xfrm>
-            <a:off x="880000" y="1860000"/>
-            <a:ext cx="460000" cy="460000"/>
+            <a:off x="906382" y="1860000"/>
+            <a:ext cx="553500" cy="459900"/>
           </a:xfrm>
           <a:prstGeom prst="ellipse">
             <a:avLst/>
@@ -36026,14 +36077,14 @@
       </p:sp>
       <p:sp>
         <p:nvSpPr>
-          <p:cNvPr id="653" name="Google Shape;653;p24"/>
+          <p:cNvPr id="654" name="Google Shape;654;p24"/>
           <p:cNvSpPr txBox="1"/>
           <p:nvPr/>
         </p:nvSpPr>
         <p:spPr>
           <a:xfrm>
-            <a:off x="1450000" y="1910000"/>
-            <a:ext cx="2050000" cy="350000"/>
+            <a:off x="1592059" y="1910000"/>
+            <a:ext cx="2466000" cy="350100"/>
           </a:xfrm>
           <a:prstGeom prst="rect">
             <a:avLst/>
@@ -36084,14 +36135,14 @@
       </p:sp>
       <p:sp>
         <p:nvSpPr>
-          <p:cNvPr id="654" name="Google Shape;654;p24"/>
+          <p:cNvPr id="655" name="Google Shape;655;p24"/>
           <p:cNvSpPr txBox="1"/>
           <p:nvPr/>
         </p:nvSpPr>
         <p:spPr>
           <a:xfrm>
-            <a:off x="910000" y="2350000"/>
-            <a:ext cx="2530000" cy="520000"/>
+            <a:off x="942471" y="2350000"/>
+            <a:ext cx="3043500" cy="519900"/>
           </a:xfrm>
           <a:prstGeom prst="rect">
             <a:avLst/>
@@ -36142,14 +36193,14 @@
       </p:sp>
       <p:sp>
         <p:nvSpPr>
-          <p:cNvPr id="655" name="Google Shape;655;p24"/>
+          <p:cNvPr id="656" name="Google Shape;656;p24"/>
           <p:cNvSpPr/>
           <p:nvPr/>
         </p:nvSpPr>
         <p:spPr>
           <a:xfrm>
-            <a:off x="3750000" y="1750000"/>
-            <a:ext cx="2850000" cy="1180000"/>
+            <a:off x="4358824" y="1750000"/>
+            <a:ext cx="3428400" cy="1179900"/>
           </a:xfrm>
           <a:prstGeom prst="roundRect">
             <a:avLst>
@@ -36204,14 +36255,14 @@
       </p:sp>
       <p:sp>
         <p:nvSpPr>
-          <p:cNvPr id="656" name="Google Shape;656;p24"/>
+          <p:cNvPr id="657" name="Google Shape;657;p24"/>
           <p:cNvSpPr/>
           <p:nvPr/>
         </p:nvSpPr>
         <p:spPr>
           <a:xfrm>
-            <a:off x="3880000" y="1860000"/>
-            <a:ext cx="460000" cy="460000"/>
+            <a:off x="4515206" y="1860000"/>
+            <a:ext cx="553500" cy="459900"/>
           </a:xfrm>
           <a:prstGeom prst="ellipse">
             <a:avLst/>
@@ -36264,14 +36315,14 @@
       </p:sp>
       <p:sp>
         <p:nvSpPr>
-          <p:cNvPr id="657" name="Google Shape;657;p24"/>
+          <p:cNvPr id="658" name="Google Shape;658;p24"/>
           <p:cNvSpPr txBox="1"/>
           <p:nvPr/>
         </p:nvSpPr>
         <p:spPr>
           <a:xfrm>
-            <a:off x="4450000" y="1910000"/>
-            <a:ext cx="2050000" cy="350000"/>
+            <a:off x="5200882" y="1910000"/>
+            <a:ext cx="2466000" cy="350100"/>
           </a:xfrm>
           <a:prstGeom prst="rect">
             <a:avLst/>
@@ -36322,14 +36373,14 @@
       </p:sp>
       <p:sp>
         <p:nvSpPr>
-          <p:cNvPr id="658" name="Google Shape;658;p24"/>
+          <p:cNvPr id="659" name="Google Shape;659;p24"/>
           <p:cNvSpPr txBox="1"/>
           <p:nvPr/>
         </p:nvSpPr>
         <p:spPr>
           <a:xfrm>
-            <a:off x="3910000" y="2350000"/>
-            <a:ext cx="2530000" cy="520000"/>
+            <a:off x="4551294" y="2350000"/>
+            <a:ext cx="3043500" cy="519900"/>
           </a:xfrm>
           <a:prstGeom prst="rect">
             <a:avLst/>
@@ -36380,14 +36431,14 @@
       </p:sp>
       <p:sp>
         <p:nvSpPr>
-          <p:cNvPr id="659" name="Google Shape;659;p24"/>
+          <p:cNvPr id="660" name="Google Shape;660;p24"/>
           <p:cNvSpPr/>
           <p:nvPr/>
         </p:nvSpPr>
         <p:spPr>
           <a:xfrm>
             <a:off x="750000" y="3030000"/>
-            <a:ext cx="2850000" cy="1180000"/>
+            <a:ext cx="3428400" cy="1179900"/>
           </a:xfrm>
           <a:prstGeom prst="roundRect">
             <a:avLst>
@@ -36442,14 +36493,14 @@
       </p:sp>
       <p:sp>
         <p:nvSpPr>
-          <p:cNvPr id="660" name="Google Shape;660;p24"/>
+          <p:cNvPr id="661" name="Google Shape;661;p24"/>
           <p:cNvSpPr/>
           <p:nvPr/>
         </p:nvSpPr>
         <p:spPr>
           <a:xfrm>
-            <a:off x="880000" y="3140000"/>
-            <a:ext cx="460000" cy="460000"/>
+            <a:off x="906382" y="3140000"/>
+            <a:ext cx="553500" cy="459900"/>
           </a:xfrm>
           <a:prstGeom prst="ellipse">
             <a:avLst/>
@@ -36502,14 +36553,14 @@
       </p:sp>
       <p:sp>
         <p:nvSpPr>
-          <p:cNvPr id="661" name="Google Shape;661;p24"/>
+          <p:cNvPr id="662" name="Google Shape;662;p24"/>
           <p:cNvSpPr txBox="1"/>
           <p:nvPr/>
         </p:nvSpPr>
         <p:spPr>
           <a:xfrm>
-            <a:off x="1450000" y="3190000"/>
-            <a:ext cx="2050000" cy="350000"/>
+            <a:off x="1592059" y="3190000"/>
+            <a:ext cx="2466000" cy="350100"/>
           </a:xfrm>
           <a:prstGeom prst="rect">
             <a:avLst/>
@@ -36560,14 +36611,14 @@
       </p:sp>
       <p:sp>
         <p:nvSpPr>
-          <p:cNvPr id="662" name="Google Shape;662;p24"/>
+          <p:cNvPr id="663" name="Google Shape;663;p24"/>
           <p:cNvSpPr txBox="1"/>
           <p:nvPr/>
         </p:nvSpPr>
         <p:spPr>
           <a:xfrm>
-            <a:off x="910000" y="3630000"/>
-            <a:ext cx="2530000" cy="520000"/>
+            <a:off x="942471" y="3630000"/>
+            <a:ext cx="3043500" cy="519900"/>
           </a:xfrm>
           <a:prstGeom prst="rect">
             <a:avLst/>
@@ -36618,14 +36669,14 @@
       </p:sp>
       <p:sp>
         <p:nvSpPr>
-          <p:cNvPr id="663" name="Google Shape;663;p24"/>
+          <p:cNvPr id="664" name="Google Shape;664;p24"/>
           <p:cNvSpPr/>
           <p:nvPr/>
         </p:nvSpPr>
         <p:spPr>
           <a:xfrm>
-            <a:off x="3750000" y="3030000"/>
-            <a:ext cx="2850000" cy="1180000"/>
+            <a:off x="4358824" y="3030000"/>
+            <a:ext cx="3428400" cy="1179900"/>
           </a:xfrm>
           <a:prstGeom prst="roundRect">
             <a:avLst>
@@ -36680,14 +36731,14 @@
       </p:sp>
       <p:sp>
         <p:nvSpPr>
-          <p:cNvPr id="664" name="Google Shape;664;p24"/>
+          <p:cNvPr id="665" name="Google Shape;665;p24"/>
           <p:cNvSpPr/>
           <p:nvPr/>
         </p:nvSpPr>
         <p:spPr>
           <a:xfrm>
-            <a:off x="3880000" y="3140000"/>
-            <a:ext cx="460000" cy="460000"/>
+            <a:off x="4515206" y="3140000"/>
+            <a:ext cx="553500" cy="459900"/>
           </a:xfrm>
           <a:prstGeom prst="ellipse">
             <a:avLst/>
@@ -36740,14 +36791,14 @@
       </p:sp>
       <p:sp>
         <p:nvSpPr>
-          <p:cNvPr id="665" name="Google Shape;665;p24"/>
+          <p:cNvPr id="666" name="Google Shape;666;p24"/>
           <p:cNvSpPr txBox="1"/>
           <p:nvPr/>
         </p:nvSpPr>
         <p:spPr>
           <a:xfrm>
-            <a:off x="4450000" y="3190000"/>
-            <a:ext cx="2050000" cy="350000"/>
+            <a:off x="5200882" y="3190000"/>
+            <a:ext cx="2466000" cy="350100"/>
           </a:xfrm>
           <a:prstGeom prst="rect">
             <a:avLst/>
@@ -36798,14 +36849,14 @@
       </p:sp>
       <p:sp>
         <p:nvSpPr>
-          <p:cNvPr id="666" name="Google Shape;666;p24"/>
+          <p:cNvPr id="667" name="Google Shape;667;p24"/>
           <p:cNvSpPr txBox="1"/>
           <p:nvPr/>
         </p:nvSpPr>
         <p:spPr>
           <a:xfrm>
-            <a:off x="3910000" y="3630000"/>
-            <a:ext cx="2530000" cy="520000"/>
+            <a:off x="4551294" y="3630000"/>
+            <a:ext cx="3043500" cy="519900"/>
           </a:xfrm>
           <a:prstGeom prst="rect">
             <a:avLst/>
@@ -36851,6 +36902,65 @@
               <a:t>Provisão recalibrada por faixa de risco e estratégia diferenciada de acordo nos juízos identificados.</a:t>
             </a:r>
             <a:endParaRPr/>
+          </a:p>
+        </p:txBody>
+      </p:sp>
+      <p:sp>
+        <p:nvSpPr>
+          <p:cNvPr id="668" name="Google Shape;668;p24"/>
+          <p:cNvSpPr/>
+          <p:nvPr/>
+        </p:nvSpPr>
+        <p:spPr>
+          <a:xfrm>
+            <a:off x="749030" y="953307"/>
+            <a:ext cx="1778400" cy="54300"/>
+          </a:xfrm>
+          <a:prstGeom prst="rect">
+            <a:avLst/>
+          </a:prstGeom>
+          <a:solidFill>
+            <a:srgbClr val="E8A317"/>
+          </a:solidFill>
+          <a:ln>
+            <a:noFill/>
+          </a:ln>
+        </p:spPr>
+        <p:txBody>
+          <a:bodyPr anchorCtr="0" anchor="ctr" bIns="0" lIns="0" spcFirstLastPara="1" rIns="0" wrap="square" tIns="0">
+            <a:noAutofit/>
+          </a:bodyPr>
+          <a:lstStyle/>
+          <a:p>
+            <a:pPr indent="0" lvl="0" marL="0" marR="0" rtl="0" algn="l">
+              <a:lnSpc>
+                <a:spcPct val="100000"/>
+              </a:lnSpc>
+              <a:spcBef>
+                <a:spcPts val="0"/>
+              </a:spcBef>
+              <a:spcAft>
+                <a:spcPts val="0"/>
+              </a:spcAft>
+              <a:buClr>
+                <a:srgbClr val="000000"/>
+              </a:buClr>
+              <a:buSzPts val="1400"/>
+              <a:buFont typeface="Arial"/>
+              <a:buNone/>
+            </a:pPr>
+            <a:r>
+              <a:t/>
+            </a:r>
+            <a:endParaRPr b="0" i="0" sz="1400" u="none" cap="none" strike="noStrike">
+              <a:solidFill>
+                <a:srgbClr val="000000"/>
+              </a:solidFill>
+              <a:latin typeface="Arial"/>
+              <a:ea typeface="Arial"/>
+              <a:cs typeface="Arial"/>
+              <a:sym typeface="Arial"/>
+            </a:endParaRPr>
           </a:p>
         </p:txBody>
       </p:sp>
@@ -36879,7 +36989,7 @@
     </p:bg>
     <p:spTree>
       <p:nvGrpSpPr>
-        <p:cNvPr id="670" name="Shape 670"/>
+        <p:cNvPr id="672" name="Shape 672"/>
         <p:cNvGrpSpPr/>
         <p:nvPr/>
       </p:nvGrpSpPr>
@@ -36893,14 +37003,14 @@
       </p:grpSpPr>
       <p:sp>
         <p:nvSpPr>
-          <p:cNvPr id="671" name="Google Shape;671;p44"/>
+          <p:cNvPr id="673" name="Google Shape;673;p44"/>
           <p:cNvSpPr txBox="1"/>
           <p:nvPr/>
         </p:nvSpPr>
         <p:spPr>
           <a:xfrm>
             <a:off x="750000" y="500000"/>
-            <a:ext cx="5950000" cy="900000"/>
+            <a:ext cx="7143000" cy="900000"/>
           </a:xfrm>
           <a:prstGeom prst="rect">
             <a:avLst/>
@@ -36951,14 +37061,14 @@
       </p:sp>
       <p:sp>
         <p:nvSpPr>
-          <p:cNvPr id="672" name="Google Shape;672;p44"/>
+          <p:cNvPr id="674" name="Google Shape;674;p44"/>
           <p:cNvSpPr txBox="1"/>
           <p:nvPr/>
         </p:nvSpPr>
         <p:spPr>
           <a:xfrm>
             <a:off x="750000" y="1330000"/>
-            <a:ext cx="5950000" cy="400000"/>
+            <a:ext cx="7143000" cy="399900"/>
           </a:xfrm>
           <a:prstGeom prst="rect">
             <a:avLst/>
@@ -37009,14 +37119,14 @@
       </p:sp>
       <p:sp>
         <p:nvSpPr>
-          <p:cNvPr id="673" name="Google Shape;673;p44"/>
+          <p:cNvPr id="675" name="Google Shape;675;p44"/>
           <p:cNvSpPr/>
           <p:nvPr/>
         </p:nvSpPr>
         <p:spPr>
           <a:xfrm>
-            <a:off x="2750000" y="1830000"/>
-            <a:ext cx="6000" cy="1900000"/>
+            <a:off x="3151040" y="1830000"/>
+            <a:ext cx="7200" cy="1899900"/>
           </a:xfrm>
           <a:prstGeom prst="rect">
             <a:avLst/>
@@ -37063,14 +37173,14 @@
       </p:sp>
       <p:sp>
         <p:nvSpPr>
-          <p:cNvPr id="674" name="Google Shape;674;p44"/>
+          <p:cNvPr id="676" name="Google Shape;676;p44"/>
           <p:cNvSpPr txBox="1"/>
           <p:nvPr/>
         </p:nvSpPr>
         <p:spPr>
           <a:xfrm>
-            <a:off x="2500000" y="1550000"/>
-            <a:ext cx="500000" cy="240000"/>
+            <a:off x="2850910" y="1550000"/>
+            <a:ext cx="600300" cy="240000"/>
           </a:xfrm>
           <a:prstGeom prst="rect">
             <a:avLst/>
@@ -37121,14 +37231,14 @@
       </p:sp>
       <p:sp>
         <p:nvSpPr>
-          <p:cNvPr id="675" name="Google Shape;675;p44"/>
+          <p:cNvPr id="677" name="Google Shape;677;p44"/>
           <p:cNvSpPr/>
           <p:nvPr/>
         </p:nvSpPr>
         <p:spPr>
           <a:xfrm>
-            <a:off x="3625000" y="1830000"/>
-            <a:ext cx="6000" cy="1900000"/>
+            <a:off x="4201496" y="1830000"/>
+            <a:ext cx="7200" cy="1899900"/>
           </a:xfrm>
           <a:prstGeom prst="rect">
             <a:avLst/>
@@ -37175,14 +37285,14 @@
       </p:sp>
       <p:sp>
         <p:nvSpPr>
-          <p:cNvPr id="676" name="Google Shape;676;p44"/>
+          <p:cNvPr id="678" name="Google Shape;678;p44"/>
           <p:cNvSpPr txBox="1"/>
           <p:nvPr/>
         </p:nvSpPr>
         <p:spPr>
           <a:xfrm>
-            <a:off x="3375000" y="1550000"/>
-            <a:ext cx="500000" cy="240000"/>
+            <a:off x="3901365" y="1550000"/>
+            <a:ext cx="600300" cy="240000"/>
           </a:xfrm>
           <a:prstGeom prst="rect">
             <a:avLst/>
@@ -37233,14 +37343,14 @@
       </p:sp>
       <p:sp>
         <p:nvSpPr>
-          <p:cNvPr id="677" name="Google Shape;677;p44"/>
+          <p:cNvPr id="679" name="Google Shape;679;p44"/>
           <p:cNvSpPr/>
           <p:nvPr/>
         </p:nvSpPr>
         <p:spPr>
           <a:xfrm>
-            <a:off x="4500000" y="1830000"/>
-            <a:ext cx="6000" cy="1900000"/>
+            <a:off x="5251951" y="1830000"/>
+            <a:ext cx="7200" cy="1899900"/>
           </a:xfrm>
           <a:prstGeom prst="rect">
             <a:avLst/>
@@ -37287,14 +37397,14 @@
       </p:sp>
       <p:sp>
         <p:nvSpPr>
-          <p:cNvPr id="678" name="Google Shape;678;p44"/>
+          <p:cNvPr id="680" name="Google Shape;680;p44"/>
           <p:cNvSpPr txBox="1"/>
           <p:nvPr/>
         </p:nvSpPr>
         <p:spPr>
           <a:xfrm>
-            <a:off x="4250000" y="1550000"/>
-            <a:ext cx="500000" cy="240000"/>
+            <a:off x="4951821" y="1550000"/>
+            <a:ext cx="600300" cy="240000"/>
           </a:xfrm>
           <a:prstGeom prst="rect">
             <a:avLst/>
@@ -37345,14 +37455,14 @@
       </p:sp>
       <p:sp>
         <p:nvSpPr>
-          <p:cNvPr id="679" name="Google Shape;679;p44"/>
+          <p:cNvPr id="681" name="Google Shape;681;p44"/>
           <p:cNvSpPr/>
           <p:nvPr/>
         </p:nvSpPr>
         <p:spPr>
           <a:xfrm>
-            <a:off x="5375000" y="1830000"/>
-            <a:ext cx="6000" cy="1900000"/>
+            <a:off x="6302406" y="1830000"/>
+            <a:ext cx="7200" cy="1899900"/>
           </a:xfrm>
           <a:prstGeom prst="rect">
             <a:avLst/>
@@ -37399,14 +37509,14 @@
       </p:sp>
       <p:sp>
         <p:nvSpPr>
-          <p:cNvPr id="680" name="Google Shape;680;p44"/>
+          <p:cNvPr id="682" name="Google Shape;682;p44"/>
           <p:cNvSpPr txBox="1"/>
           <p:nvPr/>
         </p:nvSpPr>
         <p:spPr>
           <a:xfrm>
-            <a:off x="5125000" y="1550000"/>
-            <a:ext cx="500000" cy="240000"/>
+            <a:off x="6002276" y="1550000"/>
+            <a:ext cx="600300" cy="240000"/>
           </a:xfrm>
           <a:prstGeom prst="rect">
             <a:avLst/>
@@ -37457,14 +37567,14 @@
       </p:sp>
       <p:sp>
         <p:nvSpPr>
-          <p:cNvPr id="681" name="Google Shape;681;p44"/>
+          <p:cNvPr id="683" name="Google Shape;683;p44"/>
           <p:cNvSpPr/>
           <p:nvPr/>
         </p:nvSpPr>
         <p:spPr>
           <a:xfrm>
-            <a:off x="6250000" y="1830000"/>
-            <a:ext cx="6000" cy="1900000"/>
+            <a:off x="7352861" y="1830000"/>
+            <a:ext cx="7200" cy="1899900"/>
           </a:xfrm>
           <a:prstGeom prst="rect">
             <a:avLst/>
@@ -37511,14 +37621,14 @@
       </p:sp>
       <p:sp>
         <p:nvSpPr>
-          <p:cNvPr id="682" name="Google Shape;682;p44"/>
+          <p:cNvPr id="684" name="Google Shape;684;p44"/>
           <p:cNvSpPr txBox="1"/>
           <p:nvPr/>
         </p:nvSpPr>
         <p:spPr>
           <a:xfrm>
-            <a:off x="6000000" y="1550000"/>
-            <a:ext cx="500000" cy="240000"/>
+            <a:off x="7052731" y="1550000"/>
+            <a:ext cx="600300" cy="240000"/>
           </a:xfrm>
           <a:prstGeom prst="rect">
             <a:avLst/>
@@ -37569,14 +37679,14 @@
       </p:sp>
       <p:sp>
         <p:nvSpPr>
-          <p:cNvPr id="683" name="Google Shape;683;p44"/>
+          <p:cNvPr id="685" name="Google Shape;685;p44"/>
           <p:cNvSpPr txBox="1"/>
           <p:nvPr/>
         </p:nvSpPr>
         <p:spPr>
           <a:xfrm>
-            <a:off x="1050000" y="1930000"/>
-            <a:ext cx="1620000" cy="210000"/>
+            <a:off x="1110156" y="1930000"/>
+            <a:ext cx="1944900" cy="210000"/>
           </a:xfrm>
           <a:prstGeom prst="rect">
             <a:avLst/>
@@ -37627,14 +37737,14 @@
       </p:sp>
       <p:sp>
         <p:nvSpPr>
-          <p:cNvPr id="684" name="Google Shape;684;p44"/>
+          <p:cNvPr id="686" name="Google Shape;686;p44"/>
           <p:cNvSpPr/>
           <p:nvPr/>
         </p:nvSpPr>
         <p:spPr>
           <a:xfrm>
-            <a:off x="2750000" y="1950000"/>
-            <a:ext cx="2730000" cy="160000"/>
+            <a:off x="3151040" y="1950000"/>
+            <a:ext cx="3277500" cy="159900"/>
           </a:xfrm>
           <a:prstGeom prst="rect">
             <a:avLst/>
@@ -37681,14 +37791,14 @@
       </p:sp>
       <p:sp>
         <p:nvSpPr>
-          <p:cNvPr id="685" name="Google Shape;685;p44"/>
+          <p:cNvPr id="687" name="Google Shape;687;p44"/>
           <p:cNvSpPr txBox="1"/>
           <p:nvPr/>
         </p:nvSpPr>
         <p:spPr>
           <a:xfrm>
-            <a:off x="5530000" y="1930000"/>
-            <a:ext cx="400000" cy="210000"/>
+            <a:off x="6488486" y="1930000"/>
+            <a:ext cx="480300" cy="210000"/>
           </a:xfrm>
           <a:prstGeom prst="rect">
             <a:avLst/>
@@ -37739,14 +37849,14 @@
       </p:sp>
       <p:sp>
         <p:nvSpPr>
-          <p:cNvPr id="686" name="Google Shape;686;p44"/>
+          <p:cNvPr id="688" name="Google Shape;688;p44"/>
           <p:cNvSpPr txBox="1"/>
           <p:nvPr/>
         </p:nvSpPr>
         <p:spPr>
           <a:xfrm>
-            <a:off x="1050000" y="2180000"/>
-            <a:ext cx="1620000" cy="210000"/>
+            <a:off x="1110156" y="2180000"/>
+            <a:ext cx="1944900" cy="210000"/>
           </a:xfrm>
           <a:prstGeom prst="rect">
             <a:avLst/>
@@ -37797,14 +37907,14 @@
       </p:sp>
       <p:sp>
         <p:nvSpPr>
-          <p:cNvPr id="687" name="Google Shape;687;p44"/>
+          <p:cNvPr id="689" name="Google Shape;689;p44"/>
           <p:cNvSpPr/>
           <p:nvPr/>
         </p:nvSpPr>
         <p:spPr>
           <a:xfrm>
-            <a:off x="2750000" y="2200000"/>
-            <a:ext cx="2485000" cy="160000"/>
+            <a:off x="3151040" y="2200000"/>
+            <a:ext cx="2983200" cy="159900"/>
           </a:xfrm>
           <a:prstGeom prst="rect">
             <a:avLst/>
@@ -37851,14 +37961,14 @@
       </p:sp>
       <p:sp>
         <p:nvSpPr>
-          <p:cNvPr id="688" name="Google Shape;688;p44"/>
+          <p:cNvPr id="690" name="Google Shape;690;p44"/>
           <p:cNvSpPr txBox="1"/>
           <p:nvPr/>
         </p:nvSpPr>
         <p:spPr>
           <a:xfrm>
-            <a:off x="5285000" y="2180000"/>
-            <a:ext cx="400000" cy="210000"/>
+            <a:off x="6194359" y="2180000"/>
+            <a:ext cx="480300" cy="210000"/>
           </a:xfrm>
           <a:prstGeom prst="rect">
             <a:avLst/>
@@ -37909,14 +38019,14 @@
       </p:sp>
       <p:sp>
         <p:nvSpPr>
-          <p:cNvPr id="689" name="Google Shape;689;p44"/>
+          <p:cNvPr id="691" name="Google Shape;691;p44"/>
           <p:cNvSpPr txBox="1"/>
           <p:nvPr/>
         </p:nvSpPr>
         <p:spPr>
           <a:xfrm>
-            <a:off x="1050000" y="2430000"/>
-            <a:ext cx="1620000" cy="210000"/>
+            <a:off x="1110156" y="2430000"/>
+            <a:ext cx="1944900" cy="210000"/>
           </a:xfrm>
           <a:prstGeom prst="rect">
             <a:avLst/>
@@ -37967,14 +38077,14 @@
       </p:sp>
       <p:sp>
         <p:nvSpPr>
-          <p:cNvPr id="690" name="Google Shape;690;p44"/>
+          <p:cNvPr id="692" name="Google Shape;692;p44"/>
           <p:cNvSpPr/>
           <p:nvPr/>
         </p:nvSpPr>
         <p:spPr>
           <a:xfrm>
-            <a:off x="2750000" y="2450000"/>
-            <a:ext cx="2240000" cy="160000"/>
+            <a:off x="3151040" y="2450000"/>
+            <a:ext cx="2689200" cy="159900"/>
           </a:xfrm>
           <a:prstGeom prst="rect">
             <a:avLst/>
@@ -38021,14 +38131,14 @@
       </p:sp>
       <p:sp>
         <p:nvSpPr>
-          <p:cNvPr id="691" name="Google Shape;691;p44"/>
+          <p:cNvPr id="693" name="Google Shape;693;p44"/>
           <p:cNvSpPr txBox="1"/>
           <p:nvPr/>
         </p:nvSpPr>
         <p:spPr>
           <a:xfrm>
-            <a:off x="5040000" y="2430000"/>
-            <a:ext cx="400000" cy="210000"/>
+            <a:off x="5900232" y="2430000"/>
+            <a:ext cx="480300" cy="210000"/>
           </a:xfrm>
           <a:prstGeom prst="rect">
             <a:avLst/>
@@ -38079,14 +38189,14 @@
       </p:sp>
       <p:sp>
         <p:nvSpPr>
-          <p:cNvPr id="692" name="Google Shape;692;p44"/>
+          <p:cNvPr id="694" name="Google Shape;694;p44"/>
           <p:cNvSpPr txBox="1"/>
           <p:nvPr/>
         </p:nvSpPr>
         <p:spPr>
           <a:xfrm>
-            <a:off x="1050000" y="2680000"/>
-            <a:ext cx="1620000" cy="210000"/>
+            <a:off x="1110156" y="2680000"/>
+            <a:ext cx="1944900" cy="210000"/>
           </a:xfrm>
           <a:prstGeom prst="rect">
             <a:avLst/>
@@ -38137,14 +38247,14 @@
       </p:sp>
       <p:sp>
         <p:nvSpPr>
-          <p:cNvPr id="693" name="Google Shape;693;p44"/>
+          <p:cNvPr id="695" name="Google Shape;695;p44"/>
           <p:cNvSpPr/>
           <p:nvPr/>
         </p:nvSpPr>
         <p:spPr>
           <a:xfrm>
-            <a:off x="2750000" y="2700000"/>
-            <a:ext cx="1820000" cy="160000"/>
+            <a:off x="3151040" y="2700000"/>
+            <a:ext cx="2185200" cy="159900"/>
           </a:xfrm>
           <a:prstGeom prst="rect">
             <a:avLst/>
@@ -38191,14 +38301,14 @@
       </p:sp>
       <p:sp>
         <p:nvSpPr>
-          <p:cNvPr id="694" name="Google Shape;694;p44"/>
+          <p:cNvPr id="696" name="Google Shape;696;p44"/>
           <p:cNvSpPr txBox="1"/>
           <p:nvPr/>
         </p:nvSpPr>
         <p:spPr>
           <a:xfrm>
-            <a:off x="4620000" y="2680000"/>
-            <a:ext cx="400000" cy="210000"/>
+            <a:off x="5396013" y="2680000"/>
+            <a:ext cx="480000" cy="210000"/>
           </a:xfrm>
           <a:prstGeom prst="rect">
             <a:avLst/>
@@ -38249,14 +38359,14 @@
       </p:sp>
       <p:sp>
         <p:nvSpPr>
-          <p:cNvPr id="695" name="Google Shape;695;p44"/>
+          <p:cNvPr id="697" name="Google Shape;697;p44"/>
           <p:cNvSpPr txBox="1"/>
           <p:nvPr/>
         </p:nvSpPr>
         <p:spPr>
           <a:xfrm>
-            <a:off x="1050000" y="2930000"/>
-            <a:ext cx="1620000" cy="210000"/>
+            <a:off x="1110156" y="2930000"/>
+            <a:ext cx="1944900" cy="210000"/>
           </a:xfrm>
           <a:prstGeom prst="rect">
             <a:avLst/>
@@ -38307,14 +38417,14 @@
       </p:sp>
       <p:sp>
         <p:nvSpPr>
-          <p:cNvPr id="696" name="Google Shape;696;p44"/>
+          <p:cNvPr id="698" name="Google Shape;698;p44"/>
           <p:cNvSpPr/>
           <p:nvPr/>
         </p:nvSpPr>
         <p:spPr>
           <a:xfrm>
-            <a:off x="2750000" y="2950000"/>
-            <a:ext cx="1435000" cy="160000"/>
+            <a:off x="3151040" y="2950000"/>
+            <a:ext cx="1722600" cy="159900"/>
           </a:xfrm>
           <a:prstGeom prst="rect">
             <a:avLst/>
@@ -38361,14 +38471,14 @@
       </p:sp>
       <p:sp>
         <p:nvSpPr>
-          <p:cNvPr id="697" name="Google Shape;697;p44"/>
+          <p:cNvPr id="699" name="Google Shape;699;p44"/>
           <p:cNvSpPr txBox="1"/>
           <p:nvPr/>
         </p:nvSpPr>
         <p:spPr>
           <a:xfrm>
-            <a:off x="4235000" y="2930000"/>
-            <a:ext cx="400000" cy="210000"/>
+            <a:off x="4933813" y="2930000"/>
+            <a:ext cx="480000" cy="210000"/>
           </a:xfrm>
           <a:prstGeom prst="rect">
             <a:avLst/>
@@ -38419,14 +38529,14 @@
       </p:sp>
       <p:sp>
         <p:nvSpPr>
-          <p:cNvPr id="698" name="Google Shape;698;p44"/>
+          <p:cNvPr id="700" name="Google Shape;700;p44"/>
           <p:cNvSpPr txBox="1"/>
           <p:nvPr/>
         </p:nvSpPr>
         <p:spPr>
           <a:xfrm>
-            <a:off x="1050000" y="3180000"/>
-            <a:ext cx="1620000" cy="210000"/>
+            <a:off x="1110156" y="3180000"/>
+            <a:ext cx="1944900" cy="210000"/>
           </a:xfrm>
           <a:prstGeom prst="rect">
             <a:avLst/>
@@ -38477,14 +38587,14 @@
       </p:sp>
       <p:sp>
         <p:nvSpPr>
-          <p:cNvPr id="699" name="Google Shape;699;p44"/>
+          <p:cNvPr id="701" name="Google Shape;701;p44"/>
           <p:cNvSpPr/>
           <p:nvPr/>
         </p:nvSpPr>
         <p:spPr>
           <a:xfrm>
-            <a:off x="2750000" y="3200000"/>
-            <a:ext cx="1155000" cy="160000"/>
+            <a:off x="3151040" y="3200000"/>
+            <a:ext cx="1386600" cy="159900"/>
           </a:xfrm>
           <a:prstGeom prst="rect">
             <a:avLst/>
@@ -38531,14 +38641,14 @@
       </p:sp>
       <p:sp>
         <p:nvSpPr>
-          <p:cNvPr id="700" name="Google Shape;700;p44"/>
+          <p:cNvPr id="702" name="Google Shape;702;p44"/>
           <p:cNvSpPr txBox="1"/>
           <p:nvPr/>
         </p:nvSpPr>
         <p:spPr>
           <a:xfrm>
-            <a:off x="3955000" y="3180000"/>
-            <a:ext cx="400000" cy="210000"/>
+            <a:off x="4597667" y="3180000"/>
+            <a:ext cx="480000" cy="210000"/>
           </a:xfrm>
           <a:prstGeom prst="rect">
             <a:avLst/>
@@ -38589,14 +38699,14 @@
       </p:sp>
       <p:sp>
         <p:nvSpPr>
-          <p:cNvPr id="701" name="Google Shape;701;p44"/>
+          <p:cNvPr id="703" name="Google Shape;703;p44"/>
           <p:cNvSpPr txBox="1"/>
           <p:nvPr/>
         </p:nvSpPr>
         <p:spPr>
           <a:xfrm>
-            <a:off x="1050000" y="3430000"/>
-            <a:ext cx="1620000" cy="210000"/>
+            <a:off x="1110156" y="3430000"/>
+            <a:ext cx="1944900" cy="210000"/>
           </a:xfrm>
           <a:prstGeom prst="rect">
             <a:avLst/>
@@ -38647,14 +38757,14 @@
       </p:sp>
       <p:sp>
         <p:nvSpPr>
-          <p:cNvPr id="702" name="Google Shape;702;p44"/>
+          <p:cNvPr id="704" name="Google Shape;704;p44"/>
           <p:cNvSpPr/>
           <p:nvPr/>
         </p:nvSpPr>
         <p:spPr>
           <a:xfrm>
-            <a:off x="2750000" y="3450000"/>
-            <a:ext cx="980000" cy="160000"/>
+            <a:off x="3151040" y="3450000"/>
+            <a:ext cx="1176600" cy="159900"/>
           </a:xfrm>
           <a:prstGeom prst="rect">
             <a:avLst/>
@@ -38701,14 +38811,14 @@
       </p:sp>
       <p:sp>
         <p:nvSpPr>
-          <p:cNvPr id="703" name="Google Shape;703;p44"/>
+          <p:cNvPr id="705" name="Google Shape;705;p44"/>
           <p:cNvSpPr txBox="1"/>
           <p:nvPr/>
         </p:nvSpPr>
         <p:spPr>
           <a:xfrm>
-            <a:off x="3780000" y="3430000"/>
-            <a:ext cx="400000" cy="210000"/>
+            <a:off x="4387576" y="3430000"/>
+            <a:ext cx="480000" cy="210000"/>
           </a:xfrm>
           <a:prstGeom prst="rect">
             <a:avLst/>
@@ -38759,14 +38869,14 @@
       </p:sp>
       <p:sp>
         <p:nvSpPr>
-          <p:cNvPr id="704" name="Google Shape;704;p44"/>
+          <p:cNvPr id="706" name="Google Shape;706;p44"/>
           <p:cNvSpPr/>
           <p:nvPr/>
         </p:nvSpPr>
         <p:spPr>
           <a:xfrm>
             <a:off x="750000" y="3930000"/>
-            <a:ext cx="5950000" cy="530000"/>
+            <a:ext cx="7143000" cy="530100"/>
           </a:xfrm>
           <a:prstGeom prst="roundRect">
             <a:avLst>
@@ -38815,14 +38925,14 @@
       </p:sp>
       <p:sp>
         <p:nvSpPr>
-          <p:cNvPr id="705" name="Google Shape;705;p44"/>
+          <p:cNvPr id="707" name="Google Shape;707;p44"/>
           <p:cNvSpPr txBox="1"/>
           <p:nvPr/>
         </p:nvSpPr>
         <p:spPr>
           <a:xfrm>
-            <a:off x="900000" y="4000000"/>
-            <a:ext cx="5650000" cy="400000"/>
+            <a:off x="930078" y="4000000"/>
+            <a:ext cx="6782700" cy="399900"/>
           </a:xfrm>
           <a:prstGeom prst="rect">
             <a:avLst/>
@@ -38880,6 +38990,65 @@
               <a:t>duas varas concentram desempenho 50% acima da média; outras três caem 40% abaixo. A provisão precisa refletir essa heterogeneidade.</a:t>
             </a:r>
             <a:endParaRPr/>
+          </a:p>
+        </p:txBody>
+      </p:sp>
+      <p:sp>
+        <p:nvSpPr>
+          <p:cNvPr id="708" name="Google Shape;708;p44"/>
+          <p:cNvSpPr/>
+          <p:nvPr/>
+        </p:nvSpPr>
+        <p:spPr>
+          <a:xfrm>
+            <a:off x="749030" y="953307"/>
+            <a:ext cx="1778400" cy="54300"/>
+          </a:xfrm>
+          <a:prstGeom prst="rect">
+            <a:avLst/>
+          </a:prstGeom>
+          <a:solidFill>
+            <a:srgbClr val="E8A317"/>
+          </a:solidFill>
+          <a:ln>
+            <a:noFill/>
+          </a:ln>
+        </p:spPr>
+        <p:txBody>
+          <a:bodyPr anchorCtr="0" anchor="ctr" bIns="0" lIns="0" spcFirstLastPara="1" rIns="0" wrap="square" tIns="0">
+            <a:noAutofit/>
+          </a:bodyPr>
+          <a:lstStyle/>
+          <a:p>
+            <a:pPr indent="0" lvl="0" marL="0" marR="0" rtl="0" algn="l">
+              <a:lnSpc>
+                <a:spcPct val="100000"/>
+              </a:lnSpc>
+              <a:spcBef>
+                <a:spcPts val="0"/>
+              </a:spcBef>
+              <a:spcAft>
+                <a:spcPts val="0"/>
+              </a:spcAft>
+              <a:buClr>
+                <a:srgbClr val="000000"/>
+              </a:buClr>
+              <a:buSzPts val="1400"/>
+              <a:buFont typeface="Arial"/>
+              <a:buNone/>
+            </a:pPr>
+            <a:r>
+              <a:t/>
+            </a:r>
+            <a:endParaRPr b="0" i="0" sz="1400" u="none" cap="none" strike="noStrike">
+              <a:solidFill>
+                <a:srgbClr val="000000"/>
+              </a:solidFill>
+              <a:latin typeface="Arial"/>
+              <a:ea typeface="Arial"/>
+              <a:cs typeface="Arial"/>
+              <a:sym typeface="Arial"/>
+            </a:endParaRPr>
           </a:p>
         </p:txBody>
       </p:sp>
@@ -38908,7 +39077,7 @@
     </p:bg>
     <p:spTree>
       <p:nvGrpSpPr>
-        <p:cNvPr id="709" name="Shape 709"/>
+        <p:cNvPr id="712" name="Shape 712"/>
         <p:cNvGrpSpPr/>
         <p:nvPr/>
       </p:nvGrpSpPr>
@@ -38922,14 +39091,14 @@
       </p:grpSpPr>
       <p:sp>
         <p:nvSpPr>
-          <p:cNvPr id="710" name="Google Shape;710;p45"/>
+          <p:cNvPr id="713" name="Google Shape;713;p45"/>
           <p:cNvSpPr txBox="1"/>
           <p:nvPr/>
         </p:nvSpPr>
         <p:spPr>
           <a:xfrm>
             <a:off x="750000" y="500000"/>
-            <a:ext cx="5950000" cy="900000"/>
+            <a:ext cx="7121100" cy="900000"/>
           </a:xfrm>
           <a:prstGeom prst="rect">
             <a:avLst/>
@@ -38980,14 +39149,14 @@
       </p:sp>
       <p:sp>
         <p:nvSpPr>
-          <p:cNvPr id="711" name="Google Shape;711;p45"/>
+          <p:cNvPr id="714" name="Google Shape;714;p45"/>
           <p:cNvSpPr txBox="1"/>
           <p:nvPr/>
         </p:nvSpPr>
         <p:spPr>
           <a:xfrm>
             <a:off x="750000" y="1330000"/>
-            <a:ext cx="5950000" cy="400000"/>
+            <a:ext cx="7121100" cy="399900"/>
           </a:xfrm>
           <a:prstGeom prst="rect">
             <a:avLst/>
@@ -39038,14 +39207,14 @@
       </p:sp>
       <p:sp>
         <p:nvSpPr>
-          <p:cNvPr id="712" name="Google Shape;712;p45"/>
+          <p:cNvPr id="715" name="Google Shape;715;p45"/>
           <p:cNvSpPr/>
           <p:nvPr/>
         </p:nvSpPr>
         <p:spPr>
           <a:xfrm>
             <a:off x="750000" y="1700000"/>
-            <a:ext cx="1700000" cy="360000"/>
+            <a:ext cx="2034600" cy="360000"/>
           </a:xfrm>
           <a:prstGeom prst="rect">
             <a:avLst/>
@@ -39092,14 +39261,14 @@
       </p:sp>
       <p:sp>
         <p:nvSpPr>
-          <p:cNvPr id="713" name="Google Shape;713;p45"/>
+          <p:cNvPr id="716" name="Google Shape;716;p45"/>
           <p:cNvSpPr txBox="1"/>
           <p:nvPr/>
         </p:nvSpPr>
         <p:spPr>
           <a:xfrm>
-            <a:off x="830000" y="1760000"/>
-            <a:ext cx="1540000" cy="260000"/>
+            <a:off x="845748" y="1760000"/>
+            <a:ext cx="1843200" cy="260100"/>
           </a:xfrm>
           <a:prstGeom prst="rect">
             <a:avLst/>
@@ -39150,14 +39319,14 @@
       </p:sp>
       <p:sp>
         <p:nvSpPr>
-          <p:cNvPr id="714" name="Google Shape;714;p45"/>
+          <p:cNvPr id="717" name="Google Shape;717;p45"/>
           <p:cNvSpPr/>
           <p:nvPr/>
         </p:nvSpPr>
         <p:spPr>
           <a:xfrm>
-            <a:off x="2450000" y="1700000"/>
-            <a:ext cx="1400000" cy="360000"/>
+            <a:off x="2784636" y="1700000"/>
+            <a:ext cx="1675500" cy="360000"/>
           </a:xfrm>
           <a:prstGeom prst="rect">
             <a:avLst/>
@@ -39204,14 +39373,14 @@
       </p:sp>
       <p:sp>
         <p:nvSpPr>
-          <p:cNvPr id="715" name="Google Shape;715;p45"/>
+          <p:cNvPr id="718" name="Google Shape;718;p45"/>
           <p:cNvSpPr txBox="1"/>
           <p:nvPr/>
         </p:nvSpPr>
         <p:spPr>
           <a:xfrm>
-            <a:off x="2530000" y="1760000"/>
-            <a:ext cx="1240000" cy="260000"/>
+            <a:off x="2880383" y="1760000"/>
+            <a:ext cx="1484100" cy="260100"/>
           </a:xfrm>
           <a:prstGeom prst="rect">
             <a:avLst/>
@@ -39262,14 +39431,14 @@
       </p:sp>
       <p:sp>
         <p:nvSpPr>
-          <p:cNvPr id="716" name="Google Shape;716;p45"/>
+          <p:cNvPr id="719" name="Google Shape;719;p45"/>
           <p:cNvSpPr/>
           <p:nvPr/>
         </p:nvSpPr>
         <p:spPr>
           <a:xfrm>
-            <a:off x="3850000" y="1700000"/>
-            <a:ext cx="1400000" cy="360000"/>
+            <a:off x="4460218" y="1700000"/>
+            <a:ext cx="1675500" cy="360000"/>
           </a:xfrm>
           <a:prstGeom prst="rect">
             <a:avLst/>
@@ -39316,14 +39485,14 @@
       </p:sp>
       <p:sp>
         <p:nvSpPr>
-          <p:cNvPr id="717" name="Google Shape;717;p45"/>
+          <p:cNvPr id="720" name="Google Shape;720;p45"/>
           <p:cNvSpPr txBox="1"/>
           <p:nvPr/>
         </p:nvSpPr>
         <p:spPr>
           <a:xfrm>
-            <a:off x="3930000" y="1760000"/>
-            <a:ext cx="1240000" cy="260000"/>
+            <a:off x="4555966" y="1760000"/>
+            <a:ext cx="1484100" cy="260100"/>
           </a:xfrm>
           <a:prstGeom prst="rect">
             <a:avLst/>
@@ -39374,14 +39543,14 @@
       </p:sp>
       <p:sp>
         <p:nvSpPr>
-          <p:cNvPr id="718" name="Google Shape;718;p45"/>
+          <p:cNvPr id="721" name="Google Shape;721;p45"/>
           <p:cNvSpPr/>
           <p:nvPr/>
         </p:nvSpPr>
         <p:spPr>
           <a:xfrm>
-            <a:off x="5250000" y="1700000"/>
-            <a:ext cx="1450000" cy="360000"/>
+            <a:off x="6135800" y="1700000"/>
+            <a:ext cx="1735500" cy="360000"/>
           </a:xfrm>
           <a:prstGeom prst="rect">
             <a:avLst/>
@@ -39428,14 +39597,14 @@
       </p:sp>
       <p:sp>
         <p:nvSpPr>
-          <p:cNvPr id="719" name="Google Shape;719;p45"/>
+          <p:cNvPr id="722" name="Google Shape;722;p45"/>
           <p:cNvSpPr txBox="1"/>
           <p:nvPr/>
         </p:nvSpPr>
         <p:spPr>
           <a:xfrm>
-            <a:off x="5330000" y="1760000"/>
-            <a:ext cx="1290000" cy="260000"/>
+            <a:off x="6231548" y="1760000"/>
+            <a:ext cx="1543800" cy="260100"/>
           </a:xfrm>
           <a:prstGeom prst="rect">
             <a:avLst/>
@@ -39486,14 +39655,14 @@
       </p:sp>
       <p:sp>
         <p:nvSpPr>
-          <p:cNvPr id="720" name="Google Shape;720;p45"/>
+          <p:cNvPr id="723" name="Google Shape;723;p45"/>
           <p:cNvSpPr/>
           <p:nvPr/>
         </p:nvSpPr>
         <p:spPr>
           <a:xfrm>
             <a:off x="750000" y="2060000"/>
-            <a:ext cx="1700000" cy="360000"/>
+            <a:ext cx="2034600" cy="360000"/>
           </a:xfrm>
           <a:prstGeom prst="rect">
             <a:avLst/>
@@ -39540,14 +39709,14 @@
       </p:sp>
       <p:sp>
         <p:nvSpPr>
-          <p:cNvPr id="721" name="Google Shape;721;p45"/>
+          <p:cNvPr id="724" name="Google Shape;724;p45"/>
           <p:cNvSpPr txBox="1"/>
           <p:nvPr/>
         </p:nvSpPr>
         <p:spPr>
           <a:xfrm>
-            <a:off x="830000" y="2120000"/>
-            <a:ext cx="1540000" cy="260000"/>
+            <a:off x="845748" y="2120000"/>
+            <a:ext cx="1843200" cy="260100"/>
           </a:xfrm>
           <a:prstGeom prst="rect">
             <a:avLst/>
@@ -39598,14 +39767,14 @@
       </p:sp>
       <p:sp>
         <p:nvSpPr>
-          <p:cNvPr id="722" name="Google Shape;722;p45"/>
+          <p:cNvPr id="725" name="Google Shape;725;p45"/>
           <p:cNvSpPr/>
           <p:nvPr/>
         </p:nvSpPr>
         <p:spPr>
           <a:xfrm>
-            <a:off x="2450000" y="2060000"/>
-            <a:ext cx="1400000" cy="360000"/>
+            <a:off x="2784636" y="2060000"/>
+            <a:ext cx="1675500" cy="360000"/>
           </a:xfrm>
           <a:prstGeom prst="rect">
             <a:avLst/>
@@ -39652,14 +39821,14 @@
       </p:sp>
       <p:sp>
         <p:nvSpPr>
-          <p:cNvPr id="723" name="Google Shape;723;p45"/>
+          <p:cNvPr id="726" name="Google Shape;726;p45"/>
           <p:cNvSpPr txBox="1"/>
           <p:nvPr/>
         </p:nvSpPr>
         <p:spPr>
           <a:xfrm>
-            <a:off x="2530000" y="2120000"/>
-            <a:ext cx="1240000" cy="260000"/>
+            <a:off x="2880383" y="2120000"/>
+            <a:ext cx="1484100" cy="260100"/>
           </a:xfrm>
           <a:prstGeom prst="rect">
             <a:avLst/>
@@ -39710,14 +39879,14 @@
       </p:sp>
       <p:sp>
         <p:nvSpPr>
-          <p:cNvPr id="724" name="Google Shape;724;p45"/>
+          <p:cNvPr id="727" name="Google Shape;727;p45"/>
           <p:cNvSpPr/>
           <p:nvPr/>
         </p:nvSpPr>
         <p:spPr>
           <a:xfrm>
-            <a:off x="3850000" y="2060000"/>
-            <a:ext cx="1400000" cy="360000"/>
+            <a:off x="4460218" y="2060000"/>
+            <a:ext cx="1675500" cy="360000"/>
           </a:xfrm>
           <a:prstGeom prst="rect">
             <a:avLst/>
@@ -39764,14 +39933,14 @@
       </p:sp>
       <p:sp>
         <p:nvSpPr>
-          <p:cNvPr id="725" name="Google Shape;725;p45"/>
+          <p:cNvPr id="728" name="Google Shape;728;p45"/>
           <p:cNvSpPr txBox="1"/>
           <p:nvPr/>
         </p:nvSpPr>
         <p:spPr>
           <a:xfrm>
-            <a:off x="3930000" y="2120000"/>
-            <a:ext cx="1240000" cy="260000"/>
+            <a:off x="4555966" y="2120000"/>
+            <a:ext cx="1484100" cy="260100"/>
           </a:xfrm>
           <a:prstGeom prst="rect">
             <a:avLst/>
@@ -39822,14 +39991,14 @@
       </p:sp>
       <p:sp>
         <p:nvSpPr>
-          <p:cNvPr id="726" name="Google Shape;726;p45"/>
+          <p:cNvPr id="729" name="Google Shape;729;p45"/>
           <p:cNvSpPr/>
           <p:nvPr/>
         </p:nvSpPr>
         <p:spPr>
           <a:xfrm>
-            <a:off x="5250000" y="2060000"/>
-            <a:ext cx="1450000" cy="360000"/>
+            <a:off x="6135800" y="2060000"/>
+            <a:ext cx="1735500" cy="360000"/>
           </a:xfrm>
           <a:prstGeom prst="rect">
             <a:avLst/>
@@ -39876,14 +40045,14 @@
       </p:sp>
       <p:sp>
         <p:nvSpPr>
-          <p:cNvPr id="727" name="Google Shape;727;p45"/>
+          <p:cNvPr id="730" name="Google Shape;730;p45"/>
           <p:cNvSpPr txBox="1"/>
           <p:nvPr/>
         </p:nvSpPr>
         <p:spPr>
           <a:xfrm>
-            <a:off x="5330000" y="2120000"/>
-            <a:ext cx="1290000" cy="260000"/>
+            <a:off x="6231548" y="2120000"/>
+            <a:ext cx="1543800" cy="260100"/>
           </a:xfrm>
           <a:prstGeom prst="rect">
             <a:avLst/>
@@ -39934,14 +40103,14 @@
       </p:sp>
       <p:sp>
         <p:nvSpPr>
-          <p:cNvPr id="728" name="Google Shape;728;p45"/>
+          <p:cNvPr id="731" name="Google Shape;731;p45"/>
           <p:cNvSpPr/>
           <p:nvPr/>
         </p:nvSpPr>
         <p:spPr>
           <a:xfrm>
             <a:off x="750000" y="2420000"/>
-            <a:ext cx="1700000" cy="360000"/>
+            <a:ext cx="2034600" cy="360000"/>
           </a:xfrm>
           <a:prstGeom prst="rect">
             <a:avLst/>
@@ -39988,14 +40157,14 @@
       </p:sp>
       <p:sp>
         <p:nvSpPr>
-          <p:cNvPr id="729" name="Google Shape;729;p45"/>
+          <p:cNvPr id="732" name="Google Shape;732;p45"/>
           <p:cNvSpPr txBox="1"/>
           <p:nvPr/>
         </p:nvSpPr>
         <p:spPr>
           <a:xfrm>
-            <a:off x="830000" y="2480000"/>
-            <a:ext cx="1540000" cy="260000"/>
+            <a:off x="845748" y="2480000"/>
+            <a:ext cx="1843200" cy="260100"/>
           </a:xfrm>
           <a:prstGeom prst="rect">
             <a:avLst/>
@@ -40046,14 +40215,14 @@
       </p:sp>
       <p:sp>
         <p:nvSpPr>
-          <p:cNvPr id="730" name="Google Shape;730;p45"/>
+          <p:cNvPr id="733" name="Google Shape;733;p45"/>
           <p:cNvSpPr/>
           <p:nvPr/>
         </p:nvSpPr>
         <p:spPr>
           <a:xfrm>
-            <a:off x="2450000" y="2420000"/>
-            <a:ext cx="1400000" cy="360000"/>
+            <a:off x="2784636" y="2420000"/>
+            <a:ext cx="1675500" cy="360000"/>
           </a:xfrm>
           <a:prstGeom prst="rect">
             <a:avLst/>
@@ -40100,14 +40269,14 @@
       </p:sp>
       <p:sp>
         <p:nvSpPr>
-          <p:cNvPr id="731" name="Google Shape;731;p45"/>
+          <p:cNvPr id="734" name="Google Shape;734;p45"/>
           <p:cNvSpPr txBox="1"/>
           <p:nvPr/>
         </p:nvSpPr>
         <p:spPr>
           <a:xfrm>
-            <a:off x="2530000" y="2480000"/>
-            <a:ext cx="1240000" cy="260000"/>
+            <a:off x="2880383" y="2480000"/>
+            <a:ext cx="1484100" cy="260100"/>
           </a:xfrm>
           <a:prstGeom prst="rect">
             <a:avLst/>
@@ -40158,14 +40327,14 @@
       </p:sp>
       <p:sp>
         <p:nvSpPr>
-          <p:cNvPr id="732" name="Google Shape;732;p45"/>
+          <p:cNvPr id="735" name="Google Shape;735;p45"/>
           <p:cNvSpPr/>
           <p:nvPr/>
         </p:nvSpPr>
         <p:spPr>
           <a:xfrm>
-            <a:off x="3850000" y="2420000"/>
-            <a:ext cx="1400000" cy="360000"/>
+            <a:off x="4460218" y="2420000"/>
+            <a:ext cx="1675500" cy="360000"/>
           </a:xfrm>
           <a:prstGeom prst="rect">
             <a:avLst/>
@@ -40212,14 +40381,14 @@
       </p:sp>
       <p:sp>
         <p:nvSpPr>
-          <p:cNvPr id="733" name="Google Shape;733;p45"/>
+          <p:cNvPr id="736" name="Google Shape;736;p45"/>
           <p:cNvSpPr txBox="1"/>
           <p:nvPr/>
         </p:nvSpPr>
         <p:spPr>
           <a:xfrm>
-            <a:off x="3930000" y="2480000"/>
-            <a:ext cx="1240000" cy="260000"/>
+            <a:off x="4555966" y="2480000"/>
+            <a:ext cx="1484100" cy="260100"/>
           </a:xfrm>
           <a:prstGeom prst="rect">
             <a:avLst/>
@@ -40270,14 +40439,14 @@
       </p:sp>
       <p:sp>
         <p:nvSpPr>
-          <p:cNvPr id="734" name="Google Shape;734;p45"/>
+          <p:cNvPr id="737" name="Google Shape;737;p45"/>
           <p:cNvSpPr/>
           <p:nvPr/>
         </p:nvSpPr>
         <p:spPr>
           <a:xfrm>
-            <a:off x="5250000" y="2420000"/>
-            <a:ext cx="1450000" cy="360000"/>
+            <a:off x="6135800" y="2420000"/>
+            <a:ext cx="1735500" cy="360000"/>
           </a:xfrm>
           <a:prstGeom prst="rect">
             <a:avLst/>
@@ -40324,14 +40493,14 @@
       </p:sp>
       <p:sp>
         <p:nvSpPr>
-          <p:cNvPr id="735" name="Google Shape;735;p45"/>
+          <p:cNvPr id="738" name="Google Shape;738;p45"/>
           <p:cNvSpPr txBox="1"/>
           <p:nvPr/>
         </p:nvSpPr>
         <p:spPr>
           <a:xfrm>
-            <a:off x="5330000" y="2480000"/>
-            <a:ext cx="1290000" cy="260000"/>
+            <a:off x="6231548" y="2480000"/>
+            <a:ext cx="1543800" cy="260100"/>
           </a:xfrm>
           <a:prstGeom prst="rect">
             <a:avLst/>
@@ -40382,14 +40551,14 @@
       </p:sp>
       <p:sp>
         <p:nvSpPr>
-          <p:cNvPr id="736" name="Google Shape;736;p45"/>
+          <p:cNvPr id="739" name="Google Shape;739;p45"/>
           <p:cNvSpPr/>
           <p:nvPr/>
         </p:nvSpPr>
         <p:spPr>
           <a:xfrm>
             <a:off x="750000" y="2780000"/>
-            <a:ext cx="1700000" cy="360000"/>
+            <a:ext cx="2034600" cy="360000"/>
           </a:xfrm>
           <a:prstGeom prst="rect">
             <a:avLst/>
@@ -40436,14 +40605,14 @@
       </p:sp>
       <p:sp>
         <p:nvSpPr>
-          <p:cNvPr id="737" name="Google Shape;737;p45"/>
+          <p:cNvPr id="740" name="Google Shape;740;p45"/>
           <p:cNvSpPr txBox="1"/>
           <p:nvPr/>
         </p:nvSpPr>
         <p:spPr>
           <a:xfrm>
-            <a:off x="830000" y="2840000"/>
-            <a:ext cx="1540000" cy="260000"/>
+            <a:off x="845748" y="2840000"/>
+            <a:ext cx="1843200" cy="260100"/>
           </a:xfrm>
           <a:prstGeom prst="rect">
             <a:avLst/>
@@ -40494,14 +40663,14 @@
       </p:sp>
       <p:sp>
         <p:nvSpPr>
-          <p:cNvPr id="738" name="Google Shape;738;p45"/>
+          <p:cNvPr id="741" name="Google Shape;741;p45"/>
           <p:cNvSpPr/>
           <p:nvPr/>
         </p:nvSpPr>
         <p:spPr>
           <a:xfrm>
-            <a:off x="2450000" y="2780000"/>
-            <a:ext cx="1400000" cy="360000"/>
+            <a:off x="2784636" y="2780000"/>
+            <a:ext cx="1675500" cy="360000"/>
           </a:xfrm>
           <a:prstGeom prst="rect">
             <a:avLst/>
@@ -40548,14 +40717,14 @@
       </p:sp>
       <p:sp>
         <p:nvSpPr>
-          <p:cNvPr id="739" name="Google Shape;739;p45"/>
+          <p:cNvPr id="742" name="Google Shape;742;p45"/>
           <p:cNvSpPr txBox="1"/>
           <p:nvPr/>
         </p:nvSpPr>
         <p:spPr>
           <a:xfrm>
-            <a:off x="2530000" y="2840000"/>
-            <a:ext cx="1240000" cy="260000"/>
+            <a:off x="2880383" y="2840000"/>
+            <a:ext cx="1484100" cy="260100"/>
           </a:xfrm>
           <a:prstGeom prst="rect">
             <a:avLst/>
@@ -40606,14 +40775,14 @@
       </p:sp>
       <p:sp>
         <p:nvSpPr>
-          <p:cNvPr id="740" name="Google Shape;740;p45"/>
+          <p:cNvPr id="743" name="Google Shape;743;p45"/>
           <p:cNvSpPr/>
           <p:nvPr/>
         </p:nvSpPr>
         <p:spPr>
           <a:xfrm>
-            <a:off x="3850000" y="2780000"/>
-            <a:ext cx="1400000" cy="360000"/>
+            <a:off x="4460218" y="2780000"/>
+            <a:ext cx="1675500" cy="360000"/>
           </a:xfrm>
           <a:prstGeom prst="rect">
             <a:avLst/>
@@ -40660,14 +40829,14 @@
       </p:sp>
       <p:sp>
         <p:nvSpPr>
-          <p:cNvPr id="741" name="Google Shape;741;p45"/>
+          <p:cNvPr id="744" name="Google Shape;744;p45"/>
           <p:cNvSpPr txBox="1"/>
           <p:nvPr/>
         </p:nvSpPr>
         <p:spPr>
           <a:xfrm>
-            <a:off x="3930000" y="2840000"/>
-            <a:ext cx="1240000" cy="260000"/>
+            <a:off x="4555966" y="2840000"/>
+            <a:ext cx="1484100" cy="260100"/>
           </a:xfrm>
           <a:prstGeom prst="rect">
             <a:avLst/>
@@ -40718,14 +40887,14 @@
       </p:sp>
       <p:sp>
         <p:nvSpPr>
-          <p:cNvPr id="742" name="Google Shape;742;p45"/>
+          <p:cNvPr id="745" name="Google Shape;745;p45"/>
           <p:cNvSpPr/>
           <p:nvPr/>
         </p:nvSpPr>
         <p:spPr>
           <a:xfrm>
-            <a:off x="5250000" y="2780000"/>
-            <a:ext cx="1450000" cy="360000"/>
+            <a:off x="6135800" y="2780000"/>
+            <a:ext cx="1735500" cy="360000"/>
           </a:xfrm>
           <a:prstGeom prst="rect">
             <a:avLst/>
@@ -40772,14 +40941,14 @@
       </p:sp>
       <p:sp>
         <p:nvSpPr>
-          <p:cNvPr id="743" name="Google Shape;743;p45"/>
+          <p:cNvPr id="746" name="Google Shape;746;p45"/>
           <p:cNvSpPr txBox="1"/>
           <p:nvPr/>
         </p:nvSpPr>
         <p:spPr>
           <a:xfrm>
-            <a:off x="5330000" y="2840000"/>
-            <a:ext cx="1290000" cy="260000"/>
+            <a:off x="6231548" y="2840000"/>
+            <a:ext cx="1543800" cy="260100"/>
           </a:xfrm>
           <a:prstGeom prst="rect">
             <a:avLst/>
@@ -40830,14 +40999,14 @@
       </p:sp>
       <p:sp>
         <p:nvSpPr>
-          <p:cNvPr id="744" name="Google Shape;744;p45"/>
+          <p:cNvPr id="747" name="Google Shape;747;p45"/>
           <p:cNvSpPr/>
           <p:nvPr/>
         </p:nvSpPr>
         <p:spPr>
           <a:xfrm>
             <a:off x="750000" y="3140000"/>
-            <a:ext cx="1700000" cy="360000"/>
+            <a:ext cx="2034600" cy="360000"/>
           </a:xfrm>
           <a:prstGeom prst="rect">
             <a:avLst/>
@@ -40884,14 +41053,14 @@
       </p:sp>
       <p:sp>
         <p:nvSpPr>
-          <p:cNvPr id="745" name="Google Shape;745;p45"/>
+          <p:cNvPr id="748" name="Google Shape;748;p45"/>
           <p:cNvSpPr txBox="1"/>
           <p:nvPr/>
         </p:nvSpPr>
         <p:spPr>
           <a:xfrm>
-            <a:off x="830000" y="3200000"/>
-            <a:ext cx="1540000" cy="260000"/>
+            <a:off x="845748" y="3200000"/>
+            <a:ext cx="1843200" cy="260100"/>
           </a:xfrm>
           <a:prstGeom prst="rect">
             <a:avLst/>
@@ -40942,14 +41111,14 @@
       </p:sp>
       <p:sp>
         <p:nvSpPr>
-          <p:cNvPr id="746" name="Google Shape;746;p45"/>
+          <p:cNvPr id="749" name="Google Shape;749;p45"/>
           <p:cNvSpPr/>
           <p:nvPr/>
         </p:nvSpPr>
         <p:spPr>
           <a:xfrm>
-            <a:off x="2450000" y="3140000"/>
-            <a:ext cx="1400000" cy="360000"/>
+            <a:off x="2784636" y="3140000"/>
+            <a:ext cx="1675500" cy="360000"/>
           </a:xfrm>
           <a:prstGeom prst="rect">
             <a:avLst/>
@@ -40996,14 +41165,14 @@
       </p:sp>
       <p:sp>
         <p:nvSpPr>
-          <p:cNvPr id="747" name="Google Shape;747;p45"/>
+          <p:cNvPr id="750" name="Google Shape;750;p45"/>
           <p:cNvSpPr txBox="1"/>
           <p:nvPr/>
         </p:nvSpPr>
         <p:spPr>
           <a:xfrm>
-            <a:off x="2530000" y="3200000"/>
-            <a:ext cx="1240000" cy="260000"/>
+            <a:off x="2880383" y="3200000"/>
+            <a:ext cx="1484100" cy="260100"/>
           </a:xfrm>
           <a:prstGeom prst="rect">
             <a:avLst/>
@@ -41054,14 +41223,14 @@
       </p:sp>
       <p:sp>
         <p:nvSpPr>
-          <p:cNvPr id="748" name="Google Shape;748;p45"/>
+          <p:cNvPr id="751" name="Google Shape;751;p45"/>
           <p:cNvSpPr/>
           <p:nvPr/>
         </p:nvSpPr>
         <p:spPr>
           <a:xfrm>
-            <a:off x="3850000" y="3140000"/>
-            <a:ext cx="1400000" cy="360000"/>
+            <a:off x="4460218" y="3140000"/>
+            <a:ext cx="1675500" cy="360000"/>
           </a:xfrm>
           <a:prstGeom prst="rect">
             <a:avLst/>
@@ -41108,14 +41277,14 @@
       </p:sp>
       <p:sp>
         <p:nvSpPr>
-          <p:cNvPr id="749" name="Google Shape;749;p45"/>
+          <p:cNvPr id="752" name="Google Shape;752;p45"/>
           <p:cNvSpPr txBox="1"/>
           <p:nvPr/>
         </p:nvSpPr>
         <p:spPr>
           <a:xfrm>
-            <a:off x="3930000" y="3200000"/>
-            <a:ext cx="1240000" cy="260000"/>
+            <a:off x="4555966" y="3200000"/>
+            <a:ext cx="1484100" cy="260100"/>
           </a:xfrm>
           <a:prstGeom prst="rect">
             <a:avLst/>
@@ -41166,14 +41335,14 @@
       </p:sp>
       <p:sp>
         <p:nvSpPr>
-          <p:cNvPr id="750" name="Google Shape;750;p45"/>
+          <p:cNvPr id="753" name="Google Shape;753;p45"/>
           <p:cNvSpPr/>
           <p:nvPr/>
         </p:nvSpPr>
         <p:spPr>
           <a:xfrm>
-            <a:off x="5250000" y="3140000"/>
-            <a:ext cx="1450000" cy="360000"/>
+            <a:off x="6135800" y="3140000"/>
+            <a:ext cx="1735500" cy="360000"/>
           </a:xfrm>
           <a:prstGeom prst="rect">
             <a:avLst/>
@@ -41220,14 +41389,14 @@
       </p:sp>
       <p:sp>
         <p:nvSpPr>
-          <p:cNvPr id="751" name="Google Shape;751;p45"/>
+          <p:cNvPr id="754" name="Google Shape;754;p45"/>
           <p:cNvSpPr txBox="1"/>
           <p:nvPr/>
         </p:nvSpPr>
         <p:spPr>
           <a:xfrm>
-            <a:off x="5330000" y="3200000"/>
-            <a:ext cx="1290000" cy="260000"/>
+            <a:off x="6231548" y="3200000"/>
+            <a:ext cx="1543800" cy="260100"/>
           </a:xfrm>
           <a:prstGeom prst="rect">
             <a:avLst/>
@@ -41278,14 +41447,14 @@
       </p:sp>
       <p:sp>
         <p:nvSpPr>
-          <p:cNvPr id="752" name="Google Shape;752;p45"/>
+          <p:cNvPr id="755" name="Google Shape;755;p45"/>
           <p:cNvSpPr/>
           <p:nvPr/>
         </p:nvSpPr>
         <p:spPr>
           <a:xfrm>
             <a:off x="750000" y="3750000"/>
-            <a:ext cx="5950000" cy="600000"/>
+            <a:ext cx="7121100" cy="600000"/>
           </a:xfrm>
           <a:prstGeom prst="roundRect">
             <a:avLst>
@@ -41334,14 +41503,14 @@
       </p:sp>
       <p:sp>
         <p:nvSpPr>
-          <p:cNvPr id="753" name="Google Shape;753;p45"/>
+          <p:cNvPr id="756" name="Google Shape;756;p45"/>
           <p:cNvSpPr txBox="1"/>
           <p:nvPr/>
         </p:nvSpPr>
         <p:spPr>
           <a:xfrm>
-            <a:off x="900000" y="3830000"/>
-            <a:ext cx="5650000" cy="460000"/>
+            <a:off x="929527" y="3830000"/>
+            <a:ext cx="6762300" cy="459900"/>
           </a:xfrm>
           <a:prstGeom prst="rect">
             <a:avLst/>
@@ -41399,6 +41568,65 @@
               <a:t>casos que duram mais saem mais caros. A janela ótima para acordo é entre 19 e 36 meses, antes da escalada de valor observada na cauda longa.</a:t>
             </a:r>
             <a:endParaRPr/>
+          </a:p>
+        </p:txBody>
+      </p:sp>
+      <p:sp>
+        <p:nvSpPr>
+          <p:cNvPr id="757" name="Google Shape;757;p45"/>
+          <p:cNvSpPr/>
+          <p:nvPr/>
+        </p:nvSpPr>
+        <p:spPr>
+          <a:xfrm>
+            <a:off x="749030" y="953307"/>
+            <a:ext cx="1778400" cy="54300"/>
+          </a:xfrm>
+          <a:prstGeom prst="rect">
+            <a:avLst/>
+          </a:prstGeom>
+          <a:solidFill>
+            <a:srgbClr val="E8A317"/>
+          </a:solidFill>
+          <a:ln>
+            <a:noFill/>
+          </a:ln>
+        </p:spPr>
+        <p:txBody>
+          <a:bodyPr anchorCtr="0" anchor="ctr" bIns="0" lIns="0" spcFirstLastPara="1" rIns="0" wrap="square" tIns="0">
+            <a:noAutofit/>
+          </a:bodyPr>
+          <a:lstStyle/>
+          <a:p>
+            <a:pPr indent="0" lvl="0" marL="0" marR="0" rtl="0" algn="l">
+              <a:lnSpc>
+                <a:spcPct val="100000"/>
+              </a:lnSpc>
+              <a:spcBef>
+                <a:spcPts val="0"/>
+              </a:spcBef>
+              <a:spcAft>
+                <a:spcPts val="0"/>
+              </a:spcAft>
+              <a:buClr>
+                <a:srgbClr val="000000"/>
+              </a:buClr>
+              <a:buSzPts val="1400"/>
+              <a:buFont typeface="Arial"/>
+              <a:buNone/>
+            </a:pPr>
+            <a:r>
+              <a:t/>
+            </a:r>
+            <a:endParaRPr b="0" i="0" sz="1400" u="none" cap="none" strike="noStrike">
+              <a:solidFill>
+                <a:srgbClr val="000000"/>
+              </a:solidFill>
+              <a:latin typeface="Arial"/>
+              <a:ea typeface="Arial"/>
+              <a:cs typeface="Arial"/>
+              <a:sym typeface="Arial"/>
+            </a:endParaRPr>
           </a:p>
         </p:txBody>
       </p:sp>
@@ -41427,7 +41655,7 @@
     </p:bg>
     <p:spTree>
       <p:nvGrpSpPr>
-        <p:cNvPr id="757" name="Shape 757"/>
+        <p:cNvPr id="761" name="Shape 761"/>
         <p:cNvGrpSpPr/>
         <p:nvPr/>
       </p:nvGrpSpPr>
@@ -41441,14 +41669,14 @@
       </p:grpSpPr>
       <p:sp>
         <p:nvSpPr>
-          <p:cNvPr id="758" name="Google Shape;758;p46"/>
+          <p:cNvPr id="762" name="Google Shape;762;p46"/>
           <p:cNvSpPr txBox="1"/>
           <p:nvPr/>
         </p:nvSpPr>
         <p:spPr>
           <a:xfrm>
             <a:off x="750000" y="500000"/>
-            <a:ext cx="5950000" cy="900000"/>
+            <a:ext cx="7090800" cy="900000"/>
           </a:xfrm>
           <a:prstGeom prst="rect">
             <a:avLst/>
@@ -41499,14 +41727,14 @@
       </p:sp>
       <p:sp>
         <p:nvSpPr>
-          <p:cNvPr id="759" name="Google Shape;759;p46"/>
+          <p:cNvPr id="763" name="Google Shape;763;p46"/>
           <p:cNvSpPr txBox="1"/>
           <p:nvPr/>
         </p:nvSpPr>
         <p:spPr>
           <a:xfrm>
             <a:off x="750000" y="1330000"/>
-            <a:ext cx="5950000" cy="400000"/>
+            <a:ext cx="7090800" cy="399900"/>
           </a:xfrm>
           <a:prstGeom prst="rect">
             <a:avLst/>
@@ -41557,14 +41785,14 @@
       </p:sp>
       <p:sp>
         <p:nvSpPr>
-          <p:cNvPr id="760" name="Google Shape;760;p46"/>
+          <p:cNvPr id="764" name="Google Shape;764;p46"/>
           <p:cNvSpPr/>
           <p:nvPr/>
         </p:nvSpPr>
         <p:spPr>
           <a:xfrm>
             <a:off x="750000" y="1700000"/>
-            <a:ext cx="1900000" cy="2150000"/>
+            <a:ext cx="2264100" cy="2150100"/>
           </a:xfrm>
           <a:prstGeom prst="roundRect">
             <a:avLst>
@@ -41613,14 +41841,14 @@
       </p:sp>
       <p:sp>
         <p:nvSpPr>
-          <p:cNvPr id="761" name="Google Shape;761;p46"/>
+          <p:cNvPr id="765" name="Google Shape;765;p46"/>
           <p:cNvSpPr txBox="1"/>
           <p:nvPr/>
         </p:nvSpPr>
         <p:spPr>
           <a:xfrm>
-            <a:off x="830000" y="1900000"/>
-            <a:ext cx="1740000" cy="550000"/>
+            <a:off x="845337" y="1900000"/>
+            <a:ext cx="2073600" cy="549900"/>
           </a:xfrm>
           <a:prstGeom prst="rect">
             <a:avLst/>
@@ -41671,14 +41899,14 @@
       </p:sp>
       <p:sp>
         <p:nvSpPr>
-          <p:cNvPr id="762" name="Google Shape;762;p46"/>
+          <p:cNvPr id="766" name="Google Shape;766;p46"/>
           <p:cNvSpPr txBox="1"/>
           <p:nvPr/>
         </p:nvSpPr>
         <p:spPr>
           <a:xfrm>
-            <a:off x="850000" y="2550000"/>
-            <a:ext cx="1700000" cy="400000"/>
+            <a:off x="869171" y="2550000"/>
+            <a:ext cx="2025900" cy="399900"/>
           </a:xfrm>
           <a:prstGeom prst="rect">
             <a:avLst/>
@@ -41729,14 +41957,14 @@
       </p:sp>
       <p:sp>
         <p:nvSpPr>
-          <p:cNvPr id="763" name="Google Shape;763;p46"/>
+          <p:cNvPr id="767" name="Google Shape;767;p46"/>
           <p:cNvSpPr txBox="1"/>
           <p:nvPr/>
         </p:nvSpPr>
         <p:spPr>
           <a:xfrm>
-            <a:off x="900000" y="3000000"/>
-            <a:ext cx="1600000" cy="800000"/>
+            <a:off x="928756" y="3000000"/>
+            <a:ext cx="1906800" cy="800100"/>
           </a:xfrm>
           <a:prstGeom prst="rect">
             <a:avLst/>
@@ -41787,14 +42015,14 @@
       </p:sp>
       <p:sp>
         <p:nvSpPr>
-          <p:cNvPr id="764" name="Google Shape;764;p46"/>
+          <p:cNvPr id="768" name="Google Shape;768;p46"/>
           <p:cNvSpPr/>
           <p:nvPr/>
         </p:nvSpPr>
         <p:spPr>
           <a:xfrm>
-            <a:off x="2800000" y="1700000"/>
-            <a:ext cx="1900000" cy="2150000"/>
+            <a:off x="3193002" y="1700000"/>
+            <a:ext cx="2264100" cy="2150100"/>
           </a:xfrm>
           <a:prstGeom prst="roundRect">
             <a:avLst>
@@ -41843,14 +42071,14 @@
       </p:sp>
       <p:sp>
         <p:nvSpPr>
-          <p:cNvPr id="765" name="Google Shape;765;p46"/>
+          <p:cNvPr id="769" name="Google Shape;769;p46"/>
           <p:cNvSpPr txBox="1"/>
           <p:nvPr/>
         </p:nvSpPr>
         <p:spPr>
           <a:xfrm>
-            <a:off x="2880000" y="1900000"/>
-            <a:ext cx="1740000" cy="550000"/>
+            <a:off x="3288339" y="1900000"/>
+            <a:ext cx="2073600" cy="549900"/>
           </a:xfrm>
           <a:prstGeom prst="rect">
             <a:avLst/>
@@ -41901,14 +42129,14 @@
       </p:sp>
       <p:sp>
         <p:nvSpPr>
-          <p:cNvPr id="766" name="Google Shape;766;p46"/>
+          <p:cNvPr id="770" name="Google Shape;770;p46"/>
           <p:cNvSpPr txBox="1"/>
           <p:nvPr/>
         </p:nvSpPr>
         <p:spPr>
           <a:xfrm>
-            <a:off x="2900000" y="2550000"/>
-            <a:ext cx="1700000" cy="400000"/>
+            <a:off x="3312173" y="2550000"/>
+            <a:ext cx="2025900" cy="399900"/>
           </a:xfrm>
           <a:prstGeom prst="rect">
             <a:avLst/>
@@ -41959,14 +42187,14 @@
       </p:sp>
       <p:sp>
         <p:nvSpPr>
-          <p:cNvPr id="767" name="Google Shape;767;p46"/>
+          <p:cNvPr id="771" name="Google Shape;771;p46"/>
           <p:cNvSpPr txBox="1"/>
           <p:nvPr/>
         </p:nvSpPr>
         <p:spPr>
           <a:xfrm>
-            <a:off x="2950000" y="3000000"/>
-            <a:ext cx="1600000" cy="800000"/>
+            <a:off x="3371758" y="3000000"/>
+            <a:ext cx="1906800" cy="800100"/>
           </a:xfrm>
           <a:prstGeom prst="rect">
             <a:avLst/>
@@ -42017,14 +42245,14 @@
       </p:sp>
       <p:sp>
         <p:nvSpPr>
-          <p:cNvPr id="768" name="Google Shape;768;p46"/>
+          <p:cNvPr id="772" name="Google Shape;772;p46"/>
           <p:cNvSpPr/>
           <p:nvPr/>
         </p:nvSpPr>
         <p:spPr>
           <a:xfrm>
-            <a:off x="4850000" y="1700000"/>
-            <a:ext cx="1900000" cy="2150000"/>
+            <a:off x="5636004" y="1700000"/>
+            <a:ext cx="2264100" cy="2150100"/>
           </a:xfrm>
           <a:prstGeom prst="roundRect">
             <a:avLst>
@@ -42073,14 +42301,14 @@
       </p:sp>
       <p:sp>
         <p:nvSpPr>
-          <p:cNvPr id="769" name="Google Shape;769;p46"/>
+          <p:cNvPr id="773" name="Google Shape;773;p46"/>
           <p:cNvSpPr txBox="1"/>
           <p:nvPr/>
         </p:nvSpPr>
         <p:spPr>
           <a:xfrm>
-            <a:off x="4930000" y="1900000"/>
-            <a:ext cx="1740000" cy="550000"/>
+            <a:off x="5731341" y="1900000"/>
+            <a:ext cx="2073600" cy="549900"/>
           </a:xfrm>
           <a:prstGeom prst="rect">
             <a:avLst/>
@@ -42131,14 +42359,14 @@
       </p:sp>
       <p:sp>
         <p:nvSpPr>
-          <p:cNvPr id="770" name="Google Shape;770;p46"/>
+          <p:cNvPr id="774" name="Google Shape;774;p46"/>
           <p:cNvSpPr txBox="1"/>
           <p:nvPr/>
         </p:nvSpPr>
         <p:spPr>
           <a:xfrm>
-            <a:off x="4950000" y="2550000"/>
-            <a:ext cx="1700000" cy="400000"/>
+            <a:off x="5755175" y="2550000"/>
+            <a:ext cx="2025900" cy="399900"/>
           </a:xfrm>
           <a:prstGeom prst="rect">
             <a:avLst/>
@@ -42189,14 +42417,14 @@
       </p:sp>
       <p:sp>
         <p:nvSpPr>
-          <p:cNvPr id="771" name="Google Shape;771;p46"/>
+          <p:cNvPr id="775" name="Google Shape;775;p46"/>
           <p:cNvSpPr txBox="1"/>
           <p:nvPr/>
         </p:nvSpPr>
         <p:spPr>
           <a:xfrm>
-            <a:off x="5000000" y="3000000"/>
-            <a:ext cx="1600000" cy="800000"/>
+            <a:off x="5814760" y="3000000"/>
+            <a:ext cx="1906800" cy="800100"/>
           </a:xfrm>
           <a:prstGeom prst="rect">
             <a:avLst/>
@@ -42247,14 +42475,14 @@
       </p:sp>
       <p:sp>
         <p:nvSpPr>
-          <p:cNvPr id="772" name="Google Shape;772;p46"/>
+          <p:cNvPr id="776" name="Google Shape;776;p46"/>
           <p:cNvSpPr/>
           <p:nvPr/>
         </p:nvSpPr>
         <p:spPr>
           <a:xfrm>
             <a:off x="750000" y="4000000"/>
-            <a:ext cx="5950000" cy="380000"/>
+            <a:ext cx="7090800" cy="380100"/>
           </a:xfrm>
           <a:prstGeom prst="roundRect">
             <a:avLst>
@@ -42303,14 +42531,14 @@
       </p:sp>
       <p:sp>
         <p:nvSpPr>
-          <p:cNvPr id="773" name="Google Shape;773;p46"/>
+          <p:cNvPr id="777" name="Google Shape;777;p46"/>
           <p:cNvSpPr txBox="1"/>
           <p:nvPr/>
         </p:nvSpPr>
         <p:spPr>
           <a:xfrm>
-            <a:off x="900000" y="4010000"/>
-            <a:ext cx="5650000" cy="360000"/>
+            <a:off x="928756" y="4010000"/>
+            <a:ext cx="6733200" cy="360000"/>
           </a:xfrm>
           <a:prstGeom prst="rect">
             <a:avLst/>
@@ -42368,6 +42596,65 @@
               <a:t>a jurimetria não substituiu a advocacia, mas deu ao sócio dados para defender cada decisão diante do board e da auditoria.</a:t>
             </a:r>
             <a:endParaRPr/>
+          </a:p>
+        </p:txBody>
+      </p:sp>
+      <p:sp>
+        <p:nvSpPr>
+          <p:cNvPr id="778" name="Google Shape;778;p46"/>
+          <p:cNvSpPr/>
+          <p:nvPr/>
+        </p:nvSpPr>
+        <p:spPr>
+          <a:xfrm>
+            <a:off x="749030" y="953307"/>
+            <a:ext cx="1778400" cy="54300"/>
+          </a:xfrm>
+          <a:prstGeom prst="rect">
+            <a:avLst/>
+          </a:prstGeom>
+          <a:solidFill>
+            <a:srgbClr val="E8A317"/>
+          </a:solidFill>
+          <a:ln>
+            <a:noFill/>
+          </a:ln>
+        </p:spPr>
+        <p:txBody>
+          <a:bodyPr anchorCtr="0" anchor="ctr" bIns="0" lIns="0" spcFirstLastPara="1" rIns="0" wrap="square" tIns="0">
+            <a:noAutofit/>
+          </a:bodyPr>
+          <a:lstStyle/>
+          <a:p>
+            <a:pPr indent="0" lvl="0" marL="0" marR="0" rtl="0" algn="l">
+              <a:lnSpc>
+                <a:spcPct val="100000"/>
+              </a:lnSpc>
+              <a:spcBef>
+                <a:spcPts val="0"/>
+              </a:spcBef>
+              <a:spcAft>
+                <a:spcPts val="0"/>
+              </a:spcAft>
+              <a:buClr>
+                <a:srgbClr val="000000"/>
+              </a:buClr>
+              <a:buSzPts val="1400"/>
+              <a:buFont typeface="Arial"/>
+              <a:buNone/>
+            </a:pPr>
+            <a:r>
+              <a:t/>
+            </a:r>
+            <a:endParaRPr b="0" i="0" sz="1400" u="none" cap="none" strike="noStrike">
+              <a:solidFill>
+                <a:srgbClr val="000000"/>
+              </a:solidFill>
+              <a:latin typeface="Arial"/>
+              <a:ea typeface="Arial"/>
+              <a:cs typeface="Arial"/>
+              <a:sym typeface="Arial"/>
+            </a:endParaRPr>
           </a:p>
         </p:txBody>
       </p:sp>
@@ -43503,8 +43790,8 @@
         </p:nvSpPr>
         <p:spPr>
           <a:xfrm>
-            <a:off x="750005" y="905100"/>
-            <a:ext cx="1500000" cy="54900"/>
+            <a:off x="750006" y="905100"/>
+            <a:ext cx="1689300" cy="54900"/>
           </a:xfrm>
           <a:prstGeom prst="rect">
             <a:avLst/>
@@ -43579,7 +43866,7 @@
     </p:bg>
     <p:spTree>
       <p:nvGrpSpPr>
-        <p:cNvPr id="777" name="Shape 777"/>
+        <p:cNvPr id="782" name="Shape 782"/>
         <p:cNvGrpSpPr/>
         <p:nvPr/>
       </p:nvGrpSpPr>
@@ -43593,7 +43880,7 @@
       </p:grpSpPr>
       <p:sp>
         <p:nvSpPr>
-          <p:cNvPr id="778" name="Google Shape;778;p35"/>
+          <p:cNvPr id="783" name="Google Shape;783;p35"/>
           <p:cNvSpPr txBox="1"/>
           <p:nvPr/>
         </p:nvSpPr>
@@ -43659,7 +43946,7 @@
       </p:sp>
       <p:sp>
         <p:nvSpPr>
-          <p:cNvPr id="779" name="Google Shape;779;p35"/>
+          <p:cNvPr id="784" name="Google Shape;784;p35"/>
           <p:cNvSpPr txBox="1"/>
           <p:nvPr/>
         </p:nvSpPr>
@@ -43725,7 +44012,7 @@
       </p:sp>
       <p:sp>
         <p:nvSpPr>
-          <p:cNvPr id="780" name="Google Shape;780;p35"/>
+          <p:cNvPr id="785" name="Google Shape;785;p35"/>
           <p:cNvSpPr/>
           <p:nvPr/>
         </p:nvSpPr>
@@ -43784,7 +44071,7 @@
       </p:sp>
       <p:sp>
         <p:nvSpPr>
-          <p:cNvPr id="781" name="Google Shape;781;p35"/>
+          <p:cNvPr id="786" name="Google Shape;786;p35"/>
           <p:cNvSpPr txBox="1"/>
           <p:nvPr/>
         </p:nvSpPr>
@@ -43873,7 +44160,7 @@
     </p:bg>
     <p:spTree>
       <p:nvGrpSpPr>
-        <p:cNvPr id="785" name="Shape 785"/>
+        <p:cNvPr id="790" name="Shape 790"/>
         <p:cNvGrpSpPr/>
         <p:nvPr/>
       </p:nvGrpSpPr>
@@ -43887,14 +44174,14 @@
       </p:grpSpPr>
       <p:sp>
         <p:nvSpPr>
-          <p:cNvPr id="786" name="Google Shape;786;p36"/>
+          <p:cNvPr id="791" name="Google Shape;791;p36"/>
           <p:cNvSpPr txBox="1"/>
           <p:nvPr/>
         </p:nvSpPr>
         <p:spPr>
           <a:xfrm>
             <a:off x="750000" y="500000"/>
-            <a:ext cx="5950000" cy="900000"/>
+            <a:ext cx="7128600" cy="900000"/>
           </a:xfrm>
           <a:prstGeom prst="rect">
             <a:avLst/>
@@ -43953,7 +44240,7 @@
       </p:sp>
       <p:sp>
         <p:nvSpPr>
-          <p:cNvPr id="787" name="Google Shape;787;p36"/>
+          <p:cNvPr id="792" name="Google Shape;792;p36"/>
           <p:cNvSpPr txBox="1"/>
           <p:nvPr/>
         </p:nvSpPr>
@@ -44019,14 +44306,14 @@
       </p:sp>
       <p:sp>
         <p:nvSpPr>
-          <p:cNvPr id="788" name="Google Shape;788;p36"/>
+          <p:cNvPr id="793" name="Google Shape;793;p36"/>
           <p:cNvSpPr/>
           <p:nvPr/>
         </p:nvSpPr>
         <p:spPr>
           <a:xfrm>
-            <a:off x="750000" y="1583302"/>
-            <a:ext cx="3343500" cy="1565400"/>
+            <a:off x="750000" y="1583300"/>
+            <a:ext cx="3443400" cy="1565400"/>
           </a:xfrm>
           <a:prstGeom prst="roundRect">
             <a:avLst>
@@ -44080,14 +44367,14 @@
       </p:sp>
       <p:sp>
         <p:nvSpPr>
-          <p:cNvPr id="789" name="Google Shape;789;p36"/>
+          <p:cNvPr id="794" name="Google Shape;794;p36"/>
           <p:cNvSpPr txBox="1"/>
           <p:nvPr/>
         </p:nvSpPr>
         <p:spPr>
           <a:xfrm>
-            <a:off x="925974" y="1739838"/>
-            <a:ext cx="2991600" cy="396600"/>
+            <a:off x="931236" y="1739836"/>
+            <a:ext cx="3081000" cy="396600"/>
           </a:xfrm>
           <a:prstGeom prst="rect">
             <a:avLst/>
@@ -44146,14 +44433,14 @@
       </p:sp>
       <p:sp>
         <p:nvSpPr>
-          <p:cNvPr id="790" name="Google Shape;790;p36"/>
+          <p:cNvPr id="795" name="Google Shape;795;p36"/>
           <p:cNvSpPr txBox="1"/>
           <p:nvPr/>
         </p:nvSpPr>
         <p:spPr>
           <a:xfrm>
-            <a:off x="925974" y="2104783"/>
-            <a:ext cx="2991600" cy="886800"/>
+            <a:off x="931236" y="2104781"/>
+            <a:ext cx="3081000" cy="886800"/>
           </a:xfrm>
           <a:prstGeom prst="rect">
             <a:avLst/>
@@ -44212,14 +44499,14 @@
       </p:sp>
       <p:sp>
         <p:nvSpPr>
-          <p:cNvPr id="791" name="Google Shape;791;p36"/>
+          <p:cNvPr id="796" name="Google Shape;796;p36"/>
           <p:cNvSpPr/>
           <p:nvPr/>
         </p:nvSpPr>
         <p:spPr>
           <a:xfrm>
-            <a:off x="4328147" y="1583302"/>
-            <a:ext cx="3343500" cy="1565400"/>
+            <a:off x="4435131" y="1583300"/>
+            <a:ext cx="3443400" cy="1565400"/>
           </a:xfrm>
           <a:prstGeom prst="roundRect">
             <a:avLst>
@@ -44273,14 +44560,14 @@
       </p:sp>
       <p:sp>
         <p:nvSpPr>
-          <p:cNvPr id="792" name="Google Shape;792;p36"/>
+          <p:cNvPr id="797" name="Google Shape;797;p36"/>
           <p:cNvSpPr txBox="1"/>
           <p:nvPr/>
         </p:nvSpPr>
         <p:spPr>
           <a:xfrm>
-            <a:off x="4504122" y="1739838"/>
-            <a:ext cx="2991600" cy="396600"/>
+            <a:off x="4616368" y="1739836"/>
+            <a:ext cx="3081000" cy="396600"/>
           </a:xfrm>
           <a:prstGeom prst="rect">
             <a:avLst/>
@@ -44339,14 +44626,14 @@
       </p:sp>
       <p:sp>
         <p:nvSpPr>
-          <p:cNvPr id="793" name="Google Shape;793;p36"/>
+          <p:cNvPr id="798" name="Google Shape;798;p36"/>
           <p:cNvSpPr txBox="1"/>
           <p:nvPr/>
         </p:nvSpPr>
         <p:spPr>
           <a:xfrm>
-            <a:off x="4504122" y="2082355"/>
-            <a:ext cx="2991600" cy="886800"/>
+            <a:off x="4616368" y="2082353"/>
+            <a:ext cx="3081000" cy="886800"/>
           </a:xfrm>
           <a:prstGeom prst="rect">
             <a:avLst/>
@@ -44405,14 +44692,14 @@
       </p:sp>
       <p:sp>
         <p:nvSpPr>
-          <p:cNvPr id="794" name="Google Shape;794;p36"/>
+          <p:cNvPr id="799" name="Google Shape;799;p36"/>
           <p:cNvSpPr/>
           <p:nvPr/>
         </p:nvSpPr>
         <p:spPr>
           <a:xfrm>
-            <a:off x="750000" y="3250000"/>
-            <a:ext cx="6921600" cy="800100"/>
+            <a:off x="750000" y="3249999"/>
+            <a:ext cx="7128600" cy="800100"/>
           </a:xfrm>
           <a:prstGeom prst="roundRect">
             <a:avLst>
@@ -44466,14 +44753,14 @@
       </p:sp>
       <p:sp>
         <p:nvSpPr>
-          <p:cNvPr id="795" name="Google Shape;795;p36"/>
+          <p:cNvPr id="800" name="Google Shape;800;p36"/>
           <p:cNvSpPr txBox="1"/>
           <p:nvPr/>
         </p:nvSpPr>
         <p:spPr>
           <a:xfrm>
-            <a:off x="924495" y="3320000"/>
-            <a:ext cx="6572700" cy="660000"/>
+            <a:off x="929712" y="3319999"/>
+            <a:ext cx="6769200" cy="660000"/>
           </a:xfrm>
           <a:prstGeom prst="rect">
             <a:avLst/>
@@ -44544,14 +44831,14 @@
       </p:sp>
       <p:sp>
         <p:nvSpPr>
-          <p:cNvPr id="796" name="Google Shape;796;p36"/>
+          <p:cNvPr id="801" name="Google Shape;801;p36"/>
           <p:cNvSpPr txBox="1"/>
           <p:nvPr/>
         </p:nvSpPr>
         <p:spPr>
           <a:xfrm>
             <a:off x="750000" y="4400000"/>
-            <a:ext cx="5950000" cy="250000"/>
+            <a:ext cx="6127800" cy="249900"/>
           </a:xfrm>
           <a:prstGeom prst="rect">
             <a:avLst/>
@@ -44610,14 +44897,14 @@
       </p:sp>
       <p:sp>
         <p:nvSpPr>
-          <p:cNvPr id="797" name="Google Shape;797;p36"/>
+          <p:cNvPr id="802" name="Google Shape;802;p36"/>
           <p:cNvSpPr/>
           <p:nvPr/>
         </p:nvSpPr>
         <p:spPr>
           <a:xfrm>
-            <a:off x="750005" y="905100"/>
-            <a:ext cx="1500000" cy="54900"/>
+            <a:off x="749030" y="953307"/>
+            <a:ext cx="1778400" cy="54300"/>
           </a:xfrm>
           <a:prstGeom prst="rect">
             <a:avLst/>
@@ -44692,7 +44979,7 @@
     </p:bg>
     <p:spTree>
       <p:nvGrpSpPr>
-        <p:cNvPr id="801" name="Shape 801"/>
+        <p:cNvPr id="806" name="Shape 806"/>
         <p:cNvGrpSpPr/>
         <p:nvPr/>
       </p:nvGrpSpPr>
@@ -44706,14 +44993,14 @@
       </p:grpSpPr>
       <p:sp>
         <p:nvSpPr>
-          <p:cNvPr id="802" name="Google Shape;802;g3d94641431f_0_145"/>
+          <p:cNvPr id="807" name="Google Shape;807;g3d94641431f_0_145"/>
           <p:cNvSpPr txBox="1"/>
           <p:nvPr/>
         </p:nvSpPr>
         <p:spPr>
           <a:xfrm>
             <a:off x="750000" y="500000"/>
-            <a:ext cx="5949900" cy="459900"/>
+            <a:ext cx="7150200" cy="459900"/>
           </a:xfrm>
           <a:prstGeom prst="rect">
             <a:avLst/>
@@ -44772,73 +45059,14 @@
       </p:sp>
       <p:sp>
         <p:nvSpPr>
-          <p:cNvPr id="803" name="Google Shape;803;g3d94641431f_0_145"/>
-          <p:cNvSpPr/>
-          <p:nvPr/>
-        </p:nvSpPr>
-        <p:spPr>
-          <a:xfrm>
-            <a:off x="750005" y="905100"/>
-            <a:ext cx="1500000" cy="54900"/>
-          </a:xfrm>
-          <a:prstGeom prst="rect">
-            <a:avLst/>
-          </a:prstGeom>
-          <a:solidFill>
-            <a:srgbClr val="E8A317"/>
-          </a:solidFill>
-          <a:ln>
-            <a:noFill/>
-          </a:ln>
-        </p:spPr>
-        <p:txBody>
-          <a:bodyPr anchorCtr="0" anchor="ctr" bIns="0" lIns="0" spcFirstLastPara="1" rIns="0" wrap="square" tIns="0">
-            <a:noAutofit/>
-          </a:bodyPr>
-          <a:lstStyle/>
-          <a:p>
-            <a:pPr indent="0" lvl="0" marL="0" marR="0" rtl="0" algn="l">
-              <a:lnSpc>
-                <a:spcPct val="100000"/>
-              </a:lnSpc>
-              <a:spcBef>
-                <a:spcPts val="0"/>
-              </a:spcBef>
-              <a:spcAft>
-                <a:spcPts val="0"/>
-              </a:spcAft>
-              <a:buClr>
-                <a:srgbClr val="000000"/>
-              </a:buClr>
-              <a:buSzPts val="1400"/>
-              <a:buFont typeface="Arial"/>
-              <a:buNone/>
-            </a:pPr>
-            <a:r>
-              <a:t/>
-            </a:r>
-            <a:endParaRPr b="0" i="0" sz="1400" u="none" cap="none" strike="noStrike">
-              <a:solidFill>
-                <a:srgbClr val="000000"/>
-              </a:solidFill>
-              <a:latin typeface="Arial"/>
-              <a:ea typeface="Arial"/>
-              <a:cs typeface="Arial"/>
-              <a:sym typeface="Arial"/>
-            </a:endParaRPr>
-          </a:p>
-        </p:txBody>
-      </p:sp>
-      <p:sp>
-        <p:nvSpPr>
-          <p:cNvPr id="804" name="Google Shape;804;g3d94641431f_0_145"/>
+          <p:cNvPr id="808" name="Google Shape;808;g3d94641431f_0_145"/>
           <p:cNvSpPr txBox="1"/>
           <p:nvPr/>
         </p:nvSpPr>
         <p:spPr>
           <a:xfrm>
             <a:off x="750000" y="1379950"/>
-            <a:ext cx="6643800" cy="1108500"/>
+            <a:ext cx="7150200" cy="902400"/>
           </a:xfrm>
           <a:prstGeom prst="rect">
             <a:avLst/>
@@ -44989,7 +45217,7 @@
       </p:sp>
       <p:pic>
         <p:nvPicPr>
-          <p:cNvPr id="805" name="Google Shape;805;g3d94641431f_0_145"/>
+          <p:cNvPr id="809" name="Google Shape;809;g3d94641431f_0_145"/>
           <p:cNvPicPr preferRelativeResize="0"/>
           <p:nvPr/>
         </p:nvPicPr>
@@ -45002,8 +45230,8 @@
         </p:blipFill>
         <p:spPr>
           <a:xfrm>
-            <a:off x="1806355" y="2904529"/>
-            <a:ext cx="1618011" cy="1127704"/>
+            <a:off x="1886872" y="2904524"/>
+            <a:ext cx="1741338" cy="1127701"/>
           </a:xfrm>
           <a:prstGeom prst="rect">
             <a:avLst/>
@@ -45016,7 +45244,7 @@
       </p:pic>
       <p:pic>
         <p:nvPicPr>
-          <p:cNvPr id="806" name="Google Shape;806;g3d94641431f_0_145"/>
+          <p:cNvPr id="810" name="Google Shape;810;g3d94641431f_0_145"/>
           <p:cNvPicPr preferRelativeResize="0"/>
           <p:nvPr/>
         </p:nvPicPr>
@@ -45029,8 +45257,8 @@
         </p:blipFill>
         <p:spPr>
           <a:xfrm>
-            <a:off x="4294469" y="2924142"/>
-            <a:ext cx="1735684" cy="1088480"/>
+            <a:off x="4564634" y="2924137"/>
+            <a:ext cx="1867980" cy="1088477"/>
           </a:xfrm>
           <a:prstGeom prst="rect">
             <a:avLst/>
@@ -45043,14 +45271,14 @@
       </p:pic>
       <p:sp>
         <p:nvSpPr>
-          <p:cNvPr id="807" name="Google Shape;807;g3d94641431f_0_145"/>
+          <p:cNvPr id="811" name="Google Shape;811;g3d94641431f_0_145"/>
           <p:cNvSpPr txBox="1"/>
           <p:nvPr/>
         </p:nvSpPr>
         <p:spPr>
           <a:xfrm>
-            <a:off x="2073463" y="2500237"/>
-            <a:ext cx="1083900" cy="404400"/>
+            <a:off x="2174339" y="2500234"/>
+            <a:ext cx="1166400" cy="404100"/>
           </a:xfrm>
           <a:prstGeom prst="rect">
             <a:avLst/>
@@ -45109,14 +45337,14 @@
       </p:sp>
       <p:sp>
         <p:nvSpPr>
-          <p:cNvPr id="808" name="Google Shape;808;g3d94641431f_0_145"/>
+          <p:cNvPr id="812" name="Google Shape;812;g3d94641431f_0_145"/>
           <p:cNvSpPr txBox="1"/>
           <p:nvPr/>
         </p:nvSpPr>
         <p:spPr>
           <a:xfrm>
-            <a:off x="4353302" y="2500239"/>
-            <a:ext cx="1618200" cy="404400"/>
+            <a:off x="4627951" y="2500236"/>
+            <a:ext cx="1741500" cy="404100"/>
           </a:xfrm>
           <a:prstGeom prst="rect">
             <a:avLst/>
@@ -45162,6 +45390,65 @@
               <a:t>Amostra aelatória</a:t>
             </a:r>
             <a:endParaRPr b="0" i="0" sz="1441" u="none" cap="none" strike="noStrike">
+              <a:solidFill>
+                <a:srgbClr val="000000"/>
+              </a:solidFill>
+              <a:latin typeface="Arial"/>
+              <a:ea typeface="Arial"/>
+              <a:cs typeface="Arial"/>
+              <a:sym typeface="Arial"/>
+            </a:endParaRPr>
+          </a:p>
+        </p:txBody>
+      </p:sp>
+      <p:sp>
+        <p:nvSpPr>
+          <p:cNvPr id="813" name="Google Shape;813;g3d94641431f_0_145"/>
+          <p:cNvSpPr/>
+          <p:nvPr/>
+        </p:nvSpPr>
+        <p:spPr>
+          <a:xfrm>
+            <a:off x="749030" y="953307"/>
+            <a:ext cx="1778400" cy="54300"/>
+          </a:xfrm>
+          <a:prstGeom prst="rect">
+            <a:avLst/>
+          </a:prstGeom>
+          <a:solidFill>
+            <a:srgbClr val="E8A317"/>
+          </a:solidFill>
+          <a:ln>
+            <a:noFill/>
+          </a:ln>
+        </p:spPr>
+        <p:txBody>
+          <a:bodyPr anchorCtr="0" anchor="ctr" bIns="0" lIns="0" spcFirstLastPara="1" rIns="0" wrap="square" tIns="0">
+            <a:noAutofit/>
+          </a:bodyPr>
+          <a:lstStyle/>
+          <a:p>
+            <a:pPr indent="0" lvl="0" marL="0" marR="0" rtl="0" algn="l">
+              <a:lnSpc>
+                <a:spcPct val="100000"/>
+              </a:lnSpc>
+              <a:spcBef>
+                <a:spcPts val="0"/>
+              </a:spcBef>
+              <a:spcAft>
+                <a:spcPts val="0"/>
+              </a:spcAft>
+              <a:buClr>
+                <a:srgbClr val="000000"/>
+              </a:buClr>
+              <a:buSzPts val="1400"/>
+              <a:buFont typeface="Arial"/>
+              <a:buNone/>
+            </a:pPr>
+            <a:r>
+              <a:t/>
+            </a:r>
+            <a:endParaRPr b="0" i="0" sz="1400" u="none" cap="none" strike="noStrike">
               <a:solidFill>
                 <a:srgbClr val="000000"/>
               </a:solidFill>
@@ -45198,7 +45485,7 @@
     </p:bg>
     <p:spTree>
       <p:nvGrpSpPr>
-        <p:cNvPr id="812" name="Shape 812"/>
+        <p:cNvPr id="817" name="Shape 817"/>
         <p:cNvGrpSpPr/>
         <p:nvPr/>
       </p:nvGrpSpPr>
@@ -45212,14 +45499,14 @@
       </p:grpSpPr>
       <p:sp>
         <p:nvSpPr>
-          <p:cNvPr id="813" name="Google Shape;813;p37"/>
+          <p:cNvPr id="818" name="Google Shape;818;p37"/>
           <p:cNvSpPr txBox="1"/>
           <p:nvPr/>
         </p:nvSpPr>
         <p:spPr>
           <a:xfrm>
             <a:off x="750000" y="500000"/>
-            <a:ext cx="5950000" cy="900000"/>
+            <a:ext cx="7128600" cy="900000"/>
           </a:xfrm>
           <a:prstGeom prst="rect">
             <a:avLst/>
@@ -45278,14 +45565,14 @@
       </p:sp>
       <p:sp>
         <p:nvSpPr>
-          <p:cNvPr id="814" name="Google Shape;814;p37"/>
+          <p:cNvPr id="819" name="Google Shape;819;p37"/>
           <p:cNvSpPr txBox="1"/>
           <p:nvPr/>
         </p:nvSpPr>
         <p:spPr>
           <a:xfrm>
             <a:off x="750000" y="1150575"/>
-            <a:ext cx="5949900" cy="399900"/>
+            <a:ext cx="7128300" cy="399900"/>
           </a:xfrm>
           <a:prstGeom prst="rect">
             <a:avLst/>
@@ -45344,14 +45631,14 @@
       </p:sp>
       <p:sp>
         <p:nvSpPr>
-          <p:cNvPr id="815" name="Google Shape;815;p37"/>
+          <p:cNvPr id="820" name="Google Shape;820;p37"/>
           <p:cNvSpPr/>
           <p:nvPr/>
         </p:nvSpPr>
         <p:spPr>
           <a:xfrm>
             <a:off x="750000" y="1570575"/>
-            <a:ext cx="2850000" cy="2199900"/>
+            <a:ext cx="3414600" cy="2199900"/>
           </a:xfrm>
           <a:prstGeom prst="roundRect">
             <a:avLst>
@@ -45405,14 +45692,14 @@
       </p:sp>
       <p:sp>
         <p:nvSpPr>
-          <p:cNvPr id="816" name="Google Shape;816;p37"/>
+          <p:cNvPr id="821" name="Google Shape;821;p37"/>
           <p:cNvSpPr txBox="1"/>
           <p:nvPr/>
         </p:nvSpPr>
         <p:spPr>
           <a:xfrm>
-            <a:off x="900000" y="1720575"/>
-            <a:ext cx="2550000" cy="380100"/>
+            <a:off x="929709" y="1720575"/>
+            <a:ext cx="3055200" cy="380100"/>
           </a:xfrm>
           <a:prstGeom prst="rect">
             <a:avLst/>
@@ -45471,14 +45758,14 @@
       </p:sp>
       <p:sp>
         <p:nvSpPr>
-          <p:cNvPr id="817" name="Google Shape;817;p37"/>
+          <p:cNvPr id="822" name="Google Shape;822;p37"/>
           <p:cNvSpPr txBox="1"/>
           <p:nvPr/>
         </p:nvSpPr>
         <p:spPr>
           <a:xfrm>
-            <a:off x="900000" y="2170575"/>
-            <a:ext cx="2550000" cy="1500000"/>
+            <a:off x="929709" y="2170575"/>
+            <a:ext cx="3055200" cy="1500000"/>
           </a:xfrm>
           <a:prstGeom prst="rect">
             <a:avLst/>
@@ -45617,14 +45904,14 @@
       </p:sp>
       <p:sp>
         <p:nvSpPr>
-          <p:cNvPr id="818" name="Google Shape;818;p37"/>
+          <p:cNvPr id="823" name="Google Shape;823;p37"/>
           <p:cNvSpPr/>
           <p:nvPr/>
         </p:nvSpPr>
         <p:spPr>
           <a:xfrm>
-            <a:off x="3800000" y="1570575"/>
-            <a:ext cx="2850000" cy="2199900"/>
+            <a:off x="4404092" y="1570575"/>
+            <a:ext cx="3414600" cy="2199900"/>
           </a:xfrm>
           <a:prstGeom prst="roundRect">
             <a:avLst>
@@ -45678,14 +45965,14 @@
       </p:sp>
       <p:sp>
         <p:nvSpPr>
-          <p:cNvPr id="819" name="Google Shape;819;p37"/>
+          <p:cNvPr id="824" name="Google Shape;824;p37"/>
           <p:cNvSpPr txBox="1"/>
           <p:nvPr/>
         </p:nvSpPr>
         <p:spPr>
           <a:xfrm>
-            <a:off x="3950000" y="1720575"/>
-            <a:ext cx="2550000" cy="380100"/>
+            <a:off x="4583802" y="1720575"/>
+            <a:ext cx="3055200" cy="380100"/>
           </a:xfrm>
           <a:prstGeom prst="rect">
             <a:avLst/>
@@ -45744,14 +46031,14 @@
       </p:sp>
       <p:sp>
         <p:nvSpPr>
-          <p:cNvPr id="820" name="Google Shape;820;p37"/>
+          <p:cNvPr id="825" name="Google Shape;825;p37"/>
           <p:cNvSpPr txBox="1"/>
           <p:nvPr/>
         </p:nvSpPr>
         <p:spPr>
           <a:xfrm>
-            <a:off x="3950000" y="2170575"/>
-            <a:ext cx="2550000" cy="1500000"/>
+            <a:off x="4583802" y="2170575"/>
+            <a:ext cx="3055200" cy="1500000"/>
           </a:xfrm>
           <a:prstGeom prst="rect">
             <a:avLst/>
@@ -45890,14 +46177,14 @@
       </p:sp>
       <p:sp>
         <p:nvSpPr>
-          <p:cNvPr id="821" name="Google Shape;821;p37"/>
+          <p:cNvPr id="826" name="Google Shape;826;p37"/>
           <p:cNvSpPr txBox="1"/>
           <p:nvPr/>
         </p:nvSpPr>
         <p:spPr>
           <a:xfrm>
             <a:off x="750000" y="4094375"/>
-            <a:ext cx="5949900" cy="399900"/>
+            <a:ext cx="7128300" cy="399900"/>
           </a:xfrm>
           <a:prstGeom prst="rect">
             <a:avLst/>
@@ -45956,14 +46243,14 @@
       </p:sp>
       <p:sp>
         <p:nvSpPr>
-          <p:cNvPr id="822" name="Google Shape;822;p37"/>
+          <p:cNvPr id="827" name="Google Shape;827;p37"/>
           <p:cNvSpPr/>
           <p:nvPr/>
         </p:nvSpPr>
         <p:spPr>
           <a:xfrm>
-            <a:off x="750005" y="905100"/>
-            <a:ext cx="1500000" cy="54900"/>
+            <a:off x="750006" y="905100"/>
+            <a:ext cx="1797000" cy="54900"/>
           </a:xfrm>
           <a:prstGeom prst="rect">
             <a:avLst/>
@@ -46038,7 +46325,7 @@
     </p:bg>
     <p:spTree>
       <p:nvGrpSpPr>
-        <p:cNvPr id="826" name="Shape 826"/>
+        <p:cNvPr id="831" name="Shape 831"/>
         <p:cNvGrpSpPr/>
         <p:nvPr/>
       </p:nvGrpSpPr>
@@ -46052,14 +46339,14 @@
       </p:grpSpPr>
       <p:sp>
         <p:nvSpPr>
-          <p:cNvPr id="827" name="Google Shape;827;p38"/>
+          <p:cNvPr id="832" name="Google Shape;832;p38"/>
           <p:cNvSpPr txBox="1"/>
           <p:nvPr/>
         </p:nvSpPr>
         <p:spPr>
           <a:xfrm>
-            <a:off x="750000" y="500000"/>
-            <a:ext cx="5949900" cy="900000"/>
+            <a:off x="750023" y="500000"/>
+            <a:ext cx="7150200" cy="900000"/>
           </a:xfrm>
           <a:prstGeom prst="rect">
             <a:avLst/>
@@ -46118,14 +46405,14 @@
       </p:sp>
       <p:sp>
         <p:nvSpPr>
-          <p:cNvPr id="828" name="Google Shape;828;p38"/>
+          <p:cNvPr id="833" name="Google Shape;833;p38"/>
           <p:cNvSpPr txBox="1"/>
           <p:nvPr/>
         </p:nvSpPr>
         <p:spPr>
           <a:xfrm>
-            <a:off x="750000" y="1187975"/>
-            <a:ext cx="5949900" cy="399900"/>
+            <a:off x="750023" y="1187975"/>
+            <a:ext cx="6120900" cy="399900"/>
           </a:xfrm>
           <a:prstGeom prst="rect">
             <a:avLst/>
@@ -46184,14 +46471,14 @@
       </p:sp>
       <p:sp>
         <p:nvSpPr>
-          <p:cNvPr id="829" name="Google Shape;829;p38"/>
+          <p:cNvPr id="834" name="Google Shape;834;p38"/>
           <p:cNvSpPr/>
           <p:nvPr/>
         </p:nvSpPr>
         <p:spPr>
           <a:xfrm>
-            <a:off x="750000" y="1533215"/>
-            <a:ext cx="6950400" cy="890100"/>
+            <a:off x="750023" y="1533215"/>
+            <a:ext cx="7150200" cy="890100"/>
           </a:xfrm>
           <a:prstGeom prst="roundRect">
             <a:avLst>
@@ -46245,14 +46532,14 @@
       </p:sp>
       <p:sp>
         <p:nvSpPr>
-          <p:cNvPr id="830" name="Google Shape;830;p38"/>
+          <p:cNvPr id="835" name="Google Shape;835;p38"/>
           <p:cNvSpPr txBox="1"/>
           <p:nvPr/>
         </p:nvSpPr>
         <p:spPr>
           <a:xfrm>
-            <a:off x="866814" y="1613215"/>
-            <a:ext cx="1869000" cy="350100"/>
+            <a:off x="870195" y="1613215"/>
+            <a:ext cx="1922700" cy="350100"/>
           </a:xfrm>
           <a:prstGeom prst="rect">
             <a:avLst/>
@@ -46311,14 +46598,14 @@
       </p:sp>
       <p:sp>
         <p:nvSpPr>
-          <p:cNvPr id="831" name="Google Shape;831;p38"/>
+          <p:cNvPr id="836" name="Google Shape;836;p38"/>
           <p:cNvSpPr txBox="1"/>
           <p:nvPr/>
         </p:nvSpPr>
         <p:spPr>
           <a:xfrm>
-            <a:off x="866814" y="1881090"/>
-            <a:ext cx="1950300" cy="399900"/>
+            <a:off x="870195" y="1881090"/>
+            <a:ext cx="2006400" cy="399900"/>
           </a:xfrm>
           <a:prstGeom prst="rect">
             <a:avLst/>
@@ -46377,14 +46664,14 @@
       </p:sp>
       <p:sp>
         <p:nvSpPr>
-          <p:cNvPr id="832" name="Google Shape;832;p38"/>
+          <p:cNvPr id="837" name="Google Shape;837;p38"/>
           <p:cNvSpPr txBox="1"/>
           <p:nvPr/>
         </p:nvSpPr>
         <p:spPr>
           <a:xfrm>
-            <a:off x="2948710" y="1693215"/>
-            <a:ext cx="4731000" cy="249900"/>
+            <a:off x="3011947" y="1693215"/>
+            <a:ext cx="4866900" cy="249900"/>
           </a:xfrm>
           <a:prstGeom prst="rect">
             <a:avLst/>
@@ -46443,14 +46730,14 @@
       </p:sp>
       <p:sp>
         <p:nvSpPr>
-          <p:cNvPr id="833" name="Google Shape;833;p38"/>
+          <p:cNvPr id="838" name="Google Shape;838;p38"/>
           <p:cNvSpPr txBox="1"/>
           <p:nvPr/>
         </p:nvSpPr>
         <p:spPr>
           <a:xfrm>
-            <a:off x="2948710" y="1973215"/>
-            <a:ext cx="4731000" cy="450000"/>
+            <a:off x="3011947" y="1973215"/>
+            <a:ext cx="4866900" cy="450000"/>
           </a:xfrm>
           <a:prstGeom prst="rect">
             <a:avLst/>
@@ -46509,14 +46796,14 @@
       </p:sp>
       <p:sp>
         <p:nvSpPr>
-          <p:cNvPr id="834" name="Google Shape;834;p38"/>
+          <p:cNvPr id="839" name="Google Shape;839;p38"/>
           <p:cNvSpPr/>
           <p:nvPr/>
         </p:nvSpPr>
         <p:spPr>
           <a:xfrm>
-            <a:off x="750000" y="2445739"/>
-            <a:ext cx="6950400" cy="890100"/>
+            <a:off x="750023" y="2445739"/>
+            <a:ext cx="7150200" cy="890100"/>
           </a:xfrm>
           <a:prstGeom prst="roundRect">
             <a:avLst>
@@ -46570,14 +46857,14 @@
       </p:sp>
       <p:sp>
         <p:nvSpPr>
-          <p:cNvPr id="835" name="Google Shape;835;p38"/>
+          <p:cNvPr id="840" name="Google Shape;840;p38"/>
           <p:cNvSpPr txBox="1"/>
           <p:nvPr/>
         </p:nvSpPr>
         <p:spPr>
           <a:xfrm>
-            <a:off x="866814" y="2525739"/>
-            <a:ext cx="1869000" cy="350100"/>
+            <a:off x="870195" y="2525739"/>
+            <a:ext cx="1922700" cy="350100"/>
           </a:xfrm>
           <a:prstGeom prst="rect">
             <a:avLst/>
@@ -46636,14 +46923,14 @@
       </p:sp>
       <p:sp>
         <p:nvSpPr>
-          <p:cNvPr id="836" name="Google Shape;836;p38"/>
+          <p:cNvPr id="841" name="Google Shape;841;p38"/>
           <p:cNvSpPr txBox="1"/>
           <p:nvPr/>
         </p:nvSpPr>
         <p:spPr>
           <a:xfrm>
-            <a:off x="866825" y="2829364"/>
-            <a:ext cx="1950300" cy="399900"/>
+            <a:off x="870206" y="2829364"/>
+            <a:ext cx="2006400" cy="399900"/>
           </a:xfrm>
           <a:prstGeom prst="rect">
             <a:avLst/>
@@ -46702,14 +46989,14 @@
       </p:sp>
       <p:sp>
         <p:nvSpPr>
-          <p:cNvPr id="837" name="Google Shape;837;p38"/>
+          <p:cNvPr id="842" name="Google Shape;842;p38"/>
           <p:cNvSpPr txBox="1"/>
           <p:nvPr/>
         </p:nvSpPr>
         <p:spPr>
           <a:xfrm>
-            <a:off x="2948710" y="2605739"/>
-            <a:ext cx="4731000" cy="249900"/>
+            <a:off x="3011947" y="2605739"/>
+            <a:ext cx="4866900" cy="249900"/>
           </a:xfrm>
           <a:prstGeom prst="rect">
             <a:avLst/>
@@ -46768,14 +47055,14 @@
       </p:sp>
       <p:sp>
         <p:nvSpPr>
-          <p:cNvPr id="838" name="Google Shape;838;p38"/>
+          <p:cNvPr id="843" name="Google Shape;843;p38"/>
           <p:cNvSpPr txBox="1"/>
           <p:nvPr/>
         </p:nvSpPr>
         <p:spPr>
           <a:xfrm>
-            <a:off x="2948710" y="2885739"/>
-            <a:ext cx="4731000" cy="450000"/>
+            <a:off x="3011947" y="2885739"/>
+            <a:ext cx="4866900" cy="450000"/>
           </a:xfrm>
           <a:prstGeom prst="rect">
             <a:avLst/>
@@ -46834,14 +47121,14 @@
       </p:sp>
       <p:sp>
         <p:nvSpPr>
-          <p:cNvPr id="839" name="Google Shape;839;p38"/>
+          <p:cNvPr id="844" name="Google Shape;844;p38"/>
           <p:cNvSpPr/>
           <p:nvPr/>
         </p:nvSpPr>
         <p:spPr>
           <a:xfrm>
-            <a:off x="750000" y="3447975"/>
-            <a:ext cx="6950400" cy="890100"/>
+            <a:off x="750023" y="3447975"/>
+            <a:ext cx="7150200" cy="890100"/>
           </a:xfrm>
           <a:prstGeom prst="roundRect">
             <a:avLst>
@@ -46895,14 +47182,14 @@
       </p:sp>
       <p:sp>
         <p:nvSpPr>
-          <p:cNvPr id="840" name="Google Shape;840;p38"/>
+          <p:cNvPr id="845" name="Google Shape;845;p38"/>
           <p:cNvSpPr txBox="1"/>
           <p:nvPr/>
         </p:nvSpPr>
         <p:spPr>
           <a:xfrm>
-            <a:off x="866814" y="3527975"/>
-            <a:ext cx="1869000" cy="350100"/>
+            <a:off x="870195" y="3527975"/>
+            <a:ext cx="1922700" cy="350100"/>
           </a:xfrm>
           <a:prstGeom prst="rect">
             <a:avLst/>
@@ -46961,14 +47248,14 @@
       </p:sp>
       <p:sp>
         <p:nvSpPr>
-          <p:cNvPr id="841" name="Google Shape;841;p38"/>
+          <p:cNvPr id="846" name="Google Shape;846;p38"/>
           <p:cNvSpPr txBox="1"/>
           <p:nvPr/>
         </p:nvSpPr>
         <p:spPr>
           <a:xfrm>
-            <a:off x="866814" y="3907975"/>
-            <a:ext cx="1869000" cy="399900"/>
+            <a:off x="870195" y="3907975"/>
+            <a:ext cx="1922700" cy="399900"/>
           </a:xfrm>
           <a:prstGeom prst="rect">
             <a:avLst/>
@@ -47027,14 +47314,14 @@
       </p:sp>
       <p:sp>
         <p:nvSpPr>
-          <p:cNvPr id="842" name="Google Shape;842;p38"/>
+          <p:cNvPr id="847" name="Google Shape;847;p38"/>
           <p:cNvSpPr txBox="1"/>
           <p:nvPr/>
         </p:nvSpPr>
         <p:spPr>
           <a:xfrm>
-            <a:off x="2939977" y="3607975"/>
-            <a:ext cx="4731000" cy="249900"/>
+            <a:off x="3002963" y="3607975"/>
+            <a:ext cx="4866900" cy="249900"/>
           </a:xfrm>
           <a:prstGeom prst="rect">
             <a:avLst/>
@@ -47093,14 +47380,14 @@
       </p:sp>
       <p:sp>
         <p:nvSpPr>
-          <p:cNvPr id="843" name="Google Shape;843;p38"/>
+          <p:cNvPr id="848" name="Google Shape;848;p38"/>
           <p:cNvSpPr txBox="1"/>
           <p:nvPr/>
         </p:nvSpPr>
         <p:spPr>
           <a:xfrm>
-            <a:off x="2939977" y="3887975"/>
-            <a:ext cx="4731000" cy="450000"/>
+            <a:off x="3002963" y="3887975"/>
+            <a:ext cx="4866900" cy="450000"/>
           </a:xfrm>
           <a:prstGeom prst="rect">
             <a:avLst/>
@@ -47159,14 +47446,14 @@
       </p:sp>
       <p:sp>
         <p:nvSpPr>
-          <p:cNvPr id="844" name="Google Shape;844;p38"/>
+          <p:cNvPr id="849" name="Google Shape;849;p38"/>
           <p:cNvSpPr txBox="1"/>
           <p:nvPr/>
         </p:nvSpPr>
         <p:spPr>
           <a:xfrm>
-            <a:off x="750000" y="4400000"/>
-            <a:ext cx="5950000" cy="250000"/>
+            <a:off x="750023" y="4400000"/>
+            <a:ext cx="6121200" cy="249900"/>
           </a:xfrm>
           <a:prstGeom prst="rect">
             <a:avLst/>
@@ -47225,14 +47512,14 @@
       </p:sp>
       <p:sp>
         <p:nvSpPr>
-          <p:cNvPr id="845" name="Google Shape;845;p38"/>
+          <p:cNvPr id="850" name="Google Shape;850;p38"/>
           <p:cNvSpPr/>
           <p:nvPr/>
         </p:nvSpPr>
         <p:spPr>
           <a:xfrm>
-            <a:off x="750005" y="905100"/>
-            <a:ext cx="1500000" cy="54900"/>
+            <a:off x="749025" y="953307"/>
+            <a:ext cx="1829400" cy="54300"/>
           </a:xfrm>
           <a:prstGeom prst="rect">
             <a:avLst/>
@@ -47307,7 +47594,7 @@
     </p:bg>
     <p:spTree>
       <p:nvGrpSpPr>
-        <p:cNvPr id="849" name="Shape 849"/>
+        <p:cNvPr id="854" name="Shape 854"/>
         <p:cNvGrpSpPr/>
         <p:nvPr/>
       </p:nvGrpSpPr>
@@ -47321,14 +47608,14 @@
       </p:grpSpPr>
       <p:sp>
         <p:nvSpPr>
-          <p:cNvPr id="850" name="Google Shape;850;p39"/>
+          <p:cNvPr id="855" name="Google Shape;855;p39"/>
           <p:cNvSpPr txBox="1"/>
           <p:nvPr/>
         </p:nvSpPr>
         <p:spPr>
           <a:xfrm>
-            <a:off x="750000" y="500000"/>
-            <a:ext cx="5950000" cy="900000"/>
+            <a:off x="750162" y="500000"/>
+            <a:ext cx="6978600" cy="900000"/>
           </a:xfrm>
           <a:prstGeom prst="rect">
             <a:avLst/>
@@ -47387,14 +47674,14 @@
       </p:sp>
       <p:sp>
         <p:nvSpPr>
-          <p:cNvPr id="851" name="Google Shape;851;p39"/>
+          <p:cNvPr id="856" name="Google Shape;856;p39"/>
           <p:cNvSpPr txBox="1"/>
           <p:nvPr/>
         </p:nvSpPr>
         <p:spPr>
           <a:xfrm>
-            <a:off x="750000" y="1145000"/>
-            <a:ext cx="5949900" cy="306900"/>
+            <a:off x="750162" y="1145000"/>
+            <a:ext cx="6978600" cy="306900"/>
           </a:xfrm>
           <a:prstGeom prst="rect">
             <a:avLst/>
@@ -47453,14 +47740,14 @@
       </p:sp>
       <p:sp>
         <p:nvSpPr>
-          <p:cNvPr id="852" name="Google Shape;852;p39"/>
+          <p:cNvPr id="857" name="Google Shape;857;p39"/>
           <p:cNvSpPr/>
           <p:nvPr/>
         </p:nvSpPr>
         <p:spPr>
           <a:xfrm>
-            <a:off x="750000" y="1702662"/>
-            <a:ext cx="1950000" cy="1919100"/>
+            <a:off x="750162" y="1702662"/>
+            <a:ext cx="2287200" cy="1919100"/>
           </a:xfrm>
           <a:prstGeom prst="roundRect">
             <a:avLst>
@@ -47502,26 +47789,26 @@
             </a:r>
             <a:endParaRPr b="0" i="0" sz="1400" u="none" cap="none" strike="noStrike">
               <a:solidFill>
-                <a:srgbClr val="000000"/>
-              </a:solidFill>
-              <a:latin typeface="Arial"/>
-              <a:ea typeface="Arial"/>
-              <a:cs typeface="Arial"/>
-              <a:sym typeface="Arial"/>
-            </a:endParaRPr>
-          </a:p>
-        </p:txBody>
-      </p:sp>
-      <p:sp>
-        <p:nvSpPr>
-          <p:cNvPr id="853" name="Google Shape;853;p39"/>
+                <a:schemeClr val="lt1"/>
+              </a:solidFill>
+              <a:latin typeface="Arial"/>
+              <a:ea typeface="Arial"/>
+              <a:cs typeface="Arial"/>
+              <a:sym typeface="Arial"/>
+            </a:endParaRPr>
+          </a:p>
+        </p:txBody>
+      </p:sp>
+      <p:sp>
+        <p:nvSpPr>
+          <p:cNvPr id="858" name="Google Shape;858;p39"/>
           <p:cNvSpPr/>
           <p:nvPr/>
         </p:nvSpPr>
         <p:spPr>
           <a:xfrm>
-            <a:off x="750000" y="1702662"/>
-            <a:ext cx="1950000" cy="306900"/>
+            <a:off x="750162" y="1702662"/>
+            <a:ext cx="2287200" cy="306900"/>
           </a:xfrm>
           <a:prstGeom prst="rect">
             <a:avLst/>
@@ -47561,26 +47848,26 @@
             </a:r>
             <a:endParaRPr b="0" i="0" sz="1400" u="none" cap="none" strike="noStrike">
               <a:solidFill>
-                <a:srgbClr val="000000"/>
-              </a:solidFill>
-              <a:latin typeface="Arial"/>
-              <a:ea typeface="Arial"/>
-              <a:cs typeface="Arial"/>
-              <a:sym typeface="Arial"/>
-            </a:endParaRPr>
-          </a:p>
-        </p:txBody>
-      </p:sp>
-      <p:sp>
-        <p:nvSpPr>
-          <p:cNvPr id="854" name="Google Shape;854;p39"/>
+                <a:schemeClr val="lt1"/>
+              </a:solidFill>
+              <a:latin typeface="Arial"/>
+              <a:ea typeface="Arial"/>
+              <a:cs typeface="Arial"/>
+              <a:sym typeface="Arial"/>
+            </a:endParaRPr>
+          </a:p>
+        </p:txBody>
+      </p:sp>
+      <p:sp>
+        <p:nvSpPr>
+          <p:cNvPr id="859" name="Google Shape;859;p39"/>
           <p:cNvSpPr txBox="1"/>
           <p:nvPr/>
         </p:nvSpPr>
         <p:spPr>
           <a:xfrm>
-            <a:off x="850000" y="1764078"/>
-            <a:ext cx="1749900" cy="191700"/>
+            <a:off x="867449" y="1764078"/>
+            <a:ext cx="2052300" cy="191700"/>
           </a:xfrm>
           <a:prstGeom prst="rect">
             <a:avLst/>
@@ -47616,7 +47903,7 @@
             <a:r>
               <a:rPr b="1" i="0" lang="en-US" sz="1300" u="none" cap="none" strike="noStrike">
                 <a:solidFill>
-                  <a:srgbClr val="E8A317"/>
+                  <a:schemeClr val="lt1"/>
                 </a:solidFill>
                 <a:latin typeface="Arial Black"/>
                 <a:ea typeface="Arial Black"/>
@@ -47627,26 +47914,26 @@
             </a:r>
             <a:endParaRPr b="0" i="0" sz="1400" u="none" cap="none" strike="noStrike">
               <a:solidFill>
-                <a:srgbClr val="000000"/>
-              </a:solidFill>
-              <a:latin typeface="Arial"/>
-              <a:ea typeface="Arial"/>
-              <a:cs typeface="Arial"/>
-              <a:sym typeface="Arial"/>
-            </a:endParaRPr>
-          </a:p>
-        </p:txBody>
-      </p:sp>
-      <p:sp>
-        <p:nvSpPr>
-          <p:cNvPr id="855" name="Google Shape;855;p39"/>
+                <a:schemeClr val="lt1"/>
+              </a:solidFill>
+              <a:latin typeface="Arial"/>
+              <a:ea typeface="Arial"/>
+              <a:cs typeface="Arial"/>
+              <a:sym typeface="Arial"/>
+            </a:endParaRPr>
+          </a:p>
+        </p:txBody>
+      </p:sp>
+      <p:sp>
+        <p:nvSpPr>
+          <p:cNvPr id="860" name="Google Shape;860;p39"/>
           <p:cNvSpPr txBox="1"/>
           <p:nvPr/>
         </p:nvSpPr>
         <p:spPr>
           <a:xfrm>
-            <a:off x="930000" y="2109546"/>
-            <a:ext cx="1650000" cy="1497000"/>
+            <a:off x="961279" y="2109546"/>
+            <a:ext cx="1935300" cy="1497000"/>
           </a:xfrm>
           <a:prstGeom prst="rect">
             <a:avLst/>
@@ -47865,14 +48152,14 @@
       </p:sp>
       <p:sp>
         <p:nvSpPr>
-          <p:cNvPr id="856" name="Google Shape;856;p39"/>
+          <p:cNvPr id="861" name="Google Shape;861;p39"/>
           <p:cNvSpPr/>
           <p:nvPr/>
         </p:nvSpPr>
         <p:spPr>
           <a:xfrm>
-            <a:off x="2820000" y="1702662"/>
-            <a:ext cx="1950000" cy="1919100"/>
+            <a:off x="3178014" y="1702662"/>
+            <a:ext cx="2287200" cy="1919100"/>
           </a:xfrm>
           <a:prstGeom prst="roundRect">
             <a:avLst>
@@ -47914,26 +48201,26 @@
             </a:r>
             <a:endParaRPr b="0" i="0" sz="1400" u="none" cap="none" strike="noStrike">
               <a:solidFill>
-                <a:srgbClr val="000000"/>
-              </a:solidFill>
-              <a:latin typeface="Arial"/>
-              <a:ea typeface="Arial"/>
-              <a:cs typeface="Arial"/>
-              <a:sym typeface="Arial"/>
-            </a:endParaRPr>
-          </a:p>
-        </p:txBody>
-      </p:sp>
-      <p:sp>
-        <p:nvSpPr>
-          <p:cNvPr id="857" name="Google Shape;857;p39"/>
+                <a:schemeClr val="lt1"/>
+              </a:solidFill>
+              <a:latin typeface="Arial"/>
+              <a:ea typeface="Arial"/>
+              <a:cs typeface="Arial"/>
+              <a:sym typeface="Arial"/>
+            </a:endParaRPr>
+          </a:p>
+        </p:txBody>
+      </p:sp>
+      <p:sp>
+        <p:nvSpPr>
+          <p:cNvPr id="862" name="Google Shape;862;p39"/>
           <p:cNvSpPr/>
           <p:nvPr/>
         </p:nvSpPr>
         <p:spPr>
           <a:xfrm>
-            <a:off x="2820000" y="1702662"/>
-            <a:ext cx="1950000" cy="306900"/>
+            <a:off x="3178014" y="1702662"/>
+            <a:ext cx="2287200" cy="306900"/>
           </a:xfrm>
           <a:prstGeom prst="rect">
             <a:avLst/>
@@ -47973,26 +48260,26 @@
             </a:r>
             <a:endParaRPr b="0" i="0" sz="1400" u="none" cap="none" strike="noStrike">
               <a:solidFill>
-                <a:srgbClr val="000000"/>
-              </a:solidFill>
-              <a:latin typeface="Arial"/>
-              <a:ea typeface="Arial"/>
-              <a:cs typeface="Arial"/>
-              <a:sym typeface="Arial"/>
-            </a:endParaRPr>
-          </a:p>
-        </p:txBody>
-      </p:sp>
-      <p:sp>
-        <p:nvSpPr>
-          <p:cNvPr id="858" name="Google Shape;858;p39"/>
+                <a:schemeClr val="lt1"/>
+              </a:solidFill>
+              <a:latin typeface="Arial"/>
+              <a:ea typeface="Arial"/>
+              <a:cs typeface="Arial"/>
+              <a:sym typeface="Arial"/>
+            </a:endParaRPr>
+          </a:p>
+        </p:txBody>
+      </p:sp>
+      <p:sp>
+        <p:nvSpPr>
+          <p:cNvPr id="863" name="Google Shape;863;p39"/>
           <p:cNvSpPr txBox="1"/>
           <p:nvPr/>
         </p:nvSpPr>
         <p:spPr>
           <a:xfrm>
-            <a:off x="2920000" y="1764078"/>
-            <a:ext cx="1749900" cy="191700"/>
+            <a:off x="3295302" y="1764078"/>
+            <a:ext cx="2052300" cy="191700"/>
           </a:xfrm>
           <a:prstGeom prst="rect">
             <a:avLst/>
@@ -48028,7 +48315,7 @@
             <a:r>
               <a:rPr b="1" i="0" lang="en-US" sz="1300" u="none" cap="none" strike="noStrike">
                 <a:solidFill>
-                  <a:srgbClr val="E8A317"/>
+                  <a:schemeClr val="lt1"/>
                 </a:solidFill>
                 <a:latin typeface="Arial Black"/>
                 <a:ea typeface="Arial Black"/>
@@ -48039,26 +48326,26 @@
             </a:r>
             <a:endParaRPr b="0" i="0" sz="1400" u="none" cap="none" strike="noStrike">
               <a:solidFill>
-                <a:srgbClr val="000000"/>
-              </a:solidFill>
-              <a:latin typeface="Arial"/>
-              <a:ea typeface="Arial"/>
-              <a:cs typeface="Arial"/>
-              <a:sym typeface="Arial"/>
-            </a:endParaRPr>
-          </a:p>
-        </p:txBody>
-      </p:sp>
-      <p:sp>
-        <p:nvSpPr>
-          <p:cNvPr id="859" name="Google Shape;859;p39"/>
+                <a:schemeClr val="lt1"/>
+              </a:solidFill>
+              <a:latin typeface="Arial"/>
+              <a:ea typeface="Arial"/>
+              <a:cs typeface="Arial"/>
+              <a:sym typeface="Arial"/>
+            </a:endParaRPr>
+          </a:p>
+        </p:txBody>
+      </p:sp>
+      <p:sp>
+        <p:nvSpPr>
+          <p:cNvPr id="864" name="Google Shape;864;p39"/>
           <p:cNvSpPr txBox="1"/>
           <p:nvPr/>
         </p:nvSpPr>
         <p:spPr>
           <a:xfrm>
-            <a:off x="3000000" y="2109546"/>
-            <a:ext cx="1650000" cy="1497000"/>
+            <a:off x="3389132" y="2109546"/>
+            <a:ext cx="1935300" cy="1497000"/>
           </a:xfrm>
           <a:prstGeom prst="rect">
             <a:avLst/>
@@ -48197,14 +48484,14 @@
       </p:sp>
       <p:sp>
         <p:nvSpPr>
-          <p:cNvPr id="860" name="Google Shape;860;p39"/>
+          <p:cNvPr id="865" name="Google Shape;865;p39"/>
           <p:cNvSpPr/>
           <p:nvPr/>
         </p:nvSpPr>
         <p:spPr>
           <a:xfrm>
-            <a:off x="4890000" y="1702662"/>
-            <a:ext cx="1950000" cy="1919100"/>
+            <a:off x="5605867" y="1702662"/>
+            <a:ext cx="2287200" cy="1919100"/>
           </a:xfrm>
           <a:prstGeom prst="roundRect">
             <a:avLst>
@@ -48246,26 +48533,26 @@
             </a:r>
             <a:endParaRPr b="0" i="0" sz="1400" u="none" cap="none" strike="noStrike">
               <a:solidFill>
-                <a:srgbClr val="000000"/>
-              </a:solidFill>
-              <a:latin typeface="Arial"/>
-              <a:ea typeface="Arial"/>
-              <a:cs typeface="Arial"/>
-              <a:sym typeface="Arial"/>
-            </a:endParaRPr>
-          </a:p>
-        </p:txBody>
-      </p:sp>
-      <p:sp>
-        <p:nvSpPr>
-          <p:cNvPr id="861" name="Google Shape;861;p39"/>
+                <a:schemeClr val="lt1"/>
+              </a:solidFill>
+              <a:latin typeface="Arial"/>
+              <a:ea typeface="Arial"/>
+              <a:cs typeface="Arial"/>
+              <a:sym typeface="Arial"/>
+            </a:endParaRPr>
+          </a:p>
+        </p:txBody>
+      </p:sp>
+      <p:sp>
+        <p:nvSpPr>
+          <p:cNvPr id="866" name="Google Shape;866;p39"/>
           <p:cNvSpPr/>
           <p:nvPr/>
         </p:nvSpPr>
         <p:spPr>
           <a:xfrm>
-            <a:off x="4890000" y="1702662"/>
-            <a:ext cx="1950000" cy="306900"/>
+            <a:off x="5605867" y="1702662"/>
+            <a:ext cx="2287200" cy="306900"/>
           </a:xfrm>
           <a:prstGeom prst="rect">
             <a:avLst/>
@@ -48305,26 +48592,26 @@
             </a:r>
             <a:endParaRPr b="0" i="0" sz="1400" u="none" cap="none" strike="noStrike">
               <a:solidFill>
-                <a:srgbClr val="000000"/>
-              </a:solidFill>
-              <a:latin typeface="Arial"/>
-              <a:ea typeface="Arial"/>
-              <a:cs typeface="Arial"/>
-              <a:sym typeface="Arial"/>
-            </a:endParaRPr>
-          </a:p>
-        </p:txBody>
-      </p:sp>
-      <p:sp>
-        <p:nvSpPr>
-          <p:cNvPr id="862" name="Google Shape;862;p39"/>
+                <a:schemeClr val="lt1"/>
+              </a:solidFill>
+              <a:latin typeface="Arial"/>
+              <a:ea typeface="Arial"/>
+              <a:cs typeface="Arial"/>
+              <a:sym typeface="Arial"/>
+            </a:endParaRPr>
+          </a:p>
+        </p:txBody>
+      </p:sp>
+      <p:sp>
+        <p:nvSpPr>
+          <p:cNvPr id="867" name="Google Shape;867;p39"/>
           <p:cNvSpPr txBox="1"/>
           <p:nvPr/>
         </p:nvSpPr>
         <p:spPr>
           <a:xfrm>
-            <a:off x="4990000" y="1764078"/>
-            <a:ext cx="1749900" cy="191700"/>
+            <a:off x="5723154" y="1764078"/>
+            <a:ext cx="2052300" cy="191700"/>
           </a:xfrm>
           <a:prstGeom prst="rect">
             <a:avLst/>
@@ -48360,7 +48647,7 @@
             <a:r>
               <a:rPr b="1" i="0" lang="en-US" sz="1300" u="none" cap="none" strike="noStrike">
                 <a:solidFill>
-                  <a:srgbClr val="E8A317"/>
+                  <a:schemeClr val="lt1"/>
                 </a:solidFill>
                 <a:latin typeface="Arial Black"/>
                 <a:ea typeface="Arial Black"/>
@@ -48371,26 +48658,26 @@
             </a:r>
             <a:endParaRPr b="0" i="0" sz="1400" u="none" cap="none" strike="noStrike">
               <a:solidFill>
-                <a:srgbClr val="000000"/>
-              </a:solidFill>
-              <a:latin typeface="Arial"/>
-              <a:ea typeface="Arial"/>
-              <a:cs typeface="Arial"/>
-              <a:sym typeface="Arial"/>
-            </a:endParaRPr>
-          </a:p>
-        </p:txBody>
-      </p:sp>
-      <p:sp>
-        <p:nvSpPr>
-          <p:cNvPr id="863" name="Google Shape;863;p39"/>
+                <a:schemeClr val="lt1"/>
+              </a:solidFill>
+              <a:latin typeface="Arial"/>
+              <a:ea typeface="Arial"/>
+              <a:cs typeface="Arial"/>
+              <a:sym typeface="Arial"/>
+            </a:endParaRPr>
+          </a:p>
+        </p:txBody>
+      </p:sp>
+      <p:sp>
+        <p:nvSpPr>
+          <p:cNvPr id="868" name="Google Shape;868;p39"/>
           <p:cNvSpPr txBox="1"/>
           <p:nvPr/>
         </p:nvSpPr>
         <p:spPr>
           <a:xfrm>
-            <a:off x="5070000" y="2109546"/>
-            <a:ext cx="1650000" cy="1497000"/>
+            <a:off x="5816984" y="2109546"/>
+            <a:ext cx="1935300" cy="1497000"/>
           </a:xfrm>
           <a:prstGeom prst="rect">
             <a:avLst/>
@@ -48569,14 +48856,14 @@
       </p:sp>
       <p:sp>
         <p:nvSpPr>
-          <p:cNvPr id="864" name="Google Shape;864;p39"/>
+          <p:cNvPr id="869" name="Google Shape;869;p39"/>
           <p:cNvSpPr/>
           <p:nvPr/>
         </p:nvSpPr>
         <p:spPr>
           <a:xfrm>
-            <a:off x="750000" y="4078050"/>
-            <a:ext cx="5949900" cy="399900"/>
+            <a:off x="750150" y="4078050"/>
+            <a:ext cx="7143000" cy="399900"/>
           </a:xfrm>
           <a:prstGeom prst="roundRect">
             <a:avLst>
@@ -48630,14 +48917,14 @@
       </p:sp>
       <p:sp>
         <p:nvSpPr>
-          <p:cNvPr id="865" name="Google Shape;865;p39"/>
+          <p:cNvPr id="870" name="Google Shape;870;p39"/>
           <p:cNvSpPr txBox="1"/>
           <p:nvPr/>
         </p:nvSpPr>
         <p:spPr>
           <a:xfrm>
-            <a:off x="900000" y="4108050"/>
-            <a:ext cx="5649900" cy="339900"/>
+            <a:off x="930224" y="4108050"/>
+            <a:ext cx="6782700" cy="339900"/>
           </a:xfrm>
           <a:prstGeom prst="rect">
             <a:avLst/>
@@ -48696,14 +48983,14 @@
       </p:sp>
       <p:sp>
         <p:nvSpPr>
-          <p:cNvPr id="866" name="Google Shape;866;p39"/>
+          <p:cNvPr id="871" name="Google Shape;871;p39"/>
           <p:cNvSpPr/>
           <p:nvPr/>
         </p:nvSpPr>
         <p:spPr>
           <a:xfrm>
-            <a:off x="750005" y="905100"/>
-            <a:ext cx="1500000" cy="54900"/>
+            <a:off x="749024" y="953307"/>
+            <a:ext cx="2085900" cy="54300"/>
           </a:xfrm>
           <a:prstGeom prst="rect">
             <a:avLst/>
@@ -48778,7 +49065,7 @@
     </p:bg>
     <p:spTree>
       <p:nvGrpSpPr>
-        <p:cNvPr id="870" name="Shape 870"/>
+        <p:cNvPr id="875" name="Shape 875"/>
         <p:cNvGrpSpPr/>
         <p:nvPr/>
       </p:nvGrpSpPr>
@@ -48792,14 +49079,14 @@
       </p:grpSpPr>
       <p:sp>
         <p:nvSpPr>
-          <p:cNvPr id="871" name="Google Shape;871;p41"/>
+          <p:cNvPr id="876" name="Google Shape;876;p41"/>
           <p:cNvSpPr txBox="1"/>
           <p:nvPr/>
         </p:nvSpPr>
         <p:spPr>
           <a:xfrm>
             <a:off x="750000" y="500000"/>
-            <a:ext cx="5950000" cy="900000"/>
+            <a:ext cx="7150200" cy="900000"/>
           </a:xfrm>
           <a:prstGeom prst="rect">
             <a:avLst/>
@@ -48858,14 +49145,14 @@
       </p:sp>
       <p:sp>
         <p:nvSpPr>
-          <p:cNvPr id="872" name="Google Shape;872;p41"/>
+          <p:cNvPr id="877" name="Google Shape;877;p41"/>
           <p:cNvSpPr txBox="1"/>
           <p:nvPr/>
         </p:nvSpPr>
         <p:spPr>
           <a:xfrm>
             <a:off x="750000" y="1330000"/>
-            <a:ext cx="5950000" cy="400000"/>
+            <a:ext cx="7150200" cy="399900"/>
           </a:xfrm>
           <a:prstGeom prst="rect">
             <a:avLst/>
@@ -48924,14 +49211,14 @@
       </p:sp>
       <p:sp>
         <p:nvSpPr>
-          <p:cNvPr id="873" name="Google Shape;873;p41"/>
+          <p:cNvPr id="878" name="Google Shape;878;p41"/>
           <p:cNvSpPr/>
           <p:nvPr/>
         </p:nvSpPr>
         <p:spPr>
           <a:xfrm>
             <a:off x="750000" y="1750000"/>
-            <a:ext cx="500000" cy="500000"/>
+            <a:ext cx="600900" cy="500100"/>
           </a:xfrm>
           <a:prstGeom prst="ellipse">
             <a:avLst/>
@@ -48992,14 +49279,14 @@
       </p:sp>
       <p:sp>
         <p:nvSpPr>
-          <p:cNvPr id="874" name="Google Shape;874;p41"/>
+          <p:cNvPr id="879" name="Google Shape;879;p41"/>
           <p:cNvSpPr txBox="1"/>
           <p:nvPr/>
         </p:nvSpPr>
         <p:spPr>
           <a:xfrm>
-            <a:off x="1350000" y="1810000"/>
-            <a:ext cx="5300000" cy="450000"/>
+            <a:off x="1471034" y="1810000"/>
+            <a:ext cx="6369000" cy="450000"/>
           </a:xfrm>
           <a:prstGeom prst="rect">
             <a:avLst/>
@@ -49058,14 +49345,14 @@
       </p:sp>
       <p:sp>
         <p:nvSpPr>
-          <p:cNvPr id="875" name="Google Shape;875;p41"/>
+          <p:cNvPr id="880" name="Google Shape;880;p41"/>
           <p:cNvSpPr/>
           <p:nvPr/>
         </p:nvSpPr>
         <p:spPr>
           <a:xfrm>
             <a:off x="750000" y="2320000"/>
-            <a:ext cx="500000" cy="500000"/>
+            <a:ext cx="600900" cy="500100"/>
           </a:xfrm>
           <a:prstGeom prst="ellipse">
             <a:avLst/>
@@ -49126,14 +49413,14 @@
       </p:sp>
       <p:sp>
         <p:nvSpPr>
-          <p:cNvPr id="876" name="Google Shape;876;p41"/>
+          <p:cNvPr id="881" name="Google Shape;881;p41"/>
           <p:cNvSpPr txBox="1"/>
           <p:nvPr/>
         </p:nvSpPr>
         <p:spPr>
           <a:xfrm>
-            <a:off x="1350000" y="2380000"/>
-            <a:ext cx="5300000" cy="450000"/>
+            <a:off x="1471034" y="2380000"/>
+            <a:ext cx="6369000" cy="450000"/>
           </a:xfrm>
           <a:prstGeom prst="rect">
             <a:avLst/>
@@ -49192,14 +49479,14 @@
       </p:sp>
       <p:sp>
         <p:nvSpPr>
-          <p:cNvPr id="877" name="Google Shape;877;p41"/>
+          <p:cNvPr id="882" name="Google Shape;882;p41"/>
           <p:cNvSpPr/>
           <p:nvPr/>
         </p:nvSpPr>
         <p:spPr>
           <a:xfrm>
             <a:off x="750000" y="2890000"/>
-            <a:ext cx="500000" cy="500000"/>
+            <a:ext cx="600900" cy="500100"/>
           </a:xfrm>
           <a:prstGeom prst="ellipse">
             <a:avLst/>
@@ -49260,14 +49547,14 @@
       </p:sp>
       <p:sp>
         <p:nvSpPr>
-          <p:cNvPr id="878" name="Google Shape;878;p41"/>
+          <p:cNvPr id="883" name="Google Shape;883;p41"/>
           <p:cNvSpPr txBox="1"/>
           <p:nvPr/>
         </p:nvSpPr>
         <p:spPr>
           <a:xfrm>
-            <a:off x="1350000" y="2950000"/>
-            <a:ext cx="5300000" cy="450000"/>
+            <a:off x="1471034" y="2950000"/>
+            <a:ext cx="6369000" cy="450000"/>
           </a:xfrm>
           <a:prstGeom prst="rect">
             <a:avLst/>
@@ -49326,14 +49613,14 @@
       </p:sp>
       <p:sp>
         <p:nvSpPr>
-          <p:cNvPr id="879" name="Google Shape;879;p41"/>
+          <p:cNvPr id="884" name="Google Shape;884;p41"/>
           <p:cNvSpPr/>
           <p:nvPr/>
         </p:nvSpPr>
         <p:spPr>
           <a:xfrm>
             <a:off x="750000" y="3460000"/>
-            <a:ext cx="500000" cy="500000"/>
+            <a:ext cx="600900" cy="500100"/>
           </a:xfrm>
           <a:prstGeom prst="ellipse">
             <a:avLst/>
@@ -49394,14 +49681,14 @@
       </p:sp>
       <p:sp>
         <p:nvSpPr>
-          <p:cNvPr id="880" name="Google Shape;880;p41"/>
+          <p:cNvPr id="885" name="Google Shape;885;p41"/>
           <p:cNvSpPr txBox="1"/>
           <p:nvPr/>
         </p:nvSpPr>
         <p:spPr>
           <a:xfrm>
-            <a:off x="1350000" y="3520000"/>
-            <a:ext cx="5300000" cy="450000"/>
+            <a:off x="1471034" y="3520000"/>
+            <a:ext cx="6369000" cy="450000"/>
           </a:xfrm>
           <a:prstGeom prst="rect">
             <a:avLst/>
@@ -49460,14 +49747,14 @@
       </p:sp>
       <p:sp>
         <p:nvSpPr>
-          <p:cNvPr id="881" name="Google Shape;881;p41"/>
+          <p:cNvPr id="886" name="Google Shape;886;p41"/>
           <p:cNvSpPr/>
           <p:nvPr/>
         </p:nvSpPr>
         <p:spPr>
           <a:xfrm>
             <a:off x="750000" y="4030000"/>
-            <a:ext cx="500000" cy="500000"/>
+            <a:ext cx="600900" cy="500100"/>
           </a:xfrm>
           <a:prstGeom prst="ellipse">
             <a:avLst/>
@@ -49528,14 +49815,14 @@
       </p:sp>
       <p:sp>
         <p:nvSpPr>
-          <p:cNvPr id="882" name="Google Shape;882;p41"/>
+          <p:cNvPr id="887" name="Google Shape;887;p41"/>
           <p:cNvSpPr txBox="1"/>
           <p:nvPr/>
         </p:nvSpPr>
         <p:spPr>
           <a:xfrm>
-            <a:off x="1350000" y="4090000"/>
-            <a:ext cx="5300000" cy="450000"/>
+            <a:off x="1471034" y="4090000"/>
+            <a:ext cx="6369000" cy="450000"/>
           </a:xfrm>
           <a:prstGeom prst="rect">
             <a:avLst/>
@@ -49594,14 +49881,14 @@
       </p:sp>
       <p:sp>
         <p:nvSpPr>
-          <p:cNvPr id="883" name="Google Shape;883;p41"/>
+          <p:cNvPr id="888" name="Google Shape;888;p41"/>
           <p:cNvSpPr/>
           <p:nvPr/>
         </p:nvSpPr>
         <p:spPr>
           <a:xfrm>
-            <a:off x="750005" y="905100"/>
-            <a:ext cx="1500000" cy="54900"/>
+            <a:off x="750006" y="905100"/>
+            <a:ext cx="1802700" cy="54900"/>
           </a:xfrm>
           <a:prstGeom prst="rect">
             <a:avLst/>
@@ -49676,7 +49963,7 @@
     </p:bg>
     <p:spTree>
       <p:nvGrpSpPr>
-        <p:cNvPr id="887" name="Shape 887"/>
+        <p:cNvPr id="892" name="Shape 892"/>
         <p:cNvGrpSpPr/>
         <p:nvPr/>
       </p:nvGrpSpPr>
@@ -49690,14 +49977,14 @@
       </p:grpSpPr>
       <p:sp>
         <p:nvSpPr>
-          <p:cNvPr id="888" name="Google Shape;888;p42"/>
+          <p:cNvPr id="893" name="Google Shape;893;p42"/>
           <p:cNvSpPr txBox="1"/>
           <p:nvPr/>
         </p:nvSpPr>
         <p:spPr>
           <a:xfrm>
             <a:off x="750000" y="500000"/>
-            <a:ext cx="5950000" cy="900000"/>
+            <a:ext cx="7135500" cy="900000"/>
           </a:xfrm>
           <a:prstGeom prst="rect">
             <a:avLst/>
@@ -49756,14 +50043,14 @@
       </p:sp>
       <p:sp>
         <p:nvSpPr>
-          <p:cNvPr id="889" name="Google Shape;889;p42"/>
+          <p:cNvPr id="894" name="Google Shape;894;p42"/>
           <p:cNvSpPr txBox="1"/>
           <p:nvPr/>
         </p:nvSpPr>
         <p:spPr>
           <a:xfrm>
             <a:off x="750000" y="1330000"/>
-            <a:ext cx="5950000" cy="400000"/>
+            <a:ext cx="6552900" cy="399900"/>
           </a:xfrm>
           <a:prstGeom prst="rect">
             <a:avLst/>
@@ -49822,14 +50109,14 @@
       </p:sp>
       <p:sp>
         <p:nvSpPr>
-          <p:cNvPr id="890" name="Google Shape;890;p42"/>
+          <p:cNvPr id="895" name="Google Shape;895;p42"/>
           <p:cNvSpPr txBox="1"/>
           <p:nvPr/>
         </p:nvSpPr>
         <p:spPr>
           <a:xfrm>
             <a:off x="750000" y="1585100"/>
-            <a:ext cx="1500000" cy="594900"/>
+            <a:ext cx="1652100" cy="594900"/>
           </a:xfrm>
           <a:prstGeom prst="rect">
             <a:avLst/>
@@ -49888,14 +50175,14 @@
       </p:sp>
       <p:sp>
         <p:nvSpPr>
-          <p:cNvPr id="891" name="Google Shape;891;p42"/>
+          <p:cNvPr id="896" name="Google Shape;896;p42"/>
           <p:cNvSpPr txBox="1"/>
           <p:nvPr/>
         </p:nvSpPr>
         <p:spPr>
           <a:xfrm>
-            <a:off x="2200000" y="1780000"/>
-            <a:ext cx="4500000" cy="400000"/>
+            <a:off x="2346910" y="1780000"/>
+            <a:ext cx="4956000" cy="399900"/>
           </a:xfrm>
           <a:prstGeom prst="rect">
             <a:avLst/>
@@ -49954,14 +50241,14 @@
       </p:sp>
       <p:sp>
         <p:nvSpPr>
-          <p:cNvPr id="892" name="Google Shape;892;p42"/>
+          <p:cNvPr id="897" name="Google Shape;897;p42"/>
           <p:cNvSpPr txBox="1"/>
           <p:nvPr/>
         </p:nvSpPr>
         <p:spPr>
           <a:xfrm>
-            <a:off x="2200000" y="2100000"/>
-            <a:ext cx="4500000" cy="399900"/>
+            <a:off x="2346910" y="2100000"/>
+            <a:ext cx="4956000" cy="399900"/>
           </a:xfrm>
           <a:prstGeom prst="rect">
             <a:avLst/>
@@ -50020,14 +50307,14 @@
       </p:sp>
       <p:sp>
         <p:nvSpPr>
-          <p:cNvPr id="893" name="Google Shape;893;p42"/>
+          <p:cNvPr id="898" name="Google Shape;898;p42"/>
           <p:cNvSpPr/>
           <p:nvPr/>
         </p:nvSpPr>
         <p:spPr>
           <a:xfrm>
-            <a:off x="790000" y="2650000"/>
-            <a:ext cx="197700" cy="180000"/>
+            <a:off x="794053" y="2650000"/>
+            <a:ext cx="217800" cy="180000"/>
           </a:xfrm>
           <a:prstGeom prst="ellipse">
             <a:avLst/>
@@ -50079,14 +50366,14 @@
       </p:sp>
       <p:sp>
         <p:nvSpPr>
-          <p:cNvPr id="894" name="Google Shape;894;p42"/>
+          <p:cNvPr id="899" name="Google Shape;899;p42"/>
           <p:cNvSpPr txBox="1"/>
           <p:nvPr/>
         </p:nvSpPr>
         <p:spPr>
           <a:xfrm>
-            <a:off x="1075695" y="2600000"/>
-            <a:ext cx="2637300" cy="300000"/>
+            <a:off x="1108694" y="2600000"/>
+            <a:ext cx="2904600" cy="300000"/>
           </a:xfrm>
           <a:prstGeom prst="rect">
             <a:avLst/>
@@ -50145,14 +50432,14 @@
       </p:sp>
       <p:sp>
         <p:nvSpPr>
-          <p:cNvPr id="895" name="Google Shape;895;p42"/>
+          <p:cNvPr id="900" name="Google Shape;900;p42"/>
           <p:cNvSpPr txBox="1"/>
           <p:nvPr/>
         </p:nvSpPr>
         <p:spPr>
           <a:xfrm>
-            <a:off x="3822762" y="2600000"/>
-            <a:ext cx="3406500" cy="300000"/>
+            <a:off x="4134087" y="2600000"/>
+            <a:ext cx="3751500" cy="300000"/>
           </a:xfrm>
           <a:prstGeom prst="rect">
             <a:avLst/>
@@ -50211,14 +50498,14 @@
       </p:sp>
       <p:sp>
         <p:nvSpPr>
-          <p:cNvPr id="896" name="Google Shape;896;p42"/>
+          <p:cNvPr id="901" name="Google Shape;901;p42"/>
           <p:cNvSpPr/>
           <p:nvPr/>
         </p:nvSpPr>
         <p:spPr>
           <a:xfrm>
-            <a:off x="790000" y="3080000"/>
-            <a:ext cx="197700" cy="180000"/>
+            <a:off x="794053" y="3080000"/>
+            <a:ext cx="217800" cy="180000"/>
           </a:xfrm>
           <a:prstGeom prst="ellipse">
             <a:avLst/>
@@ -50270,14 +50557,14 @@
       </p:sp>
       <p:sp>
         <p:nvSpPr>
-          <p:cNvPr id="897" name="Google Shape;897;p42"/>
+          <p:cNvPr id="902" name="Google Shape;902;p42"/>
           <p:cNvSpPr txBox="1"/>
           <p:nvPr/>
         </p:nvSpPr>
         <p:spPr>
           <a:xfrm>
-            <a:off x="1075695" y="3030000"/>
-            <a:ext cx="2637300" cy="300000"/>
+            <a:off x="1108694" y="3030000"/>
+            <a:ext cx="2904600" cy="300000"/>
           </a:xfrm>
           <a:prstGeom prst="rect">
             <a:avLst/>
@@ -50336,14 +50623,14 @@
       </p:sp>
       <p:sp>
         <p:nvSpPr>
-          <p:cNvPr id="898" name="Google Shape;898;p42"/>
+          <p:cNvPr id="903" name="Google Shape;903;p42"/>
           <p:cNvSpPr txBox="1"/>
           <p:nvPr/>
         </p:nvSpPr>
         <p:spPr>
           <a:xfrm>
-            <a:off x="3822762" y="3030000"/>
-            <a:ext cx="3406500" cy="300000"/>
+            <a:off x="4134087" y="3030000"/>
+            <a:ext cx="3751500" cy="300000"/>
           </a:xfrm>
           <a:prstGeom prst="rect">
             <a:avLst/>
@@ -50402,14 +50689,14 @@
       </p:sp>
       <p:sp>
         <p:nvSpPr>
-          <p:cNvPr id="899" name="Google Shape;899;p42"/>
+          <p:cNvPr id="904" name="Google Shape;904;p42"/>
           <p:cNvSpPr/>
           <p:nvPr/>
         </p:nvSpPr>
         <p:spPr>
           <a:xfrm>
-            <a:off x="790000" y="3510000"/>
-            <a:ext cx="197700" cy="180000"/>
+            <a:off x="794053" y="3510000"/>
+            <a:ext cx="217800" cy="180000"/>
           </a:xfrm>
           <a:prstGeom prst="ellipse">
             <a:avLst/>
@@ -50461,14 +50748,14 @@
       </p:sp>
       <p:sp>
         <p:nvSpPr>
-          <p:cNvPr id="900" name="Google Shape;900;p42"/>
+          <p:cNvPr id="905" name="Google Shape;905;p42"/>
           <p:cNvSpPr txBox="1"/>
           <p:nvPr/>
         </p:nvSpPr>
         <p:spPr>
           <a:xfrm>
-            <a:off x="1075695" y="3460000"/>
-            <a:ext cx="2637300" cy="300000"/>
+            <a:off x="1108694" y="3460000"/>
+            <a:ext cx="2904600" cy="300000"/>
           </a:xfrm>
           <a:prstGeom prst="rect">
             <a:avLst/>
@@ -50527,14 +50814,14 @@
       </p:sp>
       <p:sp>
         <p:nvSpPr>
-          <p:cNvPr id="901" name="Google Shape;901;p42"/>
+          <p:cNvPr id="906" name="Google Shape;906;p42"/>
           <p:cNvSpPr txBox="1"/>
           <p:nvPr/>
         </p:nvSpPr>
         <p:spPr>
           <a:xfrm>
-            <a:off x="3822762" y="3460000"/>
-            <a:ext cx="3406500" cy="300000"/>
+            <a:off x="4134087" y="3460000"/>
+            <a:ext cx="3751500" cy="300000"/>
           </a:xfrm>
           <a:prstGeom prst="rect">
             <a:avLst/>
@@ -50593,14 +50880,14 @@
       </p:sp>
       <p:sp>
         <p:nvSpPr>
-          <p:cNvPr id="902" name="Google Shape;902;p42"/>
+          <p:cNvPr id="907" name="Google Shape;907;p42"/>
           <p:cNvSpPr/>
           <p:nvPr/>
         </p:nvSpPr>
         <p:spPr>
           <a:xfrm>
-            <a:off x="790000" y="3940000"/>
-            <a:ext cx="197700" cy="180000"/>
+            <a:off x="794053" y="3940000"/>
+            <a:ext cx="217800" cy="180000"/>
           </a:xfrm>
           <a:prstGeom prst="ellipse">
             <a:avLst/>
@@ -50652,14 +50939,14 @@
       </p:sp>
       <p:sp>
         <p:nvSpPr>
-          <p:cNvPr id="903" name="Google Shape;903;p42"/>
+          <p:cNvPr id="908" name="Google Shape;908;p42"/>
           <p:cNvSpPr txBox="1"/>
           <p:nvPr/>
         </p:nvSpPr>
         <p:spPr>
           <a:xfrm>
-            <a:off x="1075695" y="3890000"/>
-            <a:ext cx="2637300" cy="300000"/>
+            <a:off x="1108694" y="3890000"/>
+            <a:ext cx="2904600" cy="300000"/>
           </a:xfrm>
           <a:prstGeom prst="rect">
             <a:avLst/>
@@ -50718,14 +51005,14 @@
       </p:sp>
       <p:sp>
         <p:nvSpPr>
-          <p:cNvPr id="904" name="Google Shape;904;p42"/>
+          <p:cNvPr id="909" name="Google Shape;909;p42"/>
           <p:cNvSpPr txBox="1"/>
           <p:nvPr/>
         </p:nvSpPr>
         <p:spPr>
           <a:xfrm>
-            <a:off x="3822762" y="3890000"/>
-            <a:ext cx="3406500" cy="300000"/>
+            <a:off x="4134087" y="3890000"/>
+            <a:ext cx="3751500" cy="300000"/>
           </a:xfrm>
           <a:prstGeom prst="rect">
             <a:avLst/>
@@ -50784,14 +51071,14 @@
       </p:sp>
       <p:sp>
         <p:nvSpPr>
-          <p:cNvPr id="905" name="Google Shape;905;p42"/>
+          <p:cNvPr id="910" name="Google Shape;910;p42"/>
           <p:cNvSpPr/>
           <p:nvPr/>
         </p:nvSpPr>
         <p:spPr>
           <a:xfrm>
-            <a:off x="750005" y="905100"/>
-            <a:ext cx="1500000" cy="54900"/>
+            <a:off x="749030" y="953307"/>
+            <a:ext cx="1778400" cy="54300"/>
           </a:xfrm>
           <a:prstGeom prst="rect">
             <a:avLst/>
@@ -50866,7 +51153,7 @@
     </p:bg>
     <p:spTree>
       <p:nvGrpSpPr>
-        <p:cNvPr id="909" name="Shape 909"/>
+        <p:cNvPr id="914" name="Shape 914"/>
         <p:cNvGrpSpPr/>
         <p:nvPr/>
       </p:nvGrpSpPr>
@@ -50880,14 +51167,14 @@
       </p:grpSpPr>
       <p:sp>
         <p:nvSpPr>
-          <p:cNvPr id="910" name="Google Shape;910;p43"/>
+          <p:cNvPr id="915" name="Google Shape;915;p43"/>
           <p:cNvSpPr txBox="1"/>
           <p:nvPr/>
         </p:nvSpPr>
         <p:spPr>
           <a:xfrm>
             <a:off x="750000" y="500000"/>
-            <a:ext cx="5950000" cy="900000"/>
+            <a:ext cx="7143000" cy="900000"/>
           </a:xfrm>
           <a:prstGeom prst="rect">
             <a:avLst/>
@@ -50946,14 +51233,14 @@
       </p:sp>
       <p:sp>
         <p:nvSpPr>
-          <p:cNvPr id="911" name="Google Shape;911;p43"/>
+          <p:cNvPr id="916" name="Google Shape;916;p43"/>
           <p:cNvSpPr txBox="1"/>
           <p:nvPr/>
         </p:nvSpPr>
         <p:spPr>
           <a:xfrm>
             <a:off x="750000" y="1330000"/>
-            <a:ext cx="5950000" cy="400000"/>
+            <a:ext cx="7143000" cy="399900"/>
           </a:xfrm>
           <a:prstGeom prst="rect">
             <a:avLst/>
@@ -51012,14 +51299,14 @@
       </p:sp>
       <p:sp>
         <p:nvSpPr>
-          <p:cNvPr id="912" name="Google Shape;912;p43"/>
+          <p:cNvPr id="917" name="Google Shape;917;p43"/>
           <p:cNvSpPr txBox="1"/>
           <p:nvPr/>
         </p:nvSpPr>
         <p:spPr>
           <a:xfrm>
             <a:off x="750000" y="1780000"/>
-            <a:ext cx="7025100" cy="2799900"/>
+            <a:ext cx="7143000" cy="2799900"/>
           </a:xfrm>
           <a:prstGeom prst="rect">
             <a:avLst/>
@@ -51238,14 +51525,14 @@
       </p:sp>
       <p:sp>
         <p:nvSpPr>
-          <p:cNvPr id="913" name="Google Shape;913;p43"/>
+          <p:cNvPr id="918" name="Google Shape;918;p43"/>
           <p:cNvSpPr txBox="1"/>
           <p:nvPr/>
         </p:nvSpPr>
         <p:spPr>
           <a:xfrm>
             <a:off x="750000" y="4300000"/>
-            <a:ext cx="5950000" cy="300000"/>
+            <a:ext cx="6049800" cy="300000"/>
           </a:xfrm>
           <a:prstGeom prst="rect">
             <a:avLst/>
@@ -51304,14 +51591,14 @@
       </p:sp>
       <p:sp>
         <p:nvSpPr>
-          <p:cNvPr id="914" name="Google Shape;914;p43"/>
+          <p:cNvPr id="919" name="Google Shape;919;p43"/>
           <p:cNvSpPr/>
           <p:nvPr/>
         </p:nvSpPr>
         <p:spPr>
           <a:xfrm>
             <a:off x="750005" y="905100"/>
-            <a:ext cx="1500000" cy="54900"/>
+            <a:ext cx="1525200" cy="54900"/>
           </a:xfrm>
           <a:prstGeom prst="rect">
             <a:avLst/>
@@ -51386,7 +51673,7 @@
     </p:bg>
     <p:spTree>
       <p:nvGrpSpPr>
-        <p:cNvPr id="919" name="Shape 919"/>
+        <p:cNvPr id="924" name="Shape 924"/>
         <p:cNvGrpSpPr/>
         <p:nvPr/>
       </p:nvGrpSpPr>
@@ -51400,7 +51687,7 @@
       </p:grpSpPr>
       <p:sp>
         <p:nvSpPr>
-          <p:cNvPr id="920" name="Google Shape;920;g3d94641431f_0_127"/>
+          <p:cNvPr id="925" name="Google Shape;925;g3d94641431f_0_127"/>
           <p:cNvSpPr/>
           <p:nvPr/>
         </p:nvSpPr>
@@ -51466,7 +51753,7 @@
       </p:sp>
       <p:sp>
         <p:nvSpPr>
-          <p:cNvPr id="921" name="Google Shape;921;g3d94641431f_0_127"/>
+          <p:cNvPr id="926" name="Google Shape;926;g3d94641431f_0_127"/>
           <p:cNvSpPr/>
           <p:nvPr/>
         </p:nvSpPr>
@@ -51525,7 +51812,7 @@
       </p:sp>
       <p:sp>
         <p:nvSpPr>
-          <p:cNvPr id="922" name="Google Shape;922;g3d94641431f_0_127"/>
+          <p:cNvPr id="927" name="Google Shape;927;g3d94641431f_0_127"/>
           <p:cNvSpPr/>
           <p:nvPr/>
         </p:nvSpPr>
@@ -51591,7 +51878,7 @@
       </p:sp>
       <p:sp>
         <p:nvSpPr>
-          <p:cNvPr id="923" name="Google Shape;923;g3d94641431f_0_127"/>
+          <p:cNvPr id="928" name="Google Shape;928;g3d94641431f_0_127"/>
           <p:cNvSpPr txBox="1"/>
           <p:nvPr/>
         </p:nvSpPr>
@@ -51701,7 +51988,7 @@
         <p:spPr>
           <a:xfrm>
             <a:off x="750000" y="500000"/>
-            <a:ext cx="5950000" cy="900000"/>
+            <a:ext cx="6201900" cy="900000"/>
           </a:xfrm>
           <a:prstGeom prst="rect">
             <a:avLst/>
@@ -51767,7 +52054,7 @@
         <p:spPr>
           <a:xfrm>
             <a:off x="750000" y="1330000"/>
-            <a:ext cx="5950000" cy="400000"/>
+            <a:ext cx="6201900" cy="399900"/>
           </a:xfrm>
           <a:prstGeom prst="rect">
             <a:avLst/>
@@ -51833,7 +52120,7 @@
         <p:spPr>
           <a:xfrm>
             <a:off x="750000" y="1730000"/>
-            <a:ext cx="5950000" cy="340000"/>
+            <a:ext cx="6201900" cy="339900"/>
           </a:xfrm>
           <a:prstGeom prst="rect">
             <a:avLst/>
@@ -51899,7 +52186,7 @@
         <p:spPr>
           <a:xfrm>
             <a:off x="750000" y="2150000"/>
-            <a:ext cx="2163600" cy="2000100"/>
+            <a:ext cx="2255100" cy="2000100"/>
           </a:xfrm>
           <a:prstGeom prst="roundRect">
             <a:avLst>
@@ -51959,8 +52246,8 @@
         </p:nvSpPr>
         <p:spPr>
           <a:xfrm>
-            <a:off x="920799" y="2300000"/>
-            <a:ext cx="1821900" cy="300000"/>
+            <a:off x="928027" y="2300000"/>
+            <a:ext cx="1899000" cy="300000"/>
           </a:xfrm>
           <a:prstGeom prst="rect">
             <a:avLst/>
@@ -52025,8 +52312,8 @@
         </p:nvSpPr>
         <p:spPr>
           <a:xfrm>
-            <a:off x="920799" y="2630000"/>
-            <a:ext cx="1821900" cy="500100"/>
+            <a:off x="928027" y="2630000"/>
+            <a:ext cx="1899000" cy="500100"/>
           </a:xfrm>
           <a:prstGeom prst="rect">
             <a:avLst/>
@@ -52091,8 +52378,8 @@
         </p:nvSpPr>
         <p:spPr>
           <a:xfrm>
-            <a:off x="920799" y="3200000"/>
-            <a:ext cx="1821900" cy="900000"/>
+            <a:off x="928027" y="3200000"/>
+            <a:ext cx="1899000" cy="900000"/>
           </a:xfrm>
           <a:prstGeom prst="rect">
             <a:avLst/>
@@ -52157,8 +52444,8 @@
         </p:nvSpPr>
         <p:spPr>
           <a:xfrm>
-            <a:off x="3084250" y="2150000"/>
-            <a:ext cx="2163600" cy="2000100"/>
+            <a:off x="3183033" y="2150000"/>
+            <a:ext cx="2255100" cy="2000100"/>
           </a:xfrm>
           <a:prstGeom prst="roundRect">
             <a:avLst>
@@ -52218,8 +52505,8 @@
         </p:nvSpPr>
         <p:spPr>
           <a:xfrm>
-            <a:off x="3255048" y="2300000"/>
-            <a:ext cx="1821900" cy="300000"/>
+            <a:off x="3361059" y="2300000"/>
+            <a:ext cx="1899000" cy="300000"/>
           </a:xfrm>
           <a:prstGeom prst="rect">
             <a:avLst/>
@@ -52284,8 +52571,8 @@
         </p:nvSpPr>
         <p:spPr>
           <a:xfrm>
-            <a:off x="3255048" y="2630000"/>
-            <a:ext cx="1821900" cy="500100"/>
+            <a:off x="3361059" y="2630000"/>
+            <a:ext cx="1899000" cy="500100"/>
           </a:xfrm>
           <a:prstGeom prst="rect">
             <a:avLst/>
@@ -52350,8 +52637,8 @@
         </p:nvSpPr>
         <p:spPr>
           <a:xfrm>
-            <a:off x="3255048" y="3200000"/>
-            <a:ext cx="1821900" cy="900000"/>
+            <a:off x="3361059" y="3200000"/>
+            <a:ext cx="1899000" cy="900000"/>
           </a:xfrm>
           <a:prstGeom prst="rect">
             <a:avLst/>
@@ -52416,8 +52703,8 @@
         </p:nvSpPr>
         <p:spPr>
           <a:xfrm>
-            <a:off x="5418499" y="2150000"/>
-            <a:ext cx="2163600" cy="2000100"/>
+            <a:off x="5616064" y="2150000"/>
+            <a:ext cx="2255100" cy="2000100"/>
           </a:xfrm>
           <a:prstGeom prst="roundRect">
             <a:avLst>
@@ -52477,8 +52764,8 @@
         </p:nvSpPr>
         <p:spPr>
           <a:xfrm>
-            <a:off x="5589298" y="2300000"/>
-            <a:ext cx="1821900" cy="300000"/>
+            <a:off x="5794091" y="2300000"/>
+            <a:ext cx="1899000" cy="300000"/>
           </a:xfrm>
           <a:prstGeom prst="rect">
             <a:avLst/>
@@ -52543,8 +52830,8 @@
         </p:nvSpPr>
         <p:spPr>
           <a:xfrm>
-            <a:off x="5589298" y="2630000"/>
-            <a:ext cx="1821900" cy="500100"/>
+            <a:off x="5794091" y="2630000"/>
+            <a:ext cx="1899000" cy="500100"/>
           </a:xfrm>
           <a:prstGeom prst="rect">
             <a:avLst/>
@@ -52609,8 +52896,8 @@
         </p:nvSpPr>
         <p:spPr>
           <a:xfrm>
-            <a:off x="5589298" y="3200000"/>
-            <a:ext cx="1821900" cy="900000"/>
+            <a:off x="5794091" y="3200000"/>
+            <a:ext cx="1899000" cy="900000"/>
           </a:xfrm>
           <a:prstGeom prst="rect">
             <a:avLst/>
@@ -52676,7 +52963,7 @@
         <p:spPr>
           <a:xfrm>
             <a:off x="750005" y="905100"/>
-            <a:ext cx="1500000" cy="54900"/>
+            <a:ext cx="1563600" cy="54900"/>
           </a:xfrm>
           <a:prstGeom prst="rect">
             <a:avLst/>
@@ -53066,7 +53353,7 @@
         <p:spPr>
           <a:xfrm>
             <a:off x="750000" y="500000"/>
-            <a:ext cx="5950000" cy="900000"/>
+            <a:ext cx="7143000" cy="900000"/>
           </a:xfrm>
           <a:prstGeom prst="rect">
             <a:avLst/>
@@ -53132,7 +53419,7 @@
         <p:spPr>
           <a:xfrm>
             <a:off x="750000" y="1330000"/>
-            <a:ext cx="5950000" cy="400000"/>
+            <a:ext cx="7143000" cy="399900"/>
           </a:xfrm>
           <a:prstGeom prst="rect">
             <a:avLst/>
@@ -53198,7 +53485,7 @@
         <p:spPr>
           <a:xfrm>
             <a:off x="750000" y="1750000"/>
-            <a:ext cx="2800000" cy="600000"/>
+            <a:ext cx="3361500" cy="600000"/>
           </a:xfrm>
           <a:prstGeom prst="rect">
             <a:avLst/>
@@ -53264,7 +53551,7 @@
         <p:spPr>
           <a:xfrm>
             <a:off x="750000" y="2430000"/>
-            <a:ext cx="2800000" cy="300000"/>
+            <a:ext cx="3361500" cy="300000"/>
           </a:xfrm>
           <a:prstGeom prst="rect">
             <a:avLst/>
@@ -53330,7 +53617,7 @@
         <p:spPr>
           <a:xfrm>
             <a:off x="750000" y="2700000"/>
-            <a:ext cx="2800000" cy="250000"/>
+            <a:ext cx="3361500" cy="249900"/>
           </a:xfrm>
           <a:prstGeom prst="rect">
             <a:avLst/>
@@ -53395,8 +53682,8 @@
         </p:nvSpPr>
         <p:spPr>
           <a:xfrm>
-            <a:off x="3750000" y="1750000"/>
-            <a:ext cx="2800000" cy="600000"/>
+            <a:off x="4351500" y="1750000"/>
+            <a:ext cx="3361500" cy="600000"/>
           </a:xfrm>
           <a:prstGeom prst="rect">
             <a:avLst/>
@@ -53461,8 +53748,8 @@
         </p:nvSpPr>
         <p:spPr>
           <a:xfrm>
-            <a:off x="3750000" y="2430000"/>
-            <a:ext cx="2800000" cy="300000"/>
+            <a:off x="4351500" y="2430000"/>
+            <a:ext cx="3361500" cy="300000"/>
           </a:xfrm>
           <a:prstGeom prst="rect">
             <a:avLst/>
@@ -53527,8 +53814,8 @@
         </p:nvSpPr>
         <p:spPr>
           <a:xfrm>
-            <a:off x="3750000" y="2700000"/>
-            <a:ext cx="2800000" cy="250000"/>
+            <a:off x="4351500" y="2700000"/>
+            <a:ext cx="3361500" cy="249900"/>
           </a:xfrm>
           <a:prstGeom prst="rect">
             <a:avLst/>
@@ -53594,7 +53881,7 @@
         <p:spPr>
           <a:xfrm>
             <a:off x="750000" y="3000000"/>
-            <a:ext cx="2800000" cy="600000"/>
+            <a:ext cx="3361500" cy="600000"/>
           </a:xfrm>
           <a:prstGeom prst="rect">
             <a:avLst/>
@@ -53660,7 +53947,7 @@
         <p:spPr>
           <a:xfrm>
             <a:off x="750000" y="3680000"/>
-            <a:ext cx="2800000" cy="300000"/>
+            <a:ext cx="3361500" cy="300000"/>
           </a:xfrm>
           <a:prstGeom prst="rect">
             <a:avLst/>
@@ -53726,7 +54013,7 @@
         <p:spPr>
           <a:xfrm>
             <a:off x="750000" y="3950000"/>
-            <a:ext cx="2800000" cy="250000"/>
+            <a:ext cx="3361500" cy="249900"/>
           </a:xfrm>
           <a:prstGeom prst="rect">
             <a:avLst/>
@@ -53791,8 +54078,8 @@
         </p:nvSpPr>
         <p:spPr>
           <a:xfrm>
-            <a:off x="3750000" y="3000000"/>
-            <a:ext cx="2800000" cy="600000"/>
+            <a:off x="4351500" y="3000000"/>
+            <a:ext cx="3361500" cy="600000"/>
           </a:xfrm>
           <a:prstGeom prst="rect">
             <a:avLst/>
@@ -53857,8 +54144,8 @@
         </p:nvSpPr>
         <p:spPr>
           <a:xfrm>
-            <a:off x="3750000" y="3680000"/>
-            <a:ext cx="2800000" cy="300000"/>
+            <a:off x="4351500" y="3680000"/>
+            <a:ext cx="3361500" cy="300000"/>
           </a:xfrm>
           <a:prstGeom prst="rect">
             <a:avLst/>
@@ -53923,8 +54210,8 @@
         </p:nvSpPr>
         <p:spPr>
           <a:xfrm>
-            <a:off x="3750000" y="3950000"/>
-            <a:ext cx="2800000" cy="250000"/>
+            <a:off x="4351500" y="3950000"/>
+            <a:ext cx="3361500" cy="249900"/>
           </a:xfrm>
           <a:prstGeom prst="rect">
             <a:avLst/>
@@ -53989,8 +54276,8 @@
         </p:nvSpPr>
         <p:spPr>
           <a:xfrm>
-            <a:off x="750005" y="905100"/>
-            <a:ext cx="1500000" cy="54900"/>
+            <a:off x="750006" y="905100"/>
+            <a:ext cx="1800600" cy="54900"/>
           </a:xfrm>
           <a:prstGeom prst="rect">
             <a:avLst/>
@@ -54086,7 +54373,7 @@
         <p:spPr>
           <a:xfrm>
             <a:off x="750000" y="500000"/>
-            <a:ext cx="5950000" cy="900000"/>
+            <a:ext cx="7128600" cy="900000"/>
           </a:xfrm>
           <a:prstGeom prst="rect">
             <a:avLst/>
@@ -54151,8 +54438,8 @@
         </p:nvSpPr>
         <p:spPr>
           <a:xfrm>
-            <a:off x="750000" y="1105719"/>
-            <a:ext cx="5949900" cy="399900"/>
+            <a:off x="750000" y="1105720"/>
+            <a:ext cx="7128300" cy="399900"/>
           </a:xfrm>
           <a:prstGeom prst="rect">
             <a:avLst/>
@@ -54217,8 +54504,8 @@
         </p:nvSpPr>
         <p:spPr>
           <a:xfrm>
-            <a:off x="750000" y="1421151"/>
-            <a:ext cx="5949900" cy="500100"/>
+            <a:off x="750000" y="1421152"/>
+            <a:ext cx="7128300" cy="500100"/>
           </a:xfrm>
           <a:prstGeom prst="rect">
             <a:avLst/>
@@ -54283,8 +54570,8 @@
         </p:nvSpPr>
         <p:spPr>
           <a:xfrm>
-            <a:off x="750000" y="2392044"/>
-            <a:ext cx="2850000" cy="1899900"/>
+            <a:off x="750000" y="2392047"/>
+            <a:ext cx="3414600" cy="1899900"/>
           </a:xfrm>
           <a:prstGeom prst="roundRect">
             <a:avLst>
@@ -54344,8 +54631,8 @@
         </p:nvSpPr>
         <p:spPr>
           <a:xfrm>
-            <a:off x="900000" y="2532044"/>
-            <a:ext cx="2550000" cy="300000"/>
+            <a:off x="929709" y="2532047"/>
+            <a:ext cx="3055200" cy="300000"/>
           </a:xfrm>
           <a:prstGeom prst="rect">
             <a:avLst/>
@@ -54410,8 +54697,8 @@
         </p:nvSpPr>
         <p:spPr>
           <a:xfrm>
-            <a:off x="900000" y="2842050"/>
-            <a:ext cx="2613600" cy="399900"/>
+            <a:off x="929709" y="2842054"/>
+            <a:ext cx="3131400" cy="399900"/>
           </a:xfrm>
           <a:prstGeom prst="rect">
             <a:avLst/>
@@ -54476,8 +54763,8 @@
         </p:nvSpPr>
         <p:spPr>
           <a:xfrm>
-            <a:off x="900000" y="3366805"/>
-            <a:ext cx="2550000" cy="900000"/>
+            <a:off x="929709" y="3366810"/>
+            <a:ext cx="3055200" cy="900000"/>
           </a:xfrm>
           <a:prstGeom prst="rect">
             <a:avLst/>
@@ -54622,8 +54909,8 @@
         </p:nvSpPr>
         <p:spPr>
           <a:xfrm>
-            <a:off x="3850000" y="2392044"/>
-            <a:ext cx="2850000" cy="1899900"/>
+            <a:off x="4463995" y="2392047"/>
+            <a:ext cx="3414600" cy="1899900"/>
           </a:xfrm>
           <a:prstGeom prst="roundRect">
             <a:avLst>
@@ -54683,8 +54970,8 @@
         </p:nvSpPr>
         <p:spPr>
           <a:xfrm>
-            <a:off x="4000000" y="2532044"/>
-            <a:ext cx="2550000" cy="300000"/>
+            <a:off x="4643705" y="2532047"/>
+            <a:ext cx="3055200" cy="300000"/>
           </a:xfrm>
           <a:prstGeom prst="rect">
             <a:avLst/>
@@ -54749,8 +55036,8 @@
         </p:nvSpPr>
         <p:spPr>
           <a:xfrm>
-            <a:off x="4000000" y="2842044"/>
-            <a:ext cx="2550000" cy="399900"/>
+            <a:off x="4643705" y="2842048"/>
+            <a:ext cx="3055200" cy="399900"/>
           </a:xfrm>
           <a:prstGeom prst="rect">
             <a:avLst/>
@@ -54815,8 +55102,8 @@
         </p:nvSpPr>
         <p:spPr>
           <a:xfrm>
-            <a:off x="4000000" y="3366805"/>
-            <a:ext cx="2550000" cy="900000"/>
+            <a:off x="4643705" y="3366810"/>
+            <a:ext cx="3055200" cy="900000"/>
           </a:xfrm>
           <a:prstGeom prst="rect">
             <a:avLst/>
@@ -54961,8 +55248,8 @@
         </p:nvSpPr>
         <p:spPr>
           <a:xfrm>
-            <a:off x="750005" y="905100"/>
-            <a:ext cx="1500000" cy="54900"/>
+            <a:off x="750006" y="905101"/>
+            <a:ext cx="1797000" cy="54900"/>
           </a:xfrm>
           <a:prstGeom prst="rect">
             <a:avLst/>
@@ -55058,7 +55345,7 @@
         <p:spPr>
           <a:xfrm>
             <a:off x="750000" y="500000"/>
-            <a:ext cx="5950000" cy="900000"/>
+            <a:ext cx="7164900" cy="900000"/>
           </a:xfrm>
           <a:prstGeom prst="rect">
             <a:avLst/>
@@ -55124,7 +55411,7 @@
         <p:spPr>
           <a:xfrm>
             <a:off x="750000" y="1150576"/>
-            <a:ext cx="5949900" cy="399900"/>
+            <a:ext cx="7164600" cy="399900"/>
           </a:xfrm>
           <a:prstGeom prst="rect">
             <a:avLst/>
@@ -55190,7 +55477,7 @@
         <p:spPr>
           <a:xfrm>
             <a:off x="750000" y="1570576"/>
-            <a:ext cx="5949900" cy="410100"/>
+            <a:ext cx="7164600" cy="410100"/>
           </a:xfrm>
           <a:prstGeom prst="rect">
             <a:avLst/>
@@ -55248,8 +55535,8 @@
         </p:nvSpPr>
         <p:spPr>
           <a:xfrm>
-            <a:off x="830000" y="1650576"/>
-            <a:ext cx="800100" cy="339900"/>
+            <a:off x="846333" y="1650576"/>
+            <a:ext cx="963300" cy="339900"/>
           </a:xfrm>
           <a:prstGeom prst="rect">
             <a:avLst/>
@@ -55314,8 +55601,8 @@
         </p:nvSpPr>
         <p:spPr>
           <a:xfrm>
-            <a:off x="1700000" y="1650576"/>
-            <a:ext cx="1500000" cy="339900"/>
+            <a:off x="1893952" y="1650576"/>
+            <a:ext cx="1806300" cy="339900"/>
           </a:xfrm>
           <a:prstGeom prst="rect">
             <a:avLst/>
@@ -55380,8 +55667,8 @@
         </p:nvSpPr>
         <p:spPr>
           <a:xfrm>
-            <a:off x="3250000" y="1650576"/>
-            <a:ext cx="3380100" cy="339900"/>
+            <a:off x="3760399" y="1650576"/>
+            <a:ext cx="4070100" cy="339900"/>
           </a:xfrm>
           <a:prstGeom prst="rect">
             <a:avLst/>
@@ -55447,7 +55734,7 @@
         <p:spPr>
           <a:xfrm>
             <a:off x="750000" y="2010576"/>
-            <a:ext cx="5949900" cy="410100"/>
+            <a:ext cx="7164600" cy="410100"/>
           </a:xfrm>
           <a:prstGeom prst="rect">
             <a:avLst/>
@@ -55505,8 +55792,8 @@
         </p:nvSpPr>
         <p:spPr>
           <a:xfrm>
-            <a:off x="830000" y="2090576"/>
-            <a:ext cx="800100" cy="339900"/>
+            <a:off x="846333" y="2090576"/>
+            <a:ext cx="963300" cy="339900"/>
           </a:xfrm>
           <a:prstGeom prst="rect">
             <a:avLst/>
@@ -55571,8 +55858,8 @@
         </p:nvSpPr>
         <p:spPr>
           <a:xfrm>
-            <a:off x="1700000" y="2090576"/>
-            <a:ext cx="1500000" cy="339900"/>
+            <a:off x="1893952" y="2090576"/>
+            <a:ext cx="1806300" cy="339900"/>
           </a:xfrm>
           <a:prstGeom prst="rect">
             <a:avLst/>
@@ -55637,8 +55924,8 @@
         </p:nvSpPr>
         <p:spPr>
           <a:xfrm>
-            <a:off x="3250000" y="2090576"/>
-            <a:ext cx="3380100" cy="339900"/>
+            <a:off x="3760399" y="2090576"/>
+            <a:ext cx="4070100" cy="339900"/>
           </a:xfrm>
           <a:prstGeom prst="rect">
             <a:avLst/>
@@ -55704,7 +55991,7 @@
         <p:spPr>
           <a:xfrm>
             <a:off x="750000" y="2450576"/>
-            <a:ext cx="5949900" cy="410100"/>
+            <a:ext cx="7164600" cy="410100"/>
           </a:xfrm>
           <a:prstGeom prst="rect">
             <a:avLst/>
@@ -55762,8 +56049,8 @@
         </p:nvSpPr>
         <p:spPr>
           <a:xfrm>
-            <a:off x="830000" y="2530576"/>
-            <a:ext cx="800100" cy="339900"/>
+            <a:off x="846333" y="2530576"/>
+            <a:ext cx="963300" cy="339900"/>
           </a:xfrm>
           <a:prstGeom prst="rect">
             <a:avLst/>
@@ -55828,8 +56115,8 @@
         </p:nvSpPr>
         <p:spPr>
           <a:xfrm>
-            <a:off x="1700000" y="2530576"/>
-            <a:ext cx="1500000" cy="339900"/>
+            <a:off x="1893952" y="2530576"/>
+            <a:ext cx="1806300" cy="339900"/>
           </a:xfrm>
           <a:prstGeom prst="rect">
             <a:avLst/>
@@ -55894,8 +56181,8 @@
         </p:nvSpPr>
         <p:spPr>
           <a:xfrm>
-            <a:off x="3250000" y="2530576"/>
-            <a:ext cx="3380100" cy="339900"/>
+            <a:off x="3760399" y="2530576"/>
+            <a:ext cx="4070100" cy="339900"/>
           </a:xfrm>
           <a:prstGeom prst="rect">
             <a:avLst/>
@@ -55961,7 +56248,7 @@
         <p:spPr>
           <a:xfrm>
             <a:off x="750000" y="2890576"/>
-            <a:ext cx="5949900" cy="410100"/>
+            <a:ext cx="7164600" cy="410100"/>
           </a:xfrm>
           <a:prstGeom prst="rect">
             <a:avLst/>
@@ -56019,8 +56306,8 @@
         </p:nvSpPr>
         <p:spPr>
           <a:xfrm>
-            <a:off x="830000" y="2970576"/>
-            <a:ext cx="800100" cy="339900"/>
+            <a:off x="846333" y="2970576"/>
+            <a:ext cx="963300" cy="339900"/>
           </a:xfrm>
           <a:prstGeom prst="rect">
             <a:avLst/>
@@ -56085,8 +56372,8 @@
         </p:nvSpPr>
         <p:spPr>
           <a:xfrm>
-            <a:off x="1700000" y="2970576"/>
-            <a:ext cx="1500000" cy="339900"/>
+            <a:off x="1893952" y="2970576"/>
+            <a:ext cx="1806300" cy="339900"/>
           </a:xfrm>
           <a:prstGeom prst="rect">
             <a:avLst/>
@@ -56151,8 +56438,8 @@
         </p:nvSpPr>
         <p:spPr>
           <a:xfrm>
-            <a:off x="3250000" y="2970576"/>
-            <a:ext cx="3380100" cy="339900"/>
+            <a:off x="3760399" y="2970576"/>
+            <a:ext cx="4070100" cy="339900"/>
           </a:xfrm>
           <a:prstGeom prst="rect">
             <a:avLst/>
@@ -56218,7 +56505,7 @@
         <p:spPr>
           <a:xfrm>
             <a:off x="750000" y="3330576"/>
-            <a:ext cx="5949900" cy="410100"/>
+            <a:ext cx="7164600" cy="410100"/>
           </a:xfrm>
           <a:prstGeom prst="rect">
             <a:avLst/>
@@ -56276,8 +56563,8 @@
         </p:nvSpPr>
         <p:spPr>
           <a:xfrm>
-            <a:off x="830000" y="3410576"/>
-            <a:ext cx="800100" cy="339900"/>
+            <a:off x="846333" y="3410576"/>
+            <a:ext cx="963300" cy="339900"/>
           </a:xfrm>
           <a:prstGeom prst="rect">
             <a:avLst/>
@@ -56342,8 +56629,8 @@
         </p:nvSpPr>
         <p:spPr>
           <a:xfrm>
-            <a:off x="1700000" y="3410576"/>
-            <a:ext cx="1500000" cy="339900"/>
+            <a:off x="1893952" y="3410576"/>
+            <a:ext cx="1806300" cy="339900"/>
           </a:xfrm>
           <a:prstGeom prst="rect">
             <a:avLst/>
@@ -56408,8 +56695,8 @@
         </p:nvSpPr>
         <p:spPr>
           <a:xfrm>
-            <a:off x="3250000" y="3410576"/>
-            <a:ext cx="3380100" cy="339900"/>
+            <a:off x="3760399" y="3410576"/>
+            <a:ext cx="4070100" cy="339900"/>
           </a:xfrm>
           <a:prstGeom prst="rect">
             <a:avLst/>
@@ -56475,7 +56762,7 @@
         <p:spPr>
           <a:xfrm>
             <a:off x="750000" y="3770576"/>
-            <a:ext cx="5949900" cy="410100"/>
+            <a:ext cx="7164600" cy="410100"/>
           </a:xfrm>
           <a:prstGeom prst="rect">
             <a:avLst/>
@@ -56533,8 +56820,8 @@
         </p:nvSpPr>
         <p:spPr>
           <a:xfrm>
-            <a:off x="830000" y="3850576"/>
-            <a:ext cx="800100" cy="339900"/>
+            <a:off x="846333" y="3850576"/>
+            <a:ext cx="963300" cy="339900"/>
           </a:xfrm>
           <a:prstGeom prst="rect">
             <a:avLst/>
@@ -56599,8 +56886,8 @@
         </p:nvSpPr>
         <p:spPr>
           <a:xfrm>
-            <a:off x="1700000" y="3850576"/>
-            <a:ext cx="1500000" cy="339900"/>
+            <a:off x="1893952" y="3850576"/>
+            <a:ext cx="1806300" cy="339900"/>
           </a:xfrm>
           <a:prstGeom prst="rect">
             <a:avLst/>
@@ -56665,8 +56952,8 @@
         </p:nvSpPr>
         <p:spPr>
           <a:xfrm>
-            <a:off x="3250000" y="3850576"/>
-            <a:ext cx="3380100" cy="339900"/>
+            <a:off x="3760399" y="3850576"/>
+            <a:ext cx="4070100" cy="339900"/>
           </a:xfrm>
           <a:prstGeom prst="rect">
             <a:avLst/>
@@ -56732,7 +57019,7 @@
         <p:spPr>
           <a:xfrm>
             <a:off x="750000" y="4380000"/>
-            <a:ext cx="5950000" cy="300000"/>
+            <a:ext cx="7164900" cy="300000"/>
           </a:xfrm>
           <a:prstGeom prst="rect">
             <a:avLst/>
@@ -56797,8 +57084,8 @@
         </p:nvSpPr>
         <p:spPr>
           <a:xfrm>
-            <a:off x="750005" y="905100"/>
-            <a:ext cx="1500000" cy="54900"/>
+            <a:off x="750006" y="905100"/>
+            <a:ext cx="1806300" cy="54900"/>
           </a:xfrm>
           <a:prstGeom prst="rect">
             <a:avLst/>
